--- a/presentation/쉐어택_발표_v2.pptx
+++ b/presentation/쉐어택_발표_v2.pptx
@@ -3549,8 +3549,8 @@
         </p:nvSpPr>
         <p:spPr>
           <a:xfrm>
-            <a:off x="502920" y="6446520"/>
-            <a:ext cx="10607040" cy="256032"/>
+            <a:off x="502920" y="6419088"/>
+            <a:ext cx="10607040" cy="292608"/>
           </a:xfrm>
           <a:prstGeom prst="rect">
             <a:avLst/>
@@ -3566,7 +3566,7 @@
               <a:buNone/>
             </a:pPr>
             <a:r>
-              <a:rPr lang="ko-KR" altLang="en-US" sz="900" dirty="0">
+              <a:rPr lang="ko-KR" altLang="en-US" sz="1050" dirty="0">
                 <a:solidFill>
                   <a:srgbClr val="A9B8B1"/>
                 </a:solidFill>
@@ -3576,7 +3576,7 @@
               </a:rPr>
               <a:t>출처: TIMS 2025 격자·지자체 영업통계(국토교통부), 청주시 요금 보도(천지일보·충청일보)</a:t>
             </a:r>
-            <a:endParaRPr lang="ko-KR" altLang="en-US" sz="900" dirty="0"/>
+            <a:endParaRPr lang="ko-KR" altLang="en-US" sz="1050" dirty="0"/>
           </a:p>
         </p:txBody>
       </p:sp>
@@ -4005,8 +4005,8 @@
         </p:nvSpPr>
         <p:spPr>
           <a:xfrm>
-            <a:off x="777240" y="2880360"/>
-            <a:ext cx="5029200" cy="731520"/>
+            <a:off x="777240" y="2852928"/>
+            <a:ext cx="5029200" cy="777240"/>
           </a:xfrm>
           <a:prstGeom prst="rect">
             <a:avLst/>
@@ -4023,7 +4023,7 @@
               <a:buChar char="•"/>
             </a:pPr>
             <a:r>
-              <a:rPr lang="ko-KR" altLang="en-US" sz="1100" dirty="0">
+              <a:rPr lang="ko-KR" altLang="en-US" sz="1250" dirty="0">
                 <a:solidFill>
                   <a:srgbClr val="10231C"/>
                 </a:solidFill>
@@ -4033,7 +4033,7 @@
               </a:rPr>
               <a:t>😣 35% 할증, 막차 끊기면 대안 없음</a:t>
             </a:r>
-            <a:endParaRPr lang="ko-KR" altLang="en-US" sz="1100" dirty="0"/>
+            <a:endParaRPr lang="ko-KR" altLang="en-US" sz="1250" dirty="0"/>
           </a:p>
           <a:p>
             <a:pPr eaLnBrk="0" latinLnBrk="0" marL="342900" indent="-342900">
@@ -4041,7 +4041,7 @@
               <a:buChar char="•"/>
             </a:pPr>
             <a:r>
-              <a:rPr lang="ko-KR" altLang="en-US" sz="1100" dirty="0">
+              <a:rPr lang="ko-KR" altLang="en-US" sz="1250" dirty="0">
                 <a:solidFill>
                   <a:srgbClr val="10231C"/>
                 </a:solidFill>
@@ -4051,7 +4051,7 @@
               </a:rPr>
               <a:t>😶 혼자 타기 부담, 같은 방향 사람을 못 찾음</a:t>
             </a:r>
-            <a:endParaRPr lang="ko-KR" altLang="en-US" sz="1100" dirty="0"/>
+            <a:endParaRPr lang="ko-KR" altLang="en-US" sz="1250" dirty="0"/>
           </a:p>
         </p:txBody>
       </p:sp>
@@ -4280,8 +4280,8 @@
         </p:nvSpPr>
         <p:spPr>
           <a:xfrm>
-            <a:off x="6473952" y="2880360"/>
-            <a:ext cx="5029200" cy="731520"/>
+            <a:off x="6473952" y="2852928"/>
+            <a:ext cx="5029200" cy="777240"/>
           </a:xfrm>
           <a:prstGeom prst="rect">
             <a:avLst/>
@@ -4298,7 +4298,7 @@
               <a:buChar char="•"/>
             </a:pPr>
             <a:r>
-              <a:rPr lang="ko-KR" altLang="en-US" sz="1100" dirty="0">
+              <a:rPr lang="ko-KR" altLang="en-US" sz="1250" dirty="0">
                 <a:solidFill>
                   <a:srgbClr val="10231C"/>
                 </a:solidFill>
@@ -4308,7 +4308,7 @@
               </a:rPr>
               <a:t>🛣️ 읍·면 하차 후 빈 차 귀로 = 연료·시간 손해</a:t>
             </a:r>
-            <a:endParaRPr lang="ko-KR" altLang="en-US" sz="1100" dirty="0"/>
+            <a:endParaRPr lang="ko-KR" altLang="en-US" sz="1250" dirty="0"/>
           </a:p>
           <a:p>
             <a:pPr eaLnBrk="0" latinLnBrk="0" marL="342900" indent="-342900">
@@ -4316,7 +4316,7 @@
               <a:buChar char="•"/>
             </a:pPr>
             <a:r>
-              <a:rPr lang="ko-KR" altLang="en-US" sz="1100" dirty="0">
+              <a:rPr lang="ko-KR" altLang="en-US" sz="1250" dirty="0">
                 <a:solidFill>
                   <a:srgbClr val="10231C"/>
                 </a:solidFill>
@@ -4326,7 +4326,7 @@
               </a:rPr>
               <a:t>📱 호출 앱 수수료는 그대로</a:t>
             </a:r>
-            <a:endParaRPr lang="ko-KR" altLang="en-US" sz="1100" dirty="0"/>
+            <a:endParaRPr lang="ko-KR" altLang="en-US" sz="1250" dirty="0"/>
           </a:p>
         </p:txBody>
       </p:sp>
@@ -5088,8 +5088,8 @@
         </p:nvSpPr>
         <p:spPr>
           <a:xfrm>
-            <a:off x="11155680" y="6446520"/>
-            <a:ext cx="548640" cy="256032"/>
+            <a:off x="11064240" y="6419088"/>
+            <a:ext cx="640080" cy="292608"/>
           </a:xfrm>
           <a:prstGeom prst="rect">
             <a:avLst/>
@@ -5105,7 +5105,7 @@
               <a:buNone/>
             </a:pPr>
             <a:r>
-              <a:rPr lang="ko-KR" altLang="en-US" sz="900" dirty="0">
+              <a:rPr lang="ko-KR" altLang="en-US" sz="1050" dirty="0">
                 <a:solidFill>
                   <a:srgbClr val="4A5A54"/>
                 </a:solidFill>
@@ -5115,7 +5115,7 @@
               </a:rPr>
               <a:t>2 / 8</a:t>
             </a:r>
-            <a:endParaRPr lang="ko-KR" altLang="en-US" sz="900" dirty="0"/>
+            <a:endParaRPr lang="ko-KR" altLang="en-US" sz="1050" dirty="0"/>
           </a:p>
         </p:txBody>
       </p:sp>
@@ -5998,8 +5998,8 @@
         </p:nvSpPr>
         <p:spPr>
           <a:xfrm>
-            <a:off x="502920" y="6446520"/>
-            <a:ext cx="10607040" cy="256032"/>
+            <a:off x="502920" y="6419088"/>
+            <a:ext cx="10607040" cy="292608"/>
           </a:xfrm>
           <a:prstGeom prst="rect">
             <a:avLst/>
@@ -6015,7 +6015,7 @@
               <a:buNone/>
             </a:pPr>
             <a:r>
-              <a:rPr lang="ko-KR" altLang="en-US" sz="900" dirty="0">
+              <a:rPr lang="ko-KR" altLang="en-US" sz="1050" dirty="0">
                 <a:solidFill>
                   <a:srgbClr val="4A5A54"/>
                 </a:solidFill>
@@ -6025,7 +6025,7 @@
               </a:rPr>
               <a:t>지수 = 승차 밀도 0.5 + 버스정류장 부족 0.25 + 시내까지 거리 0.25 · 시내행 비율은 KTDB 2024 평일 OD 기준 추정</a:t>
             </a:r>
-            <a:endParaRPr lang="ko-KR" altLang="en-US" sz="900" dirty="0"/>
+            <a:endParaRPr lang="ko-KR" altLang="en-US" sz="1050" dirty="0"/>
           </a:p>
         </p:txBody>
       </p:sp>
@@ -6037,8 +6037,8 @@
         </p:nvSpPr>
         <p:spPr>
           <a:xfrm>
-            <a:off x="11155680" y="6446520"/>
-            <a:ext cx="548640" cy="256032"/>
+            <a:off x="11064240" y="6419088"/>
+            <a:ext cx="640080" cy="292608"/>
           </a:xfrm>
           <a:prstGeom prst="rect">
             <a:avLst/>
@@ -6054,7 +6054,7 @@
               <a:buNone/>
             </a:pPr>
             <a:r>
-              <a:rPr lang="ko-KR" altLang="en-US" sz="900" dirty="0">
+              <a:rPr lang="ko-KR" altLang="en-US" sz="1050" dirty="0">
                 <a:solidFill>
                   <a:srgbClr val="4A5A54"/>
                 </a:solidFill>
@@ -6064,7 +6064,7 @@
               </a:rPr>
               <a:t>3 / 8</a:t>
             </a:r>
-            <a:endParaRPr lang="ko-KR" altLang="en-US" sz="900" dirty="0"/>
+            <a:endParaRPr lang="ko-KR" altLang="en-US" sz="1050" dirty="0"/>
           </a:p>
         </p:txBody>
       </p:sp>
@@ -6546,7 +6546,7 @@
               <a:buNone/>
             </a:pPr>
             <a:r>
-              <a:rPr lang="ko-KR" altLang="en-US" sz="1150" dirty="0">
+              <a:rPr lang="ko-KR" altLang="en-US" sz="1250" dirty="0">
                 <a:solidFill>
                   <a:srgbClr val="10231C"/>
                 </a:solidFill>
@@ -6556,7 +6556,7 @@
               </a:rPr>
               <a:t>오송역·산단 ↔ 시내 이동</a:t>
             </a:r>
-            <a:endParaRPr lang="ko-KR" altLang="en-US" sz="1150" dirty="0"/>
+            <a:endParaRPr lang="ko-KR" altLang="en-US" sz="1250" dirty="0"/>
           </a:p>
         </p:txBody>
       </p:sp>
@@ -6619,7 +6619,7 @@
               <a:buNone/>
             </a:pPr>
             <a:r>
-              <a:rPr lang="ko-KR" altLang="en-US" sz="1150" dirty="0">
+              <a:rPr lang="ko-KR" altLang="en-US" sz="1250" dirty="0">
                 <a:solidFill>
                   <a:srgbClr val="10231C"/>
                 </a:solidFill>
@@ -6629,7 +6629,7 @@
               </a:rPr>
               <a:t>하루 수입 올리기</a:t>
             </a:r>
-            <a:endParaRPr lang="ko-KR" altLang="en-US" sz="1150" dirty="0"/>
+            <a:endParaRPr lang="ko-KR" altLang="en-US" sz="1250" dirty="0"/>
           </a:p>
         </p:txBody>
       </p:sp>
@@ -6765,7 +6765,7 @@
               <a:buNone/>
             </a:pPr>
             <a:r>
-              <a:rPr lang="ko-KR" altLang="en-US" sz="1150" dirty="0">
+              <a:rPr lang="ko-KR" altLang="en-US" sz="1250" dirty="0">
                 <a:solidFill>
                   <a:srgbClr val="10231C"/>
                 </a:solidFill>
@@ -6775,7 +6775,7 @@
               </a:rPr>
               <a:t>35% 할증, 막차 끊김, 혼자 타는 부담</a:t>
             </a:r>
-            <a:endParaRPr lang="ko-KR" altLang="en-US" sz="1150" dirty="0"/>
+            <a:endParaRPr lang="ko-KR" altLang="en-US" sz="1250" dirty="0"/>
           </a:p>
         </p:txBody>
       </p:sp>
@@ -6838,7 +6838,7 @@
               <a:buNone/>
             </a:pPr>
             <a:r>
-              <a:rPr lang="ko-KR" altLang="en-US" sz="1150" dirty="0">
+              <a:rPr lang="ko-KR" altLang="en-US" sz="1250" dirty="0">
                 <a:solidFill>
                   <a:srgbClr val="10231C"/>
                 </a:solidFill>
@@ -6848,7 +6848,7 @@
               </a:rPr>
               <a:t>읍·면 하차 후 빈 차 귀로, 호출 수수료</a:t>
             </a:r>
-            <a:endParaRPr lang="ko-KR" altLang="en-US" sz="1150" dirty="0"/>
+            <a:endParaRPr lang="ko-KR" altLang="en-US" sz="1250" dirty="0"/>
           </a:p>
         </p:txBody>
       </p:sp>
@@ -6984,7 +6984,7 @@
               <a:buNone/>
             </a:pPr>
             <a:r>
-              <a:rPr lang="ko-KR" altLang="en-US" sz="1150" dirty="0">
+              <a:rPr lang="ko-KR" altLang="en-US" sz="1250" dirty="0">
                 <a:solidFill>
                   <a:srgbClr val="10231C"/>
                 </a:solidFill>
@@ -6994,7 +6994,7 @@
               </a:rPr>
               <a:t>싸고 빠른 귀가, 같은 방향 동행</a:t>
             </a:r>
-            <a:endParaRPr lang="ko-KR" altLang="en-US" sz="1150" dirty="0"/>
+            <a:endParaRPr lang="ko-KR" altLang="en-US" sz="1250" dirty="0"/>
           </a:p>
         </p:txBody>
       </p:sp>
@@ -7057,7 +7057,7 @@
               <a:buNone/>
             </a:pPr>
             <a:r>
-              <a:rPr lang="ko-KR" altLang="en-US" sz="1150" dirty="0">
+              <a:rPr lang="ko-KR" altLang="en-US" sz="1250" dirty="0">
                 <a:solidFill>
                   <a:srgbClr val="10231C"/>
                 </a:solidFill>
@@ -7067,7 +7067,7 @@
               </a:rPr>
               <a:t>돌아가는 길에도 손님</a:t>
             </a:r>
-            <a:endParaRPr lang="ko-KR" altLang="en-US" sz="1150" dirty="0"/>
+            <a:endParaRPr lang="ko-KR" altLang="en-US" sz="1250" dirty="0"/>
           </a:p>
         </p:txBody>
       </p:sp>
@@ -7203,7 +7203,7 @@
               <a:buNone/>
             </a:pPr>
             <a:r>
-              <a:rPr lang="ko-KR" altLang="en-US" sz="1150" dirty="0">
+              <a:rPr lang="ko-KR" altLang="en-US" sz="1250" dirty="0">
                 <a:solidFill>
                   <a:srgbClr val="10231C"/>
                 </a:solidFill>
@@ -7213,7 +7213,7 @@
               </a:rPr>
               <a:t>주소·GPS 검색, 요금 비교, 주변 모집, 왕복 매칭</a:t>
             </a:r>
-            <a:endParaRPr lang="ko-KR" altLang="en-US" sz="1150" dirty="0"/>
+            <a:endParaRPr lang="ko-KR" altLang="en-US" sz="1250" dirty="0"/>
           </a:p>
         </p:txBody>
       </p:sp>
@@ -7276,7 +7276,7 @@
               <a:buNone/>
             </a:pPr>
             <a:r>
-              <a:rPr lang="ko-KR" altLang="en-US" sz="1150" dirty="0">
+              <a:rPr lang="ko-KR" altLang="en-US" sz="1250" dirty="0">
                 <a:solidFill>
                   <a:srgbClr val="10231C"/>
                 </a:solidFill>
@@ -7286,7 +7286,7 @@
               </a:rPr>
               <a:t>귀로 손님 대기 현황, 빈 차 vs 귀로 수입 비교</a:t>
             </a:r>
-            <a:endParaRPr lang="ko-KR" altLang="en-US" sz="1150" dirty="0"/>
+            <a:endParaRPr lang="ko-KR" altLang="en-US" sz="1250" dirty="0"/>
           </a:p>
         </p:txBody>
       </p:sp>
@@ -7422,7 +7422,7 @@
               <a:buNone/>
             </a:pPr>
             <a:r>
-              <a:rPr lang="ko-KR" altLang="en-US" sz="1150" dirty="0">
+              <a:rPr lang="ko-KR" altLang="en-US" sz="1250" dirty="0">
                 <a:solidFill>
                   <a:srgbClr val="10231C"/>
                 </a:solidFill>
@@ -7432,14 +7432,14 @@
               </a:rPr>
               <a:t>3명이면 1인 5,900원 (혼자 17,500원)</a:t>
             </a:r>
-            <a:endParaRPr lang="ko-KR" altLang="en-US" sz="1150" dirty="0"/>
-          </a:p>
-          <a:p>
-            <a:pPr eaLnBrk="0" latinLnBrk="0" indent="0" marL="0">
-              <a:buNone/>
-            </a:pPr>
-            <a:r>
-              <a:rPr lang="ko-KR" altLang="en-US" sz="1150" dirty="0">
+            <a:endParaRPr lang="ko-KR" altLang="en-US" sz="1250" dirty="0"/>
+          </a:p>
+          <a:p>
+            <a:pPr eaLnBrk="0" latinLnBrk="0" indent="0" marL="0">
+              <a:buNone/>
+            </a:pPr>
+            <a:r>
+              <a:rPr lang="ko-KR" altLang="en-US" sz="1250" dirty="0">
                 <a:solidFill>
                   <a:srgbClr val="10231C"/>
                 </a:solidFill>
@@ -7449,7 +7449,7 @@
               </a:rPr>
               <a:t>왕복 매칭이면 양쪽 할증 없음</a:t>
             </a:r>
-            <a:endParaRPr lang="ko-KR" altLang="en-US" sz="1150" dirty="0"/>
+            <a:endParaRPr lang="ko-KR" altLang="en-US" sz="1250" dirty="0"/>
           </a:p>
         </p:txBody>
       </p:sp>
@@ -7512,7 +7512,7 @@
               <a:buNone/>
             </a:pPr>
             <a:r>
-              <a:rPr lang="ko-KR" altLang="en-US" sz="1150" dirty="0">
+              <a:rPr lang="ko-KR" altLang="en-US" sz="1250" dirty="0">
                 <a:solidFill>
                   <a:srgbClr val="10231C"/>
                 </a:solidFill>
@@ -7522,7 +7522,7 @@
               </a:rPr>
               <a:t>빈 차 0원 → 귀로 손님 +17,500원</a:t>
             </a:r>
-            <a:endParaRPr lang="ko-KR" altLang="en-US" sz="1150" dirty="0"/>
+            <a:endParaRPr lang="ko-KR" altLang="en-US" sz="1250" dirty="0"/>
           </a:p>
         </p:txBody>
       </p:sp>
@@ -7658,7 +7658,7 @@
               <a:buNone/>
             </a:pPr>
             <a:r>
-              <a:rPr lang="ko-KR" altLang="en-US" sz="1150" dirty="0">
+              <a:rPr lang="ko-KR" altLang="en-US" sz="1250" dirty="0">
                 <a:solidFill>
                   <a:srgbClr val="10231C"/>
                 </a:solidFill>
@@ -7668,7 +7668,7 @@
               </a:rPr>
               <a:t>KTX 도착·막차 맞춤 모집, 지인 탑승 알림</a:t>
             </a:r>
-            <a:endParaRPr lang="ko-KR" altLang="en-US" sz="1150" dirty="0"/>
+            <a:endParaRPr lang="ko-KR" altLang="en-US" sz="1250" dirty="0"/>
           </a:p>
         </p:txBody>
       </p:sp>
@@ -7731,7 +7731,7 @@
               <a:buNone/>
             </a:pPr>
             <a:r>
-              <a:rPr lang="ko-KR" altLang="en-US" sz="1150" dirty="0">
+              <a:rPr lang="ko-KR" altLang="en-US" sz="1250" dirty="0">
                 <a:solidFill>
                   <a:srgbClr val="10231C"/>
                 </a:solidFill>
@@ -7741,7 +7741,7 @@
               </a:rPr>
               <a:t>참여 기사 하루 +5,774원 (시뮬레이션)</a:t>
             </a:r>
-            <a:endParaRPr lang="ko-KR" altLang="en-US" sz="1150" dirty="0"/>
+            <a:endParaRPr lang="ko-KR" altLang="en-US" sz="1250" dirty="0"/>
           </a:p>
         </p:txBody>
       </p:sp>
@@ -7753,8 +7753,8 @@
         </p:nvSpPr>
         <p:spPr>
           <a:xfrm>
-            <a:off x="502920" y="6446520"/>
-            <a:ext cx="10607040" cy="256032"/>
+            <a:off x="502920" y="6419088"/>
+            <a:ext cx="10607040" cy="292608"/>
           </a:xfrm>
           <a:prstGeom prst="rect">
             <a:avLst/>
@@ -7770,7 +7770,7 @@
               <a:buNone/>
             </a:pPr>
             <a:r>
-              <a:rPr lang="ko-KR" altLang="en-US" sz="900" dirty="0">
+              <a:rPr lang="ko-KR" altLang="en-US" sz="1050" dirty="0">
                 <a:solidFill>
                   <a:srgbClr val="4A5A54"/>
                 </a:solidFill>
@@ -7780,7 +7780,7 @@
               </a:rPr>
               <a:t>불편 해소·이득 창출의 금액은 오송역→가경동(13.8km) 예시와 행위자 시뮬레이션(앱 이용 30%) 기준</a:t>
             </a:r>
-            <a:endParaRPr lang="ko-KR" altLang="en-US" sz="900" dirty="0"/>
+            <a:endParaRPr lang="ko-KR" altLang="en-US" sz="1050" dirty="0"/>
           </a:p>
         </p:txBody>
       </p:sp>
@@ -7792,8 +7792,8 @@
         </p:nvSpPr>
         <p:spPr>
           <a:xfrm>
-            <a:off x="11155680" y="6446520"/>
-            <a:ext cx="548640" cy="256032"/>
+            <a:off x="11064240" y="6419088"/>
+            <a:ext cx="640080" cy="292608"/>
           </a:xfrm>
           <a:prstGeom prst="rect">
             <a:avLst/>
@@ -7809,7 +7809,7 @@
               <a:buNone/>
             </a:pPr>
             <a:r>
-              <a:rPr lang="ko-KR" altLang="en-US" sz="900" dirty="0">
+              <a:rPr lang="ko-KR" altLang="en-US" sz="1050" dirty="0">
                 <a:solidFill>
                   <a:srgbClr val="4A5A54"/>
                 </a:solidFill>
@@ -7819,7 +7819,7 @@
               </a:rPr>
               <a:t>4 / 8</a:t>
             </a:r>
-            <a:endParaRPr lang="ko-KR" altLang="en-US" sz="900" dirty="0"/>
+            <a:endParaRPr lang="ko-KR" altLang="en-US" sz="1050" dirty="0"/>
           </a:p>
         </p:txBody>
       </p:sp>
@@ -8032,11 +8032,11 @@
         <p:spPr>
           <a:xfrm>
             <a:off x="502920" y="1325880"/>
-            <a:ext cx="1956816" cy="3611880"/>
+            <a:ext cx="2231136" cy="3611880"/>
           </a:xfrm>
           <a:prstGeom prst="roundRect">
             <a:avLst>
-              <a:gd name="adj" fmla="val 6542"/>
+              <a:gd name="adj" fmla="val 5738"/>
             </a:avLst>
           </a:prstGeom>
           <a:solidFill>
@@ -8073,7 +8073,7 @@
         <p:spPr>
           <a:xfrm>
             <a:off x="566928" y="1389888"/>
-            <a:ext cx="1828800" cy="3474720"/>
+            <a:ext cx="2103120" cy="3474720"/>
           </a:xfrm>
           <a:prstGeom prst="rect">
             <a:avLst/>
@@ -8089,7 +8089,7 @@
         <p:spPr>
           <a:xfrm>
             <a:off x="502920" y="4983480"/>
-            <a:ext cx="1956816" cy="274320"/>
+            <a:ext cx="2231136" cy="274320"/>
           </a:xfrm>
           <a:prstGeom prst="rect">
             <a:avLst/>
@@ -8127,12 +8127,12 @@
         </p:nvSpPr>
         <p:spPr>
           <a:xfrm>
-            <a:off x="2651760" y="1325880"/>
-            <a:ext cx="2093976" cy="3611880"/>
+            <a:off x="2807208" y="1325880"/>
+            <a:ext cx="1956816" cy="3611880"/>
           </a:xfrm>
           <a:prstGeom prst="roundRect">
             <a:avLst>
-              <a:gd name="adj" fmla="val 6114"/>
+              <a:gd name="adj" fmla="val 6542"/>
             </a:avLst>
           </a:prstGeom>
           <a:solidFill>
@@ -8168,8 +8168,8 @@
         </p:blipFill>
         <p:spPr>
           <a:xfrm>
-            <a:off x="2715768" y="1389888"/>
-            <a:ext cx="1965960" cy="3474720"/>
+            <a:off x="2871216" y="1389888"/>
+            <a:ext cx="1828800" cy="3474720"/>
           </a:xfrm>
           <a:prstGeom prst="rect">
             <a:avLst/>
@@ -8184,8 +8184,8 @@
         </p:nvSpPr>
         <p:spPr>
           <a:xfrm>
-            <a:off x="2651760" y="4983480"/>
-            <a:ext cx="2093976" cy="274320"/>
+            <a:off x="2807208" y="4983480"/>
+            <a:ext cx="1956816" cy="274320"/>
           </a:xfrm>
           <a:prstGeom prst="rect">
             <a:avLst/>
@@ -8460,7 +8460,7 @@
         <p:spPr>
           <a:xfrm>
             <a:off x="5138928" y="2286000"/>
-            <a:ext cx="1874520" cy="1051560"/>
+            <a:ext cx="1874520" cy="1097280"/>
           </a:xfrm>
           <a:prstGeom prst="rect">
             <a:avLst/>
@@ -8476,7 +8476,7 @@
               <a:buNone/>
             </a:pPr>
             <a:r>
-              <a:rPr lang="ko-KR" altLang="en-US" sz="1050" dirty="0">
+              <a:rPr lang="ko-KR" altLang="en-US" sz="1150" dirty="0">
                 <a:solidFill>
                   <a:srgbClr val="10231C"/>
                 </a:solidFill>
@@ -8486,7 +8486,7 @@
               </a:rPr>
               <a:t>갈 때 탈 사람이 돌아올 손님을 미리 구함 → 양쪽 할증 0원</a:t>
             </a:r>
-            <a:endParaRPr lang="ko-KR" altLang="en-US" sz="1050" dirty="0"/>
+            <a:endParaRPr lang="ko-KR" altLang="en-US" sz="1150" dirty="0"/>
           </a:p>
         </p:txBody>
       </p:sp>
@@ -8565,7 +8565,7 @@
         <p:spPr>
           <a:xfrm>
             <a:off x="7333488" y="2286000"/>
-            <a:ext cx="1874520" cy="1051560"/>
+            <a:ext cx="1874520" cy="1097280"/>
           </a:xfrm>
           <a:prstGeom prst="rect">
             <a:avLst/>
@@ -8581,7 +8581,7 @@
               <a:buNone/>
             </a:pPr>
             <a:r>
-              <a:rPr lang="ko-KR" altLang="en-US" sz="1050" dirty="0">
+              <a:rPr lang="ko-KR" altLang="en-US" sz="1150" dirty="0">
                 <a:solidFill>
                   <a:srgbClr val="10231C"/>
                 </a:solidFill>
@@ -8591,7 +8591,7 @@
               </a:rPr>
               <a:t>할증 포함 가승인 → 30분 안 귀로 손님 태우면 할증 빼고 결제</a:t>
             </a:r>
-            <a:endParaRPr lang="ko-KR" altLang="en-US" sz="1050" dirty="0"/>
+            <a:endParaRPr lang="ko-KR" altLang="en-US" sz="1150" dirty="0"/>
           </a:p>
         </p:txBody>
       </p:sp>
@@ -8670,7 +8670,7 @@
         <p:spPr>
           <a:xfrm>
             <a:off x="9528048" y="2286000"/>
-            <a:ext cx="1874520" cy="1051560"/>
+            <a:ext cx="1874520" cy="1097280"/>
           </a:xfrm>
           <a:prstGeom prst="rect">
             <a:avLst/>
@@ -8686,7 +8686,7 @@
               <a:buNone/>
             </a:pPr>
             <a:r>
-              <a:rPr lang="ko-KR" altLang="en-US" sz="1050" dirty="0">
+              <a:rPr lang="ko-KR" altLang="en-US" sz="1150" dirty="0">
                 <a:solidFill>
                   <a:srgbClr val="10231C"/>
                 </a:solidFill>
@@ -8696,7 +8696,7 @@
               </a:rPr>
               <a:t>지금처럼 미터기 요금 · 노쇼는 할증분 부담</a:t>
             </a:r>
-            <a:endParaRPr lang="ko-KR" altLang="en-US" sz="1050" dirty="0"/>
+            <a:endParaRPr lang="ko-KR" altLang="en-US" sz="1150" dirty="0"/>
           </a:p>
         </p:txBody>
       </p:sp>
@@ -8737,7 +8737,7 @@
                       <a:pPr eaLnBrk="0" latinLnBrk="0" algn="ctr" indent="0" marL="0">
                         <a:buNone/>
                       </a:pPr>
-                      <a:endParaRPr lang="ko-KR" altLang="en-US" sz="1050" dirty="0"/>
+                      <a:endParaRPr lang="ko-KR" altLang="en-US" sz="1200" dirty="0"/>
                     </a:p>
                   </a:txBody>
                   <a:tcPr marL="91440" marR="91440" marT="45720" marB="45720" anchor="ctr">
@@ -8791,14 +8791,14 @@
                         <a:buNone/>
                       </a:pPr>
                       <a:r>
-                        <a:rPr lang="ko-KR" altLang="en-US" sz="1050" b="1" dirty="0">
+                        <a:rPr lang="ko-KR" altLang="en-US" sz="1200" b="1" dirty="0">
                           <a:solidFill>
                             <a:srgbClr val="FFFFFF"/>
                           </a:solidFill>
                         </a:rPr>
                         <a:t>호출 앱 (카카오T 등)</a:t>
                       </a:r>
-                      <a:endParaRPr lang="ko-KR" altLang="en-US" sz="1050" dirty="0"/>
+                      <a:endParaRPr lang="ko-KR" altLang="en-US" sz="1200" dirty="0"/>
                     </a:p>
                   </a:txBody>
                   <a:tcPr marL="91440" marR="91440" marT="45720" marB="45720" anchor="ctr">
@@ -8852,14 +8852,14 @@
                         <a:buNone/>
                       </a:pPr>
                       <a:r>
-                        <a:rPr lang="ko-KR" altLang="en-US" sz="1050" b="1" dirty="0">
+                        <a:rPr lang="ko-KR" altLang="en-US" sz="1200" b="1" dirty="0">
                           <a:solidFill>
                             <a:srgbClr val="FFFFFF"/>
                           </a:solidFill>
                         </a:rPr>
                         <a:t>반반택시 (동승)</a:t>
                       </a:r>
-                      <a:endParaRPr lang="ko-KR" altLang="en-US" sz="1050" dirty="0"/>
+                      <a:endParaRPr lang="ko-KR" altLang="en-US" sz="1200" dirty="0"/>
                     </a:p>
                   </a:txBody>
                   <a:tcPr marL="91440" marR="91440" marT="45720" marB="45720" anchor="ctr">
@@ -8913,14 +8913,14 @@
                         <a:buNone/>
                       </a:pPr>
                       <a:r>
-                        <a:rPr lang="ko-KR" altLang="en-US" sz="1050" b="1" dirty="0">
+                        <a:rPr lang="ko-KR" altLang="en-US" sz="1200" b="1" dirty="0">
                           <a:solidFill>
                             <a:srgbClr val="FFFFFF"/>
                           </a:solidFill>
                         </a:rPr>
                         <a:t>🚕 쉐어택</a:t>
                       </a:r>
-                      <a:endParaRPr lang="ko-KR" altLang="en-US" sz="1050" dirty="0"/>
+                      <a:endParaRPr lang="ko-KR" altLang="en-US" sz="1200" dirty="0"/>
                     </a:p>
                   </a:txBody>
                   <a:tcPr marL="91440" marR="91440" marT="45720" marB="45720" anchor="ctr">
@@ -8976,14 +8976,14 @@
                         <a:buNone/>
                       </a:pPr>
                       <a:r>
-                        <a:rPr lang="ko-KR" altLang="en-US" sz="1000" dirty="0">
+                        <a:rPr lang="ko-KR" altLang="en-US" sz="1150" dirty="0">
                           <a:solidFill>
                             <a:srgbClr val="10231C"/>
                           </a:solidFill>
                         </a:rPr>
                         <a:t>핵심</a:t>
                       </a:r>
-                      <a:endParaRPr lang="ko-KR" altLang="en-US" sz="1000" dirty="0"/>
+                      <a:endParaRPr lang="ko-KR" altLang="en-US" sz="1150" dirty="0"/>
                     </a:p>
                   </a:txBody>
                   <a:tcPr marL="91440" marR="91440" marT="45720" marB="45720" anchor="ctr">
@@ -9037,14 +9037,14 @@
                         <a:buNone/>
                       </a:pPr>
                       <a:r>
-                        <a:rPr lang="ko-KR" altLang="en-US" sz="1000" dirty="0">
+                        <a:rPr lang="ko-KR" altLang="en-US" sz="1150" dirty="0">
                           <a:solidFill>
                             <a:srgbClr val="10231C"/>
                           </a:solidFill>
                         </a:rPr>
                         <a:t>가까운 빈 차 호출</a:t>
                       </a:r>
-                      <a:endParaRPr lang="ko-KR" altLang="en-US" sz="1000" dirty="0"/>
+                      <a:endParaRPr lang="ko-KR" altLang="en-US" sz="1150" dirty="0"/>
                     </a:p>
                   </a:txBody>
                   <a:tcPr marL="91440" marR="91440" marT="45720" marB="45720" anchor="ctr">
@@ -9098,14 +9098,14 @@
                         <a:buNone/>
                       </a:pPr>
                       <a:r>
-                        <a:rPr lang="ko-KR" altLang="en-US" sz="1000" dirty="0">
+                        <a:rPr lang="ko-KR" altLang="en-US" sz="1150" dirty="0">
                           <a:solidFill>
                             <a:srgbClr val="10231C"/>
                           </a:solidFill>
                         </a:rPr>
                         <a:t>같은 방향 동승</a:t>
                       </a:r>
-                      <a:endParaRPr lang="ko-KR" altLang="en-US" sz="1000" dirty="0"/>
+                      <a:endParaRPr lang="ko-KR" altLang="en-US" sz="1150" dirty="0"/>
                     </a:p>
                   </a:txBody>
                   <a:tcPr marL="91440" marR="91440" marT="45720" marB="45720" anchor="ctr">
@@ -9159,14 +9159,14 @@
                         <a:buNone/>
                       </a:pPr>
                       <a:r>
-                        <a:rPr lang="ko-KR" altLang="en-US" sz="1000" b="1" dirty="0">
+                        <a:rPr lang="ko-KR" altLang="en-US" sz="1150" b="1" dirty="0">
                           <a:solidFill>
                             <a:srgbClr val="10231C"/>
                           </a:solidFill>
                         </a:rPr>
                         <a:t>돌아가는 빈 차와 방향 맞추기</a:t>
                       </a:r>
-                      <a:endParaRPr lang="ko-KR" altLang="en-US" sz="1000" dirty="0"/>
+                      <a:endParaRPr lang="ko-KR" altLang="en-US" sz="1150" dirty="0"/>
                     </a:p>
                   </a:txBody>
                   <a:tcPr marL="91440" marR="91440" marT="45720" marB="45720" anchor="ctr">
@@ -9222,14 +9222,14 @@
                         <a:buNone/>
                       </a:pPr>
                       <a:r>
-                        <a:rPr lang="ko-KR" altLang="en-US" sz="1000" dirty="0">
+                        <a:rPr lang="ko-KR" altLang="en-US" sz="1150" dirty="0">
                           <a:solidFill>
                             <a:srgbClr val="10231C"/>
                           </a:solidFill>
                         </a:rPr>
                         <a:t>할증</a:t>
                       </a:r>
-                      <a:endParaRPr lang="ko-KR" altLang="en-US" sz="1000" dirty="0"/>
+                      <a:endParaRPr lang="ko-KR" altLang="en-US" sz="1150" dirty="0"/>
                     </a:p>
                   </a:txBody>
                   <a:tcPr marL="91440" marR="91440" marT="45720" marB="45720" anchor="ctr">
@@ -9283,14 +9283,14 @@
                         <a:buNone/>
                       </a:pPr>
                       <a:r>
-                        <a:rPr lang="ko-KR" altLang="en-US" sz="1000" dirty="0">
+                        <a:rPr lang="ko-KR" altLang="en-US" sz="1150" dirty="0">
                           <a:solidFill>
                             <a:srgbClr val="10231C"/>
                           </a:solidFill>
                         </a:rPr>
                         <a:t>그대로</a:t>
                       </a:r>
-                      <a:endParaRPr lang="ko-KR" altLang="en-US" sz="1000" dirty="0"/>
+                      <a:endParaRPr lang="ko-KR" altLang="en-US" sz="1150" dirty="0"/>
                     </a:p>
                   </a:txBody>
                   <a:tcPr marL="91440" marR="91440" marT="45720" marB="45720" anchor="ctr">
@@ -9344,14 +9344,14 @@
                         <a:buNone/>
                       </a:pPr>
                       <a:r>
-                        <a:rPr lang="ko-KR" altLang="en-US" sz="1000" dirty="0">
+                        <a:rPr lang="ko-KR" altLang="en-US" sz="1150" dirty="0">
                           <a:solidFill>
                             <a:srgbClr val="10231C"/>
                           </a:solidFill>
                         </a:rPr>
                         <a:t>그대로</a:t>
                       </a:r>
-                      <a:endParaRPr lang="ko-KR" altLang="en-US" sz="1000" dirty="0"/>
+                      <a:endParaRPr lang="ko-KR" altLang="en-US" sz="1150" dirty="0"/>
                     </a:p>
                   </a:txBody>
                   <a:tcPr marL="91440" marR="91440" marT="45720" marB="45720" anchor="ctr">
@@ -9405,14 +9405,14 @@
                         <a:buNone/>
                       </a:pPr>
                       <a:r>
-                        <a:rPr lang="ko-KR" altLang="en-US" sz="1000" b="1" dirty="0">
+                        <a:rPr lang="ko-KR" altLang="en-US" sz="1150" b="1" dirty="0">
                           <a:solidFill>
                             <a:srgbClr val="10231C"/>
                           </a:solidFill>
                         </a:rPr>
                         <a:t>귀로 운행 면제 (시 정책 연동)</a:t>
                       </a:r>
-                      <a:endParaRPr lang="ko-KR" altLang="en-US" sz="1000" dirty="0"/>
+                      <a:endParaRPr lang="ko-KR" altLang="en-US" sz="1150" dirty="0"/>
                     </a:p>
                   </a:txBody>
                   <a:tcPr marL="91440" marR="91440" marT="45720" marB="45720" anchor="ctr">
@@ -9468,14 +9468,14 @@
                         <a:buNone/>
                       </a:pPr>
                       <a:r>
-                        <a:rPr lang="ko-KR" altLang="en-US" sz="1000" dirty="0">
+                        <a:rPr lang="ko-KR" altLang="en-US" sz="1150" dirty="0">
                           <a:solidFill>
                             <a:srgbClr val="10231C"/>
                           </a:solidFill>
                         </a:rPr>
                         <a:t>기사</a:t>
                       </a:r>
-                      <a:endParaRPr lang="ko-KR" altLang="en-US" sz="1000" dirty="0"/>
+                      <a:endParaRPr lang="ko-KR" altLang="en-US" sz="1150" dirty="0"/>
                     </a:p>
                   </a:txBody>
                   <a:tcPr marL="91440" marR="91440" marT="45720" marB="45720" anchor="ctr">
@@ -9529,14 +9529,14 @@
                         <a:buNone/>
                       </a:pPr>
                       <a:r>
-                        <a:rPr lang="ko-KR" altLang="en-US" sz="1000" dirty="0">
+                        <a:rPr lang="ko-KR" altLang="en-US" sz="1150" dirty="0">
                           <a:solidFill>
                             <a:srgbClr val="10231C"/>
                           </a:solidFill>
                         </a:rPr>
                         <a:t>호출 수수료 부담</a:t>
                       </a:r>
-                      <a:endParaRPr lang="ko-KR" altLang="en-US" sz="1000" dirty="0"/>
+                      <a:endParaRPr lang="ko-KR" altLang="en-US" sz="1150" dirty="0"/>
                     </a:p>
                   </a:txBody>
                   <a:tcPr marL="91440" marR="91440" marT="45720" marB="45720" anchor="ctr">
@@ -9590,14 +9590,14 @@
                         <a:buNone/>
                       </a:pPr>
                       <a:r>
-                        <a:rPr lang="ko-KR" altLang="en-US" sz="1000" dirty="0">
+                        <a:rPr lang="ko-KR" altLang="en-US" sz="1150" dirty="0">
                           <a:solidFill>
                             <a:srgbClr val="10231C"/>
                           </a:solidFill>
                         </a:rPr>
                         <a:t>—</a:t>
                       </a:r>
-                      <a:endParaRPr lang="ko-KR" altLang="en-US" sz="1000" dirty="0"/>
+                      <a:endParaRPr lang="ko-KR" altLang="en-US" sz="1150" dirty="0"/>
                     </a:p>
                   </a:txBody>
                   <a:tcPr marL="91440" marR="91440" marT="45720" marB="45720" anchor="ctr">
@@ -9651,14 +9651,14 @@
                         <a:buNone/>
                       </a:pPr>
                       <a:r>
-                        <a:rPr lang="ko-KR" altLang="en-US" sz="1000" b="1" dirty="0">
+                        <a:rPr lang="ko-KR" altLang="en-US" sz="1150" b="1" dirty="0">
                           <a:solidFill>
                             <a:srgbClr val="10231C"/>
                           </a:solidFill>
                         </a:rPr>
                         <a:t>귀로 수입 증가</a:t>
                       </a:r>
-                      <a:endParaRPr lang="ko-KR" altLang="en-US" sz="1000" dirty="0"/>
+                      <a:endParaRPr lang="ko-KR" altLang="en-US" sz="1150" dirty="0"/>
                     </a:p>
                   </a:txBody>
                   <a:tcPr marL="91440" marR="91440" marT="45720" marB="45720" anchor="ctr">
@@ -9714,14 +9714,14 @@
                         <a:buNone/>
                       </a:pPr>
                       <a:r>
-                        <a:rPr lang="ko-KR" altLang="en-US" sz="1000" dirty="0">
+                        <a:rPr lang="ko-KR" altLang="en-US" sz="1150" dirty="0">
                           <a:solidFill>
                             <a:srgbClr val="10231C"/>
                           </a:solidFill>
                         </a:rPr>
                         <a:t>관계</a:t>
                       </a:r>
-                      <a:endParaRPr lang="ko-KR" altLang="en-US" sz="1000" dirty="0"/>
+                      <a:endParaRPr lang="ko-KR" altLang="en-US" sz="1150" dirty="0"/>
                     </a:p>
                   </a:txBody>
                   <a:tcPr marL="91440" marR="91440" marT="45720" marB="45720" anchor="ctr">
@@ -9775,14 +9775,14 @@
                         <a:buNone/>
                       </a:pPr>
                       <a:r>
-                        <a:rPr lang="ko-KR" altLang="en-US" sz="1000" dirty="0">
+                        <a:rPr lang="ko-KR" altLang="en-US" sz="1150" dirty="0">
                           <a:solidFill>
                             <a:srgbClr val="10231C"/>
                           </a:solidFill>
                         </a:rPr>
                         <a:t>—</a:t>
                       </a:r>
-                      <a:endParaRPr lang="ko-KR" altLang="en-US" sz="1000" dirty="0"/>
+                      <a:endParaRPr lang="ko-KR" altLang="en-US" sz="1150" dirty="0"/>
                     </a:p>
                   </a:txBody>
                   <a:tcPr marL="91440" marR="91440" marT="45720" marB="45720" anchor="ctr">
@@ -9836,14 +9836,14 @@
                         <a:buNone/>
                       </a:pPr>
                       <a:r>
-                        <a:rPr lang="ko-KR" altLang="en-US" sz="1000" dirty="0">
+                        <a:rPr lang="ko-KR" altLang="en-US" sz="1150" dirty="0">
                           <a:solidFill>
                             <a:srgbClr val="10231C"/>
                           </a:solidFill>
                         </a:rPr>
                         <a:t>동승 중단 → B2B 전환</a:t>
                       </a:r>
-                      <a:endParaRPr lang="ko-KR" altLang="en-US" sz="1000" dirty="0"/>
+                      <a:endParaRPr lang="ko-KR" altLang="en-US" sz="1150" dirty="0"/>
                     </a:p>
                   </a:txBody>
                   <a:tcPr marL="91440" marR="91440" marT="45720" marB="45720" anchor="ctr">
@@ -9897,14 +9897,14 @@
                         <a:buNone/>
                       </a:pPr>
                       <a:r>
-                        <a:rPr lang="ko-KR" altLang="en-US" sz="1000" b="1" dirty="0">
+                        <a:rPr lang="ko-KR" altLang="en-US" sz="1150" b="1" dirty="0">
                           <a:solidFill>
                             <a:srgbClr val="10231C"/>
                           </a:solidFill>
                         </a:rPr>
                         <a:t>택시 앱 옆 도우미 (제휴)</a:t>
                       </a:r>
-                      <a:endParaRPr lang="ko-KR" altLang="en-US" sz="1000" dirty="0"/>
+                      <a:endParaRPr lang="ko-KR" altLang="en-US" sz="1150" dirty="0"/>
                     </a:p>
                   </a:txBody>
                   <a:tcPr marL="91440" marR="91440" marT="45720" marB="45720" anchor="ctr">
@@ -9962,8 +9962,8 @@
         </p:nvSpPr>
         <p:spPr>
           <a:xfrm>
-            <a:off x="502920" y="6446520"/>
-            <a:ext cx="10607040" cy="256032"/>
+            <a:off x="502920" y="6419088"/>
+            <a:ext cx="10607040" cy="292608"/>
           </a:xfrm>
           <a:prstGeom prst="rect">
             <a:avLst/>
@@ -9979,7 +9979,7 @@
               <a:buNone/>
             </a:pPr>
             <a:r>
-              <a:rPr lang="ko-KR" altLang="en-US" sz="900" dirty="0">
+              <a:rPr lang="ko-KR" altLang="en-US" sz="1050" dirty="0">
                 <a:solidFill>
                   <a:srgbClr val="4A5A54"/>
                 </a:solidFill>
@@ -9989,7 +9989,7 @@
               </a:rPr>
               <a:t>반반택시: 2019 규제샌드박스 실증특례 → 2022 동승 합법화, 이후 동승 중단·B2B 전환(한국경제 2026.4) · 귀로 연계 결제는 시범(모의)</a:t>
             </a:r>
-            <a:endParaRPr lang="ko-KR" altLang="en-US" sz="900" dirty="0"/>
+            <a:endParaRPr lang="ko-KR" altLang="en-US" sz="1050" dirty="0"/>
           </a:p>
         </p:txBody>
       </p:sp>
@@ -10001,8 +10001,8 @@
         </p:nvSpPr>
         <p:spPr>
           <a:xfrm>
-            <a:off x="11155680" y="6446520"/>
-            <a:ext cx="548640" cy="256032"/>
+            <a:off x="11064240" y="6419088"/>
+            <a:ext cx="640080" cy="292608"/>
           </a:xfrm>
           <a:prstGeom prst="rect">
             <a:avLst/>
@@ -10018,7 +10018,7 @@
               <a:buNone/>
             </a:pPr>
             <a:r>
-              <a:rPr lang="ko-KR" altLang="en-US" sz="900" dirty="0">
+              <a:rPr lang="ko-KR" altLang="en-US" sz="1050" dirty="0">
                 <a:solidFill>
                   <a:srgbClr val="4A5A54"/>
                 </a:solidFill>
@@ -10028,7 +10028,7 @@
               </a:rPr>
               <a:t>5 / 8</a:t>
             </a:r>
-            <a:endParaRPr lang="ko-KR" altLang="en-US" sz="900" dirty="0"/>
+            <a:endParaRPr lang="ko-KR" altLang="en-US" sz="1050" dirty="0"/>
           </a:p>
         </p:txBody>
       </p:sp>
@@ -11595,8 +11595,8 @@
         </p:nvSpPr>
         <p:spPr>
           <a:xfrm>
-            <a:off x="502920" y="6446520"/>
-            <a:ext cx="10607040" cy="256032"/>
+            <a:off x="502920" y="6419088"/>
+            <a:ext cx="10607040" cy="292608"/>
           </a:xfrm>
           <a:prstGeom prst="rect">
             <a:avLst/>
@@ -11612,7 +11612,7 @@
               <a:buNone/>
             </a:pPr>
             <a:r>
-              <a:rPr lang="ko-KR" altLang="en-US" sz="900" dirty="0">
+              <a:rPr lang="ko-KR" altLang="en-US" sz="1050" dirty="0">
                 <a:solidFill>
                   <a:srgbClr val="4A5A54"/>
                 </a:solidFill>
@@ -11622,7 +11622,7 @@
               </a:rPr>
               <a:t>B안: 앱 이용 30% 기준 손님 면제액 4,301원 중 2,622원을 수수료로 → 손님 1,679원 이득 · 기사 손해 0 · 시 재정 0 (시뮬레이션)</a:t>
             </a:r>
-            <a:endParaRPr lang="ko-KR" altLang="en-US" sz="900" dirty="0"/>
+            <a:endParaRPr lang="ko-KR" altLang="en-US" sz="1050" dirty="0"/>
           </a:p>
         </p:txBody>
       </p:sp>
@@ -11634,8 +11634,8 @@
         </p:nvSpPr>
         <p:spPr>
           <a:xfrm>
-            <a:off x="11155680" y="6446520"/>
-            <a:ext cx="548640" cy="256032"/>
+            <a:off x="11064240" y="6419088"/>
+            <a:ext cx="640080" cy="292608"/>
           </a:xfrm>
           <a:prstGeom prst="rect">
             <a:avLst/>
@@ -11651,7 +11651,7 @@
               <a:buNone/>
             </a:pPr>
             <a:r>
-              <a:rPr lang="ko-KR" altLang="en-US" sz="900" dirty="0">
+              <a:rPr lang="ko-KR" altLang="en-US" sz="1050" dirty="0">
                 <a:solidFill>
                   <a:srgbClr val="4A5A54"/>
                 </a:solidFill>
@@ -11661,7 +11661,7 @@
               </a:rPr>
               <a:t>6 / 8</a:t>
             </a:r>
-            <a:endParaRPr lang="ko-KR" altLang="en-US" sz="900" dirty="0"/>
+            <a:endParaRPr lang="ko-KR" altLang="en-US" sz="1050" dirty="0"/>
           </a:p>
         </p:txBody>
       </p:sp>
@@ -11996,8 +11996,8 @@
         </p:nvSpPr>
         <p:spPr>
           <a:xfrm>
-            <a:off x="5577840" y="2057400"/>
-            <a:ext cx="1783080" cy="640080"/>
+            <a:off x="5577840" y="2029968"/>
+            <a:ext cx="1783080" cy="685800"/>
           </a:xfrm>
           <a:prstGeom prst="rect">
             <a:avLst/>
@@ -12013,7 +12013,7 @@
               <a:buNone/>
             </a:pPr>
             <a:r>
-              <a:rPr lang="ko-KR" altLang="en-US" sz="1000" dirty="0">
+              <a:rPr lang="ko-KR" altLang="en-US" sz="1200" dirty="0">
                 <a:solidFill>
                   <a:srgbClr val="4A5A54"/>
                 </a:solidFill>
@@ -12023,7 +12023,7 @@
               </a:rPr>
               <a:t>참여 기사 1대 하루 수입 (+1.86%)</a:t>
             </a:r>
-            <a:endParaRPr lang="ko-KR" altLang="en-US" sz="1000" dirty="0"/>
+            <a:endParaRPr lang="ko-KR" altLang="en-US" sz="1200" dirty="0"/>
           </a:p>
         </p:txBody>
       </p:sp>
@@ -12108,8 +12108,8 @@
         </p:nvSpPr>
         <p:spPr>
           <a:xfrm>
-            <a:off x="7680960" y="2057400"/>
-            <a:ext cx="1783080" cy="640080"/>
+            <a:off x="7680960" y="2029968"/>
+            <a:ext cx="1783080" cy="685800"/>
           </a:xfrm>
           <a:prstGeom prst="rect">
             <a:avLst/>
@@ -12125,7 +12125,7 @@
               <a:buNone/>
             </a:pPr>
             <a:r>
-              <a:rPr lang="ko-KR" altLang="en-US" sz="1000" dirty="0">
+              <a:rPr lang="ko-KR" altLang="en-US" sz="1200" dirty="0">
                 <a:solidFill>
                   <a:srgbClr val="4A5A54"/>
                 </a:solidFill>
@@ -12135,7 +12135,7 @@
               </a:rPr>
               <a:t>오송에 집중하면 귀로 매칭 6→36건/일</a:t>
             </a:r>
-            <a:endParaRPr lang="ko-KR" altLang="en-US" sz="1000" dirty="0"/>
+            <a:endParaRPr lang="ko-KR" altLang="en-US" sz="1200" dirty="0"/>
           </a:p>
         </p:txBody>
       </p:sp>
@@ -12220,8 +12220,8 @@
         </p:nvSpPr>
         <p:spPr>
           <a:xfrm>
-            <a:off x="9784080" y="2057400"/>
-            <a:ext cx="1783080" cy="640080"/>
+            <a:off x="9784080" y="2029968"/>
+            <a:ext cx="1783080" cy="685800"/>
           </a:xfrm>
           <a:prstGeom prst="rect">
             <a:avLst/>
@@ -12237,7 +12237,7 @@
               <a:buNone/>
             </a:pPr>
             <a:r>
-              <a:rPr lang="ko-KR" altLang="en-US" sz="1000" dirty="0">
+              <a:rPr lang="ko-KR" altLang="en-US" sz="1200" dirty="0">
                 <a:solidFill>
                   <a:srgbClr val="4A5A54"/>
                 </a:solidFill>
@@ -12247,7 +12247,7 @@
               </a:rPr>
               <a:t>합승이 줄이는 할증 부담은 이 정도뿐</a:t>
             </a:r>
-            <a:endParaRPr lang="ko-KR" altLang="en-US" sz="1000" dirty="0"/>
+            <a:endParaRPr lang="ko-KR" altLang="en-US" sz="1200" dirty="0"/>
           </a:p>
         </p:txBody>
       </p:sp>
@@ -12290,14 +12290,14 @@
                         <a:buNone/>
                       </a:pPr>
                       <a:r>
-                        <a:rPr lang="ko-KR" altLang="en-US" sz="1000" b="1" dirty="0">
+                        <a:rPr lang="ko-KR" altLang="en-US" sz="1150" b="1" dirty="0">
                           <a:solidFill>
                             <a:srgbClr val="FFFFFF"/>
                           </a:solidFill>
                         </a:rPr>
                         <a:t>앱 이용률</a:t>
                       </a:r>
-                      <a:endParaRPr lang="ko-KR" altLang="en-US" sz="1000" dirty="0"/>
+                      <a:endParaRPr lang="ko-KR" altLang="en-US" sz="1150" dirty="0"/>
                     </a:p>
                   </a:txBody>
                   <a:tcPr marL="91440" marR="91440" marT="45720" marB="45720" anchor="ctr">
@@ -12351,14 +12351,14 @@
                         <a:buNone/>
                       </a:pPr>
                       <a:r>
-                        <a:rPr lang="ko-KR" altLang="en-US" sz="1000" b="1" dirty="0">
+                        <a:rPr lang="ko-KR" altLang="en-US" sz="1150" b="1" dirty="0">
                           <a:solidFill>
                             <a:srgbClr val="FFFFFF"/>
                           </a:solidFill>
                         </a:rPr>
                         <a:t>귀로 매칭/일</a:t>
                       </a:r>
-                      <a:endParaRPr lang="ko-KR" altLang="en-US" sz="1000" dirty="0"/>
+                      <a:endParaRPr lang="ko-KR" altLang="en-US" sz="1150" dirty="0"/>
                     </a:p>
                   </a:txBody>
                   <a:tcPr marL="91440" marR="91440" marT="45720" marB="45720" anchor="ctr">
@@ -12412,14 +12412,14 @@
                         <a:buNone/>
                       </a:pPr>
                       <a:r>
-                        <a:rPr lang="ko-KR" altLang="en-US" sz="1000" b="1" dirty="0">
+                        <a:rPr lang="ko-KR" altLang="en-US" sz="1150" b="1" dirty="0">
                           <a:solidFill>
                             <a:srgbClr val="FFFFFF"/>
                           </a:solidFill>
                         </a:rPr>
                         <a:t>손님 면제액</a:t>
                       </a:r>
-                      <a:endParaRPr lang="ko-KR" altLang="en-US" sz="1000" dirty="0"/>
+                      <a:endParaRPr lang="ko-KR" altLang="en-US" sz="1150" dirty="0"/>
                     </a:p>
                   </a:txBody>
                   <a:tcPr marL="91440" marR="91440" marT="45720" marB="45720" anchor="ctr">
@@ -12473,14 +12473,14 @@
                         <a:buNone/>
                       </a:pPr>
                       <a:r>
-                        <a:rPr lang="ko-KR" altLang="en-US" sz="1000" b="1" dirty="0">
+                        <a:rPr lang="ko-KR" altLang="en-US" sz="1150" b="1" dirty="0">
                           <a:solidFill>
                             <a:srgbClr val="FFFFFF"/>
                           </a:solidFill>
                         </a:rPr>
                         <a:t>보전 없이 면제</a:t>
                       </a:r>
-                      <a:endParaRPr lang="ko-KR" altLang="en-US" sz="1000" dirty="0"/>
+                      <a:endParaRPr lang="ko-KR" altLang="en-US" sz="1150" dirty="0"/>
                     </a:p>
                   </a:txBody>
                   <a:tcPr marL="91440" marR="91440" marT="45720" marB="45720" anchor="ctr">
@@ -12534,14 +12534,14 @@
                         <a:buNone/>
                       </a:pPr>
                       <a:r>
-                        <a:rPr lang="ko-KR" altLang="en-US" sz="1000" b="1" dirty="0">
+                        <a:rPr lang="ko-KR" altLang="en-US" sz="1150" b="1" dirty="0">
                           <a:solidFill>
                             <a:srgbClr val="FFFFFF"/>
                           </a:solidFill>
                         </a:rPr>
                         <a:t>손해 0 보전액</a:t>
                       </a:r>
-                      <a:endParaRPr lang="ko-KR" altLang="en-US" sz="1000" dirty="0"/>
+                      <a:endParaRPr lang="ko-KR" altLang="en-US" sz="1150" dirty="0"/>
                     </a:p>
                   </a:txBody>
                   <a:tcPr marL="91440" marR="91440" marT="45720" marB="45720" anchor="ctr">
@@ -12597,14 +12597,14 @@
                         <a:buNone/>
                       </a:pPr>
                       <a:r>
-                        <a:rPr lang="ko-KR" altLang="en-US" sz="1050" dirty="0">
+                        <a:rPr lang="ko-KR" altLang="en-US" sz="1200" dirty="0">
                           <a:solidFill>
                             <a:srgbClr val="10231C"/>
                           </a:solidFill>
                         </a:rPr>
                         <a:t>30%</a:t>
                       </a:r>
-                      <a:endParaRPr lang="ko-KR" altLang="en-US" sz="1050" dirty="0"/>
+                      <a:endParaRPr lang="ko-KR" altLang="en-US" sz="1200" dirty="0"/>
                     </a:p>
                   </a:txBody>
                   <a:tcPr marL="91440" marR="91440" marT="45720" marB="45720" anchor="ctr">
@@ -12658,14 +12658,14 @@
                         <a:buNone/>
                       </a:pPr>
                       <a:r>
-                        <a:rPr lang="ko-KR" altLang="en-US" sz="1050" dirty="0">
+                        <a:rPr lang="ko-KR" altLang="en-US" sz="1200" dirty="0">
                           <a:solidFill>
                             <a:srgbClr val="10231C"/>
                           </a:solidFill>
                         </a:rPr>
                         <a:t>488건</a:t>
                       </a:r>
-                      <a:endParaRPr lang="ko-KR" altLang="en-US" sz="1050" dirty="0"/>
+                      <a:endParaRPr lang="ko-KR" altLang="en-US" sz="1200" dirty="0"/>
                     </a:p>
                   </a:txBody>
                   <a:tcPr marL="91440" marR="91440" marT="45720" marB="45720" anchor="ctr">
@@ -12719,14 +12719,14 @@
                         <a:buNone/>
                       </a:pPr>
                       <a:r>
-                        <a:rPr lang="ko-KR" altLang="en-US" sz="1050" dirty="0">
+                        <a:rPr lang="ko-KR" altLang="en-US" sz="1200" dirty="0">
                           <a:solidFill>
                             <a:srgbClr val="10231C"/>
                           </a:solidFill>
                         </a:rPr>
                         <a:t>4,301원</a:t>
                       </a:r>
-                      <a:endParaRPr lang="ko-KR" altLang="en-US" sz="1050" dirty="0"/>
+                      <a:endParaRPr lang="ko-KR" altLang="en-US" sz="1200" dirty="0"/>
                     </a:p>
                   </a:txBody>
                   <a:tcPr marL="91440" marR="91440" marT="45720" marB="45720" anchor="ctr">
@@ -12780,14 +12780,14 @@
                         <a:buNone/>
                       </a:pPr>
                       <a:r>
-                        <a:rPr lang="ko-KR" altLang="en-US" sz="1050" dirty="0">
+                        <a:rPr lang="ko-KR" altLang="en-US" sz="1200" dirty="0">
                           <a:solidFill>
                             <a:srgbClr val="10231C"/>
                           </a:solidFill>
                         </a:rPr>
                         <a:t>할증의 39%</a:t>
                       </a:r>
-                      <a:endParaRPr lang="ko-KR" altLang="en-US" sz="1050" dirty="0"/>
+                      <a:endParaRPr lang="ko-KR" altLang="en-US" sz="1200" dirty="0"/>
                     </a:p>
                   </a:txBody>
                   <a:tcPr marL="91440" marR="91440" marT="45720" marB="45720" anchor="ctr">
@@ -12841,14 +12841,14 @@
                         <a:buNone/>
                       </a:pPr>
                       <a:r>
-                        <a:rPr lang="ko-KR" altLang="en-US" sz="1050" b="1" dirty="0">
+                        <a:rPr lang="ko-KR" altLang="en-US" sz="1200" b="1" dirty="0">
                           <a:solidFill>
                             <a:srgbClr val="1D9E75"/>
                           </a:solidFill>
                         </a:rPr>
                         <a:t>2,622원</a:t>
                       </a:r>
-                      <a:endParaRPr lang="ko-KR" altLang="en-US" sz="1050" dirty="0"/>
+                      <a:endParaRPr lang="ko-KR" altLang="en-US" sz="1200" dirty="0"/>
                     </a:p>
                   </a:txBody>
                   <a:tcPr marL="91440" marR="91440" marT="45720" marB="45720" anchor="ctr">
@@ -12904,14 +12904,14 @@
                         <a:buNone/>
                       </a:pPr>
                       <a:r>
-                        <a:rPr lang="ko-KR" altLang="en-US" sz="1050" dirty="0">
+                        <a:rPr lang="ko-KR" altLang="en-US" sz="1200" dirty="0">
                           <a:solidFill>
                             <a:srgbClr val="10231C"/>
                           </a:solidFill>
                         </a:rPr>
                         <a:t>50%</a:t>
                       </a:r>
-                      <a:endParaRPr lang="ko-KR" altLang="en-US" sz="1050" dirty="0"/>
+                      <a:endParaRPr lang="ko-KR" altLang="en-US" sz="1200" dirty="0"/>
                     </a:p>
                   </a:txBody>
                   <a:tcPr marL="91440" marR="91440" marT="45720" marB="45720" anchor="ctr">
@@ -12965,14 +12965,14 @@
                         <a:buNone/>
                       </a:pPr>
                       <a:r>
-                        <a:rPr lang="ko-KR" altLang="en-US" sz="1050" dirty="0">
+                        <a:rPr lang="ko-KR" altLang="en-US" sz="1200" dirty="0">
                           <a:solidFill>
                             <a:srgbClr val="10231C"/>
                           </a:solidFill>
                         </a:rPr>
                         <a:t>1,220건</a:t>
                       </a:r>
-                      <a:endParaRPr lang="ko-KR" altLang="en-US" sz="1050" dirty="0"/>
+                      <a:endParaRPr lang="ko-KR" altLang="en-US" sz="1200" dirty="0"/>
                     </a:p>
                   </a:txBody>
                   <a:tcPr marL="91440" marR="91440" marT="45720" marB="45720" anchor="ctr">
@@ -13026,14 +13026,14 @@
                         <a:buNone/>
                       </a:pPr>
                       <a:r>
-                        <a:rPr lang="ko-KR" altLang="en-US" sz="1050" dirty="0">
+                        <a:rPr lang="ko-KR" altLang="en-US" sz="1200" dirty="0">
                           <a:solidFill>
                             <a:srgbClr val="10231C"/>
                           </a:solidFill>
                         </a:rPr>
                         <a:t>4,285원</a:t>
                       </a:r>
-                      <a:endParaRPr lang="ko-KR" altLang="en-US" sz="1050" dirty="0"/>
+                      <a:endParaRPr lang="ko-KR" altLang="en-US" sz="1200" dirty="0"/>
                     </a:p>
                   </a:txBody>
                   <a:tcPr marL="91440" marR="91440" marT="45720" marB="45720" anchor="ctr">
@@ -13087,14 +13087,14 @@
                         <a:buNone/>
                       </a:pPr>
                       <a:r>
-                        <a:rPr lang="ko-KR" altLang="en-US" sz="1050" dirty="0">
+                        <a:rPr lang="ko-KR" altLang="en-US" sz="1200" dirty="0">
                           <a:solidFill>
                             <a:srgbClr val="10231C"/>
                           </a:solidFill>
                         </a:rPr>
                         <a:t>19%</a:t>
                       </a:r>
-                      <a:endParaRPr lang="ko-KR" altLang="en-US" sz="1050" dirty="0"/>
+                      <a:endParaRPr lang="ko-KR" altLang="en-US" sz="1200" dirty="0"/>
                     </a:p>
                   </a:txBody>
                   <a:tcPr marL="91440" marR="91440" marT="45720" marB="45720" anchor="ctr">
@@ -13148,14 +13148,14 @@
                         <a:buNone/>
                       </a:pPr>
                       <a:r>
-                        <a:rPr lang="ko-KR" altLang="en-US" sz="1050" b="1" dirty="0">
+                        <a:rPr lang="ko-KR" altLang="en-US" sz="1200" b="1" dirty="0">
                           <a:solidFill>
                             <a:srgbClr val="1D9E75"/>
                           </a:solidFill>
                         </a:rPr>
                         <a:t>3,462원</a:t>
                       </a:r>
-                      <a:endParaRPr lang="ko-KR" altLang="en-US" sz="1050" dirty="0"/>
+                      <a:endParaRPr lang="ko-KR" altLang="en-US" sz="1200" dirty="0"/>
                     </a:p>
                   </a:txBody>
                   <a:tcPr marL="91440" marR="91440" marT="45720" marB="45720" anchor="ctr">
@@ -13211,14 +13211,14 @@
                         <a:buNone/>
                       </a:pPr>
                       <a:r>
-                        <a:rPr lang="ko-KR" altLang="en-US" sz="1050" dirty="0">
+                        <a:rPr lang="ko-KR" altLang="en-US" sz="1200" dirty="0">
                           <a:solidFill>
                             <a:srgbClr val="10231C"/>
                           </a:solidFill>
                         </a:rPr>
                         <a:t>100%</a:t>
                       </a:r>
-                      <a:endParaRPr lang="ko-KR" altLang="en-US" sz="1050" dirty="0"/>
+                      <a:endParaRPr lang="ko-KR" altLang="en-US" sz="1200" dirty="0"/>
                     </a:p>
                   </a:txBody>
                   <a:tcPr marL="91440" marR="91440" marT="45720" marB="45720" anchor="ctr">
@@ -13272,14 +13272,14 @@
                         <a:buNone/>
                       </a:pPr>
                       <a:r>
-                        <a:rPr lang="ko-KR" altLang="en-US" sz="1050" dirty="0">
+                        <a:rPr lang="ko-KR" altLang="en-US" sz="1200" dirty="0">
                           <a:solidFill>
                             <a:srgbClr val="10231C"/>
                           </a:solidFill>
                         </a:rPr>
                         <a:t>4,893건</a:t>
                       </a:r>
-                      <a:endParaRPr lang="ko-KR" altLang="en-US" sz="1050" dirty="0"/>
+                      <a:endParaRPr lang="ko-KR" altLang="en-US" sz="1200" dirty="0"/>
                     </a:p>
                   </a:txBody>
                   <a:tcPr marL="91440" marR="91440" marT="45720" marB="45720" anchor="ctr">
@@ -13333,14 +13333,14 @@
                         <a:buNone/>
                       </a:pPr>
                       <a:r>
-                        <a:rPr lang="ko-KR" altLang="en-US" sz="1050" dirty="0">
+                        <a:rPr lang="ko-KR" altLang="en-US" sz="1200" dirty="0">
                           <a:solidFill>
                             <a:srgbClr val="10231C"/>
                           </a:solidFill>
                         </a:rPr>
                         <a:t>4,258원</a:t>
                       </a:r>
-                      <a:endParaRPr lang="ko-KR" altLang="en-US" sz="1050" dirty="0"/>
+                      <a:endParaRPr lang="ko-KR" altLang="en-US" sz="1200" dirty="0"/>
                     </a:p>
                   </a:txBody>
                   <a:tcPr marL="91440" marR="91440" marT="45720" marB="45720" anchor="ctr">
@@ -13394,14 +13394,14 @@
                         <a:buNone/>
                       </a:pPr>
                       <a:r>
-                        <a:rPr lang="ko-KR" altLang="en-US" sz="1050" dirty="0">
+                        <a:rPr lang="ko-KR" altLang="en-US" sz="1200" dirty="0">
                           <a:solidFill>
                             <a:srgbClr val="10231C"/>
                           </a:solidFill>
                         </a:rPr>
                         <a:t>12%</a:t>
                       </a:r>
-                      <a:endParaRPr lang="ko-KR" altLang="en-US" sz="1050" dirty="0"/>
+                      <a:endParaRPr lang="ko-KR" altLang="en-US" sz="1200" dirty="0"/>
                     </a:p>
                   </a:txBody>
                   <a:tcPr marL="91440" marR="91440" marT="45720" marB="45720" anchor="ctr">
@@ -13455,14 +13455,14 @@
                         <a:buNone/>
                       </a:pPr>
                       <a:r>
-                        <a:rPr lang="ko-KR" altLang="en-US" sz="1050" b="1" dirty="0">
+                        <a:rPr lang="ko-KR" altLang="en-US" sz="1200" b="1" dirty="0">
                           <a:solidFill>
                             <a:srgbClr val="1D9E75"/>
                           </a:solidFill>
                         </a:rPr>
                         <a:t>3,733원</a:t>
                       </a:r>
-                      <a:endParaRPr lang="ko-KR" altLang="en-US" sz="1050" dirty="0"/>
+                      <a:endParaRPr lang="ko-KR" altLang="en-US" sz="1200" dirty="0"/>
                     </a:p>
                   </a:txBody>
                   <a:tcPr marL="91440" marR="91440" marT="45720" marB="45720" anchor="ctr">
@@ -13655,8 +13655,8 @@
         </p:nvSpPr>
         <p:spPr>
           <a:xfrm>
-            <a:off x="502920" y="6446520"/>
-            <a:ext cx="10607040" cy="256032"/>
+            <a:off x="502920" y="6419088"/>
+            <a:ext cx="10607040" cy="292608"/>
           </a:xfrm>
           <a:prstGeom prst="rect">
             <a:avLst/>
@@ -13672,7 +13672,7 @@
               <a:buNone/>
             </a:pPr>
             <a:r>
-              <a:rPr lang="ko-KR" altLang="en-US" sz="900" dirty="0">
+              <a:rPr lang="ko-KR" altLang="en-US" sz="1050" dirty="0">
                 <a:solidFill>
                   <a:srgbClr val="4A5A54"/>
                 </a:solidFill>
@@ -13682,7 +13682,7 @@
               </a:rPr>
               <a:t>행위자 기반 시뮬레이션: 택시 2,956대·하루 약 5.6만 건, TIMS 2025 실측(차량당 19.5회·공차 46.5%) 보정, 2개 시드 평균 · 실측 아님</a:t>
             </a:r>
-            <a:endParaRPr lang="ko-KR" altLang="en-US" sz="900" dirty="0"/>
+            <a:endParaRPr lang="ko-KR" altLang="en-US" sz="1050" dirty="0"/>
           </a:p>
         </p:txBody>
       </p:sp>
@@ -13694,8 +13694,8 @@
         </p:nvSpPr>
         <p:spPr>
           <a:xfrm>
-            <a:off x="11155680" y="6446520"/>
-            <a:ext cx="548640" cy="256032"/>
+            <a:off x="11064240" y="6419088"/>
+            <a:ext cx="640080" cy="292608"/>
           </a:xfrm>
           <a:prstGeom prst="rect">
             <a:avLst/>
@@ -13711,7 +13711,7 @@
               <a:buNone/>
             </a:pPr>
             <a:r>
-              <a:rPr lang="ko-KR" altLang="en-US" sz="900" dirty="0">
+              <a:rPr lang="ko-KR" altLang="en-US" sz="1050" dirty="0">
                 <a:solidFill>
                   <a:srgbClr val="4A5A54"/>
                 </a:solidFill>
@@ -13721,7 +13721,7 @@
               </a:rPr>
               <a:t>7 / 8</a:t>
             </a:r>
-            <a:endParaRPr lang="ko-KR" altLang="en-US" sz="900" dirty="0"/>
+            <a:endParaRPr lang="ko-KR" altLang="en-US" sz="1050" dirty="0"/>
           </a:p>
         </p:txBody>
       </p:sp>
@@ -14023,7 +14023,7 @@
               <a:buNone/>
             </a:pPr>
             <a:r>
-              <a:rPr lang="ko-KR" altLang="en-US" sz="1100" dirty="0">
+              <a:rPr lang="ko-KR" altLang="en-US" sz="1250" dirty="0">
                 <a:solidFill>
                   <a:srgbClr val="A9B8B1"/>
                 </a:solidFill>
@@ -14033,7 +14033,7 @@
               </a:rPr>
               <a:t>KTX 도착 시간대 집중</a:t>
             </a:r>
-            <a:endParaRPr lang="ko-KR" altLang="en-US" sz="1100" dirty="0"/>
+            <a:endParaRPr lang="ko-KR" altLang="en-US" sz="1250" dirty="0"/>
           </a:p>
         </p:txBody>
       </p:sp>
@@ -14174,7 +14174,7 @@
               <a:buNone/>
             </a:pPr>
             <a:r>
-              <a:rPr lang="ko-KR" altLang="en-US" sz="1100" dirty="0">
+              <a:rPr lang="ko-KR" altLang="en-US" sz="1250" dirty="0">
                 <a:solidFill>
                   <a:srgbClr val="A9B8B1"/>
                 </a:solidFill>
@@ -14184,7 +14184,7 @@
               </a:rPr>
               <a:t>승강장 택시 단체·호출 플랫폼</a:t>
             </a:r>
-            <a:endParaRPr lang="ko-KR" altLang="en-US" sz="1100" dirty="0"/>
+            <a:endParaRPr lang="ko-KR" altLang="en-US" sz="1250" dirty="0"/>
           </a:p>
         </p:txBody>
       </p:sp>
@@ -14325,7 +14325,7 @@
               <a:buNone/>
             </a:pPr>
             <a:r>
-              <a:rPr lang="ko-KR" altLang="en-US" sz="1100" dirty="0">
+              <a:rPr lang="ko-KR" altLang="en-US" sz="1250" dirty="0">
                 <a:solidFill>
                   <a:srgbClr val="A9B8B1"/>
                 </a:solidFill>
@@ -14335,7 +14335,7 @@
               </a:rPr>
               <a:t>오송·오창 실증, 데이터 축적</a:t>
             </a:r>
-            <a:endParaRPr lang="ko-KR" altLang="en-US" sz="1100" dirty="0"/>
+            <a:endParaRPr lang="ko-KR" altLang="en-US" sz="1250" dirty="0"/>
           </a:p>
         </p:txBody>
       </p:sp>
@@ -14476,7 +14476,7 @@
               <a:buNone/>
             </a:pPr>
             <a:r>
-              <a:rPr lang="ko-KR" altLang="en-US" sz="1100" dirty="0">
+              <a:rPr lang="ko-KR" altLang="en-US" sz="1250" dirty="0">
                 <a:solidFill>
                   <a:srgbClr val="A9B8B1"/>
                 </a:solidFill>
@@ -14486,7 +14486,7 @@
               </a:rPr>
               <a:t>귀로 운행 할증 면제 고시</a:t>
             </a:r>
-            <a:endParaRPr lang="ko-KR" altLang="en-US" sz="1100" dirty="0"/>
+            <a:endParaRPr lang="ko-KR" altLang="en-US" sz="1250" dirty="0"/>
           </a:p>
         </p:txBody>
       </p:sp>
@@ -14613,7 +14613,7 @@
               <a:buNone/>
             </a:pPr>
             <a:r>
-              <a:rPr lang="ko-KR" altLang="en-US" sz="1050" dirty="0">
+              <a:rPr lang="ko-KR" altLang="en-US" sz="1200" dirty="0">
                 <a:solidFill>
                   <a:srgbClr val="10231C"/>
                 </a:solidFill>
@@ -14623,14 +14623,14 @@
               </a:rPr>
               <a:t>데이터 근거, 시 정책 연동</a:t>
             </a:r>
-            <a:endParaRPr lang="ko-KR" altLang="en-US" sz="1050" dirty="0"/>
-          </a:p>
-          <a:p>
-            <a:pPr eaLnBrk="0" latinLnBrk="0" indent="0" marL="0">
-              <a:buNone/>
-            </a:pPr>
-            <a:r>
-              <a:rPr lang="ko-KR" altLang="en-US" sz="1050" dirty="0">
+            <a:endParaRPr lang="ko-KR" altLang="en-US" sz="1200" dirty="0"/>
+          </a:p>
+          <a:p>
+            <a:pPr eaLnBrk="0" latinLnBrk="0" indent="0" marL="0">
+              <a:buNone/>
+            </a:pPr>
+            <a:r>
+              <a:rPr lang="ko-KR" altLang="en-US" sz="1200" dirty="0">
                 <a:solidFill>
                   <a:srgbClr val="10231C"/>
                 </a:solidFill>
@@ -14640,7 +14640,7 @@
               </a:rPr>
               <a:t>손님·기사 모두 이득</a:t>
             </a:r>
-            <a:endParaRPr lang="ko-KR" altLang="en-US" sz="1050" dirty="0"/>
+            <a:endParaRPr lang="ko-KR" altLang="en-US" sz="1200" dirty="0"/>
           </a:p>
         </p:txBody>
       </p:sp>
@@ -14767,7 +14767,7 @@
               <a:buNone/>
             </a:pPr>
             <a:r>
-              <a:rPr lang="ko-KR" altLang="en-US" sz="1050" dirty="0">
+              <a:rPr lang="ko-KR" altLang="en-US" sz="1200" dirty="0">
                 <a:solidFill>
                   <a:srgbClr val="10231C"/>
                 </a:solidFill>
@@ -14777,14 +14777,14 @@
               </a:rPr>
               <a:t>초기 이용자 확보</a:t>
             </a:r>
-            <a:endParaRPr lang="ko-KR" altLang="en-US" sz="1050" dirty="0"/>
-          </a:p>
-          <a:p>
-            <a:pPr eaLnBrk="0" latinLnBrk="0" indent="0" marL="0">
-              <a:buNone/>
-            </a:pPr>
-            <a:r>
-              <a:rPr lang="ko-KR" altLang="en-US" sz="1050" dirty="0">
+            <a:endParaRPr lang="ko-KR" altLang="en-US" sz="1200" dirty="0"/>
+          </a:p>
+          <a:p>
+            <a:pPr eaLnBrk="0" latinLnBrk="0" indent="0" marL="0">
+              <a:buNone/>
+            </a:pPr>
+            <a:r>
+              <a:rPr lang="ko-KR" altLang="en-US" sz="1200" dirty="0">
                 <a:solidFill>
                   <a:srgbClr val="10231C"/>
                 </a:solidFill>
@@ -14794,7 +14794,7 @@
               </a:rPr>
               <a:t>제휴 필요</a:t>
             </a:r>
-            <a:endParaRPr lang="ko-KR" altLang="en-US" sz="1050" dirty="0"/>
+            <a:endParaRPr lang="ko-KR" altLang="en-US" sz="1200" dirty="0"/>
           </a:p>
         </p:txBody>
       </p:sp>
@@ -14921,7 +14921,7 @@
               <a:buNone/>
             </a:pPr>
             <a:r>
-              <a:rPr lang="ko-KR" altLang="en-US" sz="1050" dirty="0">
+              <a:rPr lang="ko-KR" altLang="en-US" sz="1200" dirty="0">
                 <a:solidFill>
                   <a:srgbClr val="10231C"/>
                 </a:solidFill>
@@ -14931,14 +14931,14 @@
               </a:rPr>
               <a:t>9/28 개편 여론, KTX 수요</a:t>
             </a:r>
-            <a:endParaRPr lang="ko-KR" altLang="en-US" sz="1050" dirty="0"/>
-          </a:p>
-          <a:p>
-            <a:pPr eaLnBrk="0" latinLnBrk="0" indent="0" marL="0">
-              <a:buNone/>
-            </a:pPr>
-            <a:r>
-              <a:rPr lang="ko-KR" altLang="en-US" sz="1050" dirty="0">
+            <a:endParaRPr lang="ko-KR" altLang="en-US" sz="1200" dirty="0"/>
+          </a:p>
+          <a:p>
+            <a:pPr eaLnBrk="0" latinLnBrk="0" indent="0" marL="0">
+              <a:buNone/>
+            </a:pPr>
+            <a:r>
+              <a:rPr lang="ko-KR" altLang="en-US" sz="1200" dirty="0">
                 <a:solidFill>
                   <a:srgbClr val="10231C"/>
                 </a:solidFill>
@@ -14948,7 +14948,7 @@
               </a:rPr>
               <a:t>반반택시 선례</a:t>
             </a:r>
-            <a:endParaRPr lang="ko-KR" altLang="en-US" sz="1050" dirty="0"/>
+            <a:endParaRPr lang="ko-KR" altLang="en-US" sz="1200" dirty="0"/>
           </a:p>
         </p:txBody>
       </p:sp>
@@ -15075,7 +15075,7 @@
               <a:buNone/>
             </a:pPr>
             <a:r>
-              <a:rPr lang="ko-KR" altLang="en-US" sz="1050" dirty="0">
+              <a:rPr lang="ko-KR" altLang="en-US" sz="1200" dirty="0">
                 <a:solidFill>
                   <a:srgbClr val="10231C"/>
                 </a:solidFill>
@@ -15085,14 +15085,14 @@
               </a:rPr>
               <a:t>대형 호출 앱 진입</a:t>
             </a:r>
-            <a:endParaRPr lang="ko-KR" altLang="en-US" sz="1050" dirty="0"/>
-          </a:p>
-          <a:p>
-            <a:pPr eaLnBrk="0" latinLnBrk="0" indent="0" marL="0">
-              <a:buNone/>
-            </a:pPr>
-            <a:r>
-              <a:rPr lang="ko-KR" altLang="en-US" sz="1050" dirty="0">
+            <a:endParaRPr lang="ko-KR" altLang="en-US" sz="1200" dirty="0"/>
+          </a:p>
+          <a:p>
+            <a:pPr eaLnBrk="0" latinLnBrk="0" indent="0" marL="0">
+              <a:buNone/>
+            </a:pPr>
+            <a:r>
+              <a:rPr lang="ko-KR" altLang="en-US" sz="1200" dirty="0">
                 <a:solidFill>
                   <a:srgbClr val="10231C"/>
                 </a:solidFill>
@@ -15102,7 +15102,7 @@
               </a:rPr>
               <a:t>업계 반발</a:t>
             </a:r>
-            <a:endParaRPr lang="ko-KR" altLang="en-US" sz="1050" dirty="0"/>
+            <a:endParaRPr lang="ko-KR" altLang="en-US" sz="1200" dirty="0"/>
           </a:p>
         </p:txBody>
       </p:sp>
@@ -15383,8 +15383,8 @@
         </p:nvSpPr>
         <p:spPr>
           <a:xfrm>
-            <a:off x="11155680" y="6446520"/>
-            <a:ext cx="548640" cy="256032"/>
+            <a:off x="11064240" y="6419088"/>
+            <a:ext cx="640080" cy="292608"/>
           </a:xfrm>
           <a:prstGeom prst="rect">
             <a:avLst/>
@@ -15400,7 +15400,7 @@
               <a:buNone/>
             </a:pPr>
             <a:r>
-              <a:rPr lang="ko-KR" altLang="en-US" sz="900" dirty="0">
+              <a:rPr lang="ko-KR" altLang="en-US" sz="1050" dirty="0">
                 <a:solidFill>
                   <a:srgbClr val="A9B8B1"/>
                 </a:solidFill>
@@ -15410,7 +15410,7 @@
               </a:rPr>
               <a:t>8 / 8</a:t>
             </a:r>
-            <a:endParaRPr lang="ko-KR" altLang="en-US" sz="900" dirty="0"/>
+            <a:endParaRPr lang="ko-KR" altLang="en-US" sz="1050" dirty="0"/>
           </a:p>
         </p:txBody>
       </p:sp>

--- a/presentation/쉐어택_발표_v2.pptx
+++ b/presentation/쉐어택_발표_v2.pptx
@@ -1283,7 +1283,7 @@
           <a:p>
             <a:r>
               <a:rPr lang="en-US" dirty="0"/>
-              <a:t>안녕하세요, [팀명]입니다. 같은 청주인데 오송·오창만 가면 택시비가 35% 더 붙습니다. 그런데 시는 이 할증이 빈 차로 돌아오는 손실을 메우기 위한 것이라고 설명합니다. 그렇다면 빈 차를 채우면 할증의 이유도 사라지지 않을까요? 이 질문에서 쉐어택이 시작됐습니다.</a:t>
+              <a:t>안녕하세요, 고경택시입니다. 같은 청주인데 오송·오창만 가면 택시비가 35% 더 붙습니다. 그런데 시는 이 할증이 빈 차로 돌아오는 손실을 메우기 위한 것이라고 설명합니다. 그렇다면 빈 차를 채우면 할증의 이유도 사라지지 않을까요? 이 질문에서 쉐어택이 시작됐습니다.</a:t>
             </a:r>
             <a:endParaRPr lang="en-US" dirty="0"/>
           </a:p>
@@ -2322,7 +2322,7 @@
                 <a:ea typeface="Malgun Gothic" pitchFamily="34" charset="-122"/>
                 <a:cs typeface="Malgun Gothic" pitchFamily="34" charset="-120"/>
               </a:rPr>
-              <a:t>충북대학교 경영대학 캡스톤디자인 · [팀명]</a:t>
+              <a:t>충북대학교 경영대학 캡스톤디자인 · 고경택시</a:t>
             </a:r>
             <a:endParaRPr lang="ko-KR" altLang="en-US" sz="1300" dirty="0"/>
           </a:p>
@@ -3886,7 +3886,7 @@
                 <a:ea typeface="Malgun Gothic" pitchFamily="34" charset="-122"/>
                 <a:cs typeface="Malgun Gothic" pitchFamily="34" charset="-120"/>
               </a:rPr>
-              <a:t>손님 · [이름] (28)</a:t>
+              <a:t>손님 · 김서윤 (28)</a:t>
             </a:r>
             <a:endParaRPr lang="ko-KR" altLang="en-US" sz="1600" dirty="0"/>
           </a:p>
@@ -4161,7 +4161,7 @@
                 <a:ea typeface="Malgun Gothic" pitchFamily="34" charset="-122"/>
                 <a:cs typeface="Malgun Gothic" pitchFamily="34" charset="-120"/>
               </a:rPr>
-              <a:t>기사 · [이름] (50대)</a:t>
+              <a:t>기사 · 박정호 (54)</a:t>
             </a:r>
             <a:endParaRPr lang="ko-KR" altLang="en-US" sz="1600" dirty="0"/>
           </a:p>
@@ -11541,7 +11541,7 @@
                 <a:ea typeface="Malgun Gothic" pitchFamily="34" charset="-122"/>
                 <a:cs typeface="Malgun Gothic" pitchFamily="34" charset="-120"/>
               </a:rPr>
-              <a:t>귀로 매칭 수수료 (손님 면제액의 일부)</a:t>
+              <a:t>귀로 매칭 수수료 2,622원/건 → 기사 보전 (손님은 그래도 1,679원 이득)</a:t>
             </a:r>
             <a:endParaRPr lang="ko-KR" altLang="en-US" sz="1250" dirty="0"/>
           </a:p>
@@ -11581,7 +11581,27 @@
                 <a:ea typeface="Malgun Gothic" pitchFamily="34" charset="-122"/>
                 <a:cs typeface="Malgun Gothic" pitchFamily="34" charset="-120"/>
               </a:rPr>
-              <a:t>호출 플랫폼 제휴 수수료 · 시 정책 데이터 리포트(B2G) — 비율 [ ]</a:t>
+              <a:t>플랫폼 몫: 귀로 매칭 운임의 2.8% (약 400원/건) = 카카오T블루 가맹 수수료 수준(2024)</a:t>
+            </a:r>
+            <a:endParaRPr lang="ko-KR" altLang="en-US" sz="1250" dirty="0"/>
+          </a:p>
+          <a:p>
+            <a:pPr eaLnBrk="0" latinLnBrk="0" indent="0" marL="0">
+              <a:lnSpc>
+                <a:spcPct val="130000"/>
+              </a:lnSpc>
+              <a:buNone/>
+            </a:pPr>
+            <a:r>
+              <a:rPr lang="ko-KR" altLang="en-US" sz="1250" dirty="0">
+                <a:solidFill>
+                  <a:srgbClr val="10231C"/>
+                </a:solidFill>
+                <a:latin typeface="Malgun Gothic" pitchFamily="34" charset="0"/>
+                <a:ea typeface="Malgun Gothic" pitchFamily="34" charset="-122"/>
+                <a:cs typeface="Malgun Gothic" pitchFamily="34" charset="-120"/>
+              </a:rPr>
+              <a:t>+ 시 정책 데이터 리포트(B2G)</a:t>
             </a:r>
             <a:endParaRPr lang="ko-KR" altLang="en-US" sz="1250" dirty="0"/>
           </a:p>

--- a/presentation/쉐어택_발표_v2.pptx
+++ b/presentation/쉐어택_발표_v2.pptx
@@ -1371,7 +1371,7 @@
           <a:p>
             <a:r>
               <a:rPr lang="en-US" dirty="0"/>
-              <a:t>손님은 오송역에서 시내까지 할증 포함 요금을 내고, 기사님은 오송에 손님을 내린 뒤 빈 차로 돌아옵니다. 같은 길에서 양쪽 모두 손해를 보고 있는 셈입니다. [인터뷰 인용]을 실제 인터뷰 내용으로 바꿔 주세요.</a:t>
+              <a:t>손님은 오송역에서 시내까지 할증 포함 요금을 내고, 기사님은 오송에 손님을 내린 뒤 빈 차로 돌아옵니다. 같은 길에서 양쪽 모두 손해를 보고 있는 셈입니다. 페르소나는 설문과 TIMS 데이터를 바탕으로 만든 가상 인물입니다.</a:t>
             </a:r>
             <a:endParaRPr lang="en-US" dirty="0"/>
           </a:p>
@@ -1811,7 +1811,7 @@
           <a:p>
             <a:r>
               <a:rPr lang="en-US" dirty="0"/>
-              <a:t>청주 택시를 그대로 재현한 시뮬레이션 결과, 합승은 기사 수입을 깎지만 귀로 매칭은 늘립니다. 앱을 쓰는 기사님은 하루 5,774원을 더 법니다. 처음부터 청주 전체가 아니라 오송에 모으면 같은 기사 수로도 매칭이 6배가 됩니다. 아래에는 인터뷰 결과를 채워 주세요.</a:t>
+              <a:t>청주 택시를 그대로 재현한 시뮬레이션 결과, 합승은 기사 수입을 깎지만 귀로 매칭은 늘립니다. 앱을 쓰는 기사님은 하루 5,774원을 더 법니다. 처음부터 청주 전체가 아니라 오송에 모으면 같은 기사 수로도 매칭이 6배가 됩니다. 시민 설문 57명에서도 63%가 할증 때문에 택시를 포기하거나 다른 수단을 썼고, 96%가 조건만 맞으면 나눠 타겠다고 답했습니다. 3명이 나눠 타면 66% 저렴해 응답자가 원한 할인 폭을 모두 넘습니다.</a:t>
             </a:r>
             <a:endParaRPr lang="en-US" dirty="0"/>
           </a:p>
@@ -3782,7 +3782,46 @@
       </p:sp>
       <p:sp>
         <p:nvSpPr>
-          <p:cNvPr id="7" name="Shape 4"/>
+          <p:cNvPr id="7" name="Text 4"/>
+          <p:cNvSpPr txBox="1"/>
+          <p:nvPr/>
+        </p:nvSpPr>
+        <p:spPr>
+          <a:xfrm>
+            <a:off x="7863840" y="868680"/>
+            <a:ext cx="3840480" cy="274320"/>
+          </a:xfrm>
+          <a:prstGeom prst="rect">
+            <a:avLst/>
+          </a:prstGeom>
+          <a:noFill/>
+          <a:ln/>
+        </p:spPr>
+        <p:txBody>
+          <a:bodyPr wrap="square" lIns="0" tIns="0" rIns="0" bIns="0" rtlCol="0" anchor="t"/>
+          <a:lstStyle/>
+          <a:p>
+            <a:pPr eaLnBrk="0" latinLnBrk="0" algn="r" indent="0" marL="0">
+              <a:buNone/>
+            </a:pPr>
+            <a:r>
+              <a:rPr lang="ko-KR" altLang="en-US" sz="1050" dirty="0">
+                <a:solidFill>
+                  <a:srgbClr val="4A5A54"/>
+                </a:solidFill>
+                <a:latin typeface="Malgun Gothic" pitchFamily="34" charset="0"/>
+                <a:ea typeface="Malgun Gothic" pitchFamily="34" charset="-122"/>
+                <a:cs typeface="Malgun Gothic" pitchFamily="34" charset="-120"/>
+              </a:rPr>
+              <a:t>※ 페르소나는 설문·데이터를 바탕으로 만든 가상 인물</a:t>
+            </a:r>
+            <a:endParaRPr lang="ko-KR" altLang="en-US" sz="1050" dirty="0"/>
+          </a:p>
+        </p:txBody>
+      </p:sp>
+      <p:sp>
+        <p:nvSpPr>
+          <p:cNvPr id="8" name="Shape 5"/>
           <p:cNvSpPr/>
           <p:nvPr/>
         </p:nvSpPr>
@@ -3816,7 +3855,7 @@
       </p:sp>
       <p:sp>
         <p:nvSpPr>
-          <p:cNvPr id="8" name="Text 5"/>
+          <p:cNvPr id="9" name="Text 6"/>
           <p:cNvSpPr txBox="1"/>
           <p:nvPr/>
         </p:nvSpPr>
@@ -3855,7 +3894,7 @@
       </p:sp>
       <p:sp>
         <p:nvSpPr>
-          <p:cNvPr id="9" name="Text 6"/>
+          <p:cNvPr id="10" name="Text 7"/>
           <p:cNvSpPr txBox="1"/>
           <p:nvPr/>
         </p:nvSpPr>
@@ -3894,7 +3933,7 @@
       </p:sp>
       <p:sp>
         <p:nvSpPr>
-          <p:cNvPr id="10" name="Text 7"/>
+          <p:cNvPr id="11" name="Text 8"/>
           <p:cNvSpPr txBox="1"/>
           <p:nvPr/>
         </p:nvSpPr>
@@ -3933,7 +3972,7 @@
       </p:sp>
       <p:sp>
         <p:nvSpPr>
-          <p:cNvPr id="11" name="Shape 8"/>
+          <p:cNvPr id="12" name="Shape 9"/>
           <p:cNvSpPr/>
           <p:nvPr/>
         </p:nvSpPr>
@@ -3960,7 +3999,7 @@
       </p:sp>
       <p:sp>
         <p:nvSpPr>
-          <p:cNvPr id="12" name="Text 9"/>
+          <p:cNvPr id="13" name="Text 10"/>
           <p:cNvSpPr txBox="1"/>
           <p:nvPr/>
         </p:nvSpPr>
@@ -3999,7 +4038,7 @@
       </p:sp>
       <p:sp>
         <p:nvSpPr>
-          <p:cNvPr id="13" name="Text 10"/>
+          <p:cNvPr id="14" name="Text 11"/>
           <p:cNvSpPr txBox="1"/>
           <p:nvPr/>
         </p:nvSpPr>
@@ -4057,7 +4096,7 @@
       </p:sp>
       <p:sp>
         <p:nvSpPr>
-          <p:cNvPr id="14" name="Shape 11"/>
+          <p:cNvPr id="15" name="Shape 12"/>
           <p:cNvSpPr/>
           <p:nvPr/>
         </p:nvSpPr>
@@ -4091,7 +4130,7 @@
       </p:sp>
       <p:sp>
         <p:nvSpPr>
-          <p:cNvPr id="15" name="Text 12"/>
+          <p:cNvPr id="16" name="Text 13"/>
           <p:cNvSpPr txBox="1"/>
           <p:nvPr/>
         </p:nvSpPr>
@@ -4130,7 +4169,7 @@
       </p:sp>
       <p:sp>
         <p:nvSpPr>
-          <p:cNvPr id="16" name="Text 13"/>
+          <p:cNvPr id="17" name="Text 14"/>
           <p:cNvSpPr txBox="1"/>
           <p:nvPr/>
         </p:nvSpPr>
@@ -4169,7 +4208,7 @@
       </p:sp>
       <p:sp>
         <p:nvSpPr>
-          <p:cNvPr id="17" name="Text 14"/>
+          <p:cNvPr id="18" name="Text 15"/>
           <p:cNvSpPr txBox="1"/>
           <p:nvPr/>
         </p:nvSpPr>
@@ -4208,7 +4247,7 @@
       </p:sp>
       <p:sp>
         <p:nvSpPr>
-          <p:cNvPr id="18" name="Shape 15"/>
+          <p:cNvPr id="19" name="Shape 16"/>
           <p:cNvSpPr/>
           <p:nvPr/>
         </p:nvSpPr>
@@ -4235,7 +4274,7 @@
       </p:sp>
       <p:sp>
         <p:nvSpPr>
-          <p:cNvPr id="19" name="Text 16"/>
+          <p:cNvPr id="20" name="Text 17"/>
           <p:cNvSpPr txBox="1"/>
           <p:nvPr/>
         </p:nvSpPr>
@@ -4266,7 +4305,7 @@
                 <a:ea typeface="Malgun Gothic" pitchFamily="34" charset="-122"/>
                 <a:cs typeface="Malgun Gothic" pitchFamily="34" charset="-120"/>
               </a:rPr>
-              <a:t>"[인터뷰 인용: 오송에 내려 주면 거의 빈 차로 돌아온다]"</a:t>
+              <a:t>"오송에 손님 내려 주면, 돌아올 땐 빈 차일 때가 많죠"</a:t>
             </a:r>
             <a:endParaRPr lang="ko-KR" altLang="en-US" sz="1150" dirty="0"/>
           </a:p>
@@ -4274,7 +4313,7 @@
       </p:sp>
       <p:sp>
         <p:nvSpPr>
-          <p:cNvPr id="20" name="Text 17"/>
+          <p:cNvPr id="21" name="Text 18"/>
           <p:cNvSpPr txBox="1"/>
           <p:nvPr/>
         </p:nvSpPr>
@@ -4332,7 +4371,7 @@
       </p:sp>
       <p:sp>
         <p:nvSpPr>
-          <p:cNvPr id="21" name="Shape 18"/>
+          <p:cNvPr id="22" name="Shape 19"/>
           <p:cNvSpPr/>
           <p:nvPr/>
         </p:nvSpPr>
@@ -4366,7 +4405,7 @@
       </p:sp>
       <p:sp>
         <p:nvSpPr>
-          <p:cNvPr id="22" name="Text 19"/>
+          <p:cNvPr id="23" name="Text 20"/>
           <p:cNvSpPr txBox="1"/>
           <p:nvPr/>
         </p:nvSpPr>
@@ -4405,7 +4444,7 @@
       </p:sp>
       <p:sp>
         <p:nvSpPr>
-          <p:cNvPr id="23" name="Shape 20"/>
+          <p:cNvPr id="24" name="Shape 21"/>
           <p:cNvSpPr/>
           <p:nvPr/>
         </p:nvSpPr>
@@ -4430,7 +4469,7 @@
       </p:sp>
       <p:sp>
         <p:nvSpPr>
-          <p:cNvPr id="24" name="Text 21"/>
+          <p:cNvPr id="25" name="Text 22"/>
           <p:cNvSpPr txBox="1"/>
           <p:nvPr/>
         </p:nvSpPr>
@@ -4469,7 +4508,7 @@
       </p:sp>
       <p:sp>
         <p:nvSpPr>
-          <p:cNvPr id="25" name="Text 22"/>
+          <p:cNvPr id="26" name="Text 23"/>
           <p:cNvSpPr txBox="1"/>
           <p:nvPr/>
         </p:nvSpPr>
@@ -4508,7 +4547,7 @@
       </p:sp>
       <p:sp>
         <p:nvSpPr>
-          <p:cNvPr id="26" name="Shape 23"/>
+          <p:cNvPr id="27" name="Shape 24"/>
           <p:cNvSpPr/>
           <p:nvPr/>
         </p:nvSpPr>
@@ -4532,7 +4571,7 @@
       </p:sp>
       <p:sp>
         <p:nvSpPr>
-          <p:cNvPr id="27" name="Shape 24"/>
+          <p:cNvPr id="28" name="Shape 25"/>
           <p:cNvSpPr/>
           <p:nvPr/>
         </p:nvSpPr>
@@ -4557,7 +4596,7 @@
       </p:sp>
       <p:sp>
         <p:nvSpPr>
-          <p:cNvPr id="28" name="Text 25"/>
+          <p:cNvPr id="29" name="Text 26"/>
           <p:cNvSpPr txBox="1"/>
           <p:nvPr/>
         </p:nvSpPr>
@@ -4596,7 +4635,7 @@
       </p:sp>
       <p:sp>
         <p:nvSpPr>
-          <p:cNvPr id="29" name="Text 26"/>
+          <p:cNvPr id="30" name="Text 27"/>
           <p:cNvSpPr txBox="1"/>
           <p:nvPr/>
         </p:nvSpPr>
@@ -4635,7 +4674,7 @@
       </p:sp>
       <p:sp>
         <p:nvSpPr>
-          <p:cNvPr id="30" name="Shape 27"/>
+          <p:cNvPr id="31" name="Shape 28"/>
           <p:cNvSpPr/>
           <p:nvPr/>
         </p:nvSpPr>
@@ -4659,7 +4698,7 @@
       </p:sp>
       <p:sp>
         <p:nvSpPr>
-          <p:cNvPr id="31" name="Shape 28"/>
+          <p:cNvPr id="32" name="Shape 29"/>
           <p:cNvSpPr/>
           <p:nvPr/>
         </p:nvSpPr>
@@ -4684,7 +4723,7 @@
       </p:sp>
       <p:sp>
         <p:nvSpPr>
-          <p:cNvPr id="32" name="Text 29"/>
+          <p:cNvPr id="33" name="Text 30"/>
           <p:cNvSpPr txBox="1"/>
           <p:nvPr/>
         </p:nvSpPr>
@@ -4723,7 +4762,7 @@
       </p:sp>
       <p:sp>
         <p:nvSpPr>
-          <p:cNvPr id="33" name="Text 30"/>
+          <p:cNvPr id="34" name="Text 31"/>
           <p:cNvSpPr txBox="1"/>
           <p:nvPr/>
         </p:nvSpPr>
@@ -4762,7 +4801,7 @@
       </p:sp>
       <p:sp>
         <p:nvSpPr>
-          <p:cNvPr id="34" name="Shape 31"/>
+          <p:cNvPr id="35" name="Shape 32"/>
           <p:cNvSpPr/>
           <p:nvPr/>
         </p:nvSpPr>
@@ -4786,7 +4825,7 @@
       </p:sp>
       <p:sp>
         <p:nvSpPr>
-          <p:cNvPr id="35" name="Shape 32"/>
+          <p:cNvPr id="36" name="Shape 33"/>
           <p:cNvSpPr/>
           <p:nvPr/>
         </p:nvSpPr>
@@ -4811,7 +4850,7 @@
       </p:sp>
       <p:sp>
         <p:nvSpPr>
-          <p:cNvPr id="36" name="Text 33"/>
+          <p:cNvPr id="37" name="Text 34"/>
           <p:cNvSpPr txBox="1"/>
           <p:nvPr/>
         </p:nvSpPr>
@@ -4850,7 +4889,7 @@
       </p:sp>
       <p:sp>
         <p:nvSpPr>
-          <p:cNvPr id="37" name="Text 34"/>
+          <p:cNvPr id="38" name="Text 35"/>
           <p:cNvSpPr txBox="1"/>
           <p:nvPr/>
         </p:nvSpPr>
@@ -4889,7 +4928,7 @@
       </p:sp>
       <p:sp>
         <p:nvSpPr>
-          <p:cNvPr id="38" name="Shape 35"/>
+          <p:cNvPr id="39" name="Shape 36"/>
           <p:cNvSpPr/>
           <p:nvPr/>
         </p:nvSpPr>
@@ -4913,7 +4952,7 @@
       </p:sp>
       <p:sp>
         <p:nvSpPr>
-          <p:cNvPr id="39" name="Shape 36"/>
+          <p:cNvPr id="40" name="Shape 37"/>
           <p:cNvSpPr/>
           <p:nvPr/>
         </p:nvSpPr>
@@ -4938,7 +4977,7 @@
       </p:sp>
       <p:sp>
         <p:nvSpPr>
-          <p:cNvPr id="40" name="Text 37"/>
+          <p:cNvPr id="41" name="Text 38"/>
           <p:cNvSpPr txBox="1"/>
           <p:nvPr/>
         </p:nvSpPr>
@@ -4977,7 +5016,7 @@
       </p:sp>
       <p:sp>
         <p:nvSpPr>
-          <p:cNvPr id="41" name="Text 38"/>
+          <p:cNvPr id="42" name="Text 39"/>
           <p:cNvSpPr txBox="1"/>
           <p:nvPr/>
         </p:nvSpPr>
@@ -5016,7 +5055,7 @@
       </p:sp>
       <p:sp>
         <p:nvSpPr>
-          <p:cNvPr id="42" name="Shape 39"/>
+          <p:cNvPr id="43" name="Shape 40"/>
           <p:cNvSpPr/>
           <p:nvPr/>
         </p:nvSpPr>
@@ -5043,7 +5082,7 @@
       </p:sp>
       <p:sp>
         <p:nvSpPr>
-          <p:cNvPr id="43" name="Text 40"/>
+          <p:cNvPr id="44" name="Text 41"/>
           <p:cNvSpPr txBox="1"/>
           <p:nvPr/>
         </p:nvSpPr>
@@ -5082,7 +5121,7 @@
       </p:sp>
       <p:sp>
         <p:nvSpPr>
-          <p:cNvPr id="44" name="Text 41"/>
+          <p:cNvPr id="45" name="Text 42"/>
           <p:cNvSpPr txBox="1"/>
           <p:nvPr/>
         </p:nvSpPr>
@@ -13574,7 +13613,7 @@
         </p:nvSpPr>
         <p:spPr>
           <a:xfrm>
-            <a:off x="5623560" y="4663440"/>
+            <a:off x="5623560" y="4645152"/>
             <a:ext cx="5852160" cy="320040"/>
           </a:xfrm>
           <a:prstGeom prst="rect">
@@ -13599,7 +13638,7 @@
                 <a:ea typeface="Malgun Gothic" pitchFamily="34" charset="-122"/>
                 <a:cs typeface="Malgun Gothic" pitchFamily="34" charset="-120"/>
               </a:rPr>
-              <a:t>🎤 기사 인터뷰 [ ]명</a:t>
+              <a:t>📝 시민 설문 57명 (2026.10)</a:t>
             </a:r>
             <a:endParaRPr lang="ko-KR" altLang="en-US" sz="1300" dirty="0"/>
           </a:p>
@@ -13613,8 +13652,8 @@
         </p:nvSpPr>
         <p:spPr>
           <a:xfrm>
-            <a:off x="5623560" y="5029200"/>
-            <a:ext cx="5852160" cy="1097280"/>
+            <a:off x="5623560" y="4983480"/>
+            <a:ext cx="1417320" cy="502920"/>
           </a:xfrm>
           <a:prstGeom prst="rect">
             <a:avLst/>
@@ -13627,13 +13666,49 @@
           <a:lstStyle/>
           <a:p>
             <a:pPr eaLnBrk="0" latinLnBrk="0" indent="0" marL="0">
-              <a:lnSpc>
-                <a:spcPct val="130000"/>
-              </a:lnSpc>
-              <a:buNone/>
-            </a:pPr>
-            <a:r>
-              <a:rPr lang="ko-KR" altLang="en-US" sz="1150" dirty="0">
+              <a:buNone/>
+            </a:pPr>
+            <a:r>
+              <a:rPr lang="ko-KR" altLang="en-US" sz="2200" b="1" dirty="0">
+                <a:solidFill>
+                  <a:srgbClr val="0F2A22"/>
+                </a:solidFill>
+                <a:latin typeface="Malgun Gothic" pitchFamily="34" charset="0"/>
+                <a:ea typeface="Malgun Gothic" pitchFamily="34" charset="-122"/>
+                <a:cs typeface="Malgun Gothic" pitchFamily="34" charset="-120"/>
+              </a:rPr>
+              <a:t>63%</a:t>
+            </a:r>
+            <a:endParaRPr lang="ko-KR" altLang="en-US" sz="2200" dirty="0"/>
+          </a:p>
+        </p:txBody>
+      </p:sp>
+      <p:sp>
+        <p:nvSpPr>
+          <p:cNvPr id="22" name="Text 17"/>
+          <p:cNvSpPr txBox="1"/>
+          <p:nvPr/>
+        </p:nvSpPr>
+        <p:spPr>
+          <a:xfrm>
+            <a:off x="5623560" y="5468112"/>
+            <a:ext cx="1417320" cy="685800"/>
+          </a:xfrm>
+          <a:prstGeom prst="rect">
+            <a:avLst/>
+          </a:prstGeom>
+          <a:noFill/>
+          <a:ln/>
+        </p:spPr>
+        <p:txBody>
+          <a:bodyPr wrap="square" lIns="0" tIns="0" rIns="0" bIns="0" rtlCol="0" anchor="t"/>
+          <a:lstStyle/>
+          <a:p>
+            <a:pPr eaLnBrk="0" latinLnBrk="0" indent="0" marL="0">
+              <a:buNone/>
+            </a:pPr>
+            <a:r>
+              <a:rPr lang="ko-KR" altLang="en-US" sz="1100" dirty="0">
                 <a:solidFill>
                   <a:srgbClr val="10231C"/>
                 </a:solidFill>
@@ -13641,19 +13716,77 @@
                 <a:ea typeface="Malgun Gothic" pitchFamily="34" charset="-122"/>
                 <a:cs typeface="Malgun Gothic" pitchFamily="34" charset="-120"/>
               </a:rPr>
-              <a:t>빈 차 귀로 비율 [ ] · 기다릴 수 있는 시간 [ ]분 · 귀로 손님 수락 의향 [ ]% · 수용 보전액 [ ]원</a:t>
-            </a:r>
-            <a:endParaRPr lang="ko-KR" altLang="en-US" sz="1150" dirty="0"/>
-          </a:p>
-          <a:p>
-            <a:pPr eaLnBrk="0" latinLnBrk="0" indent="0" marL="0">
-              <a:lnSpc>
-                <a:spcPct val="130000"/>
-              </a:lnSpc>
-              <a:buNone/>
-            </a:pPr>
-            <a:r>
-              <a:rPr lang="ko-KR" altLang="en-US" sz="1150" dirty="0">
+              <a:t>할증 때문에 택시 포기·대체</a:t>
+            </a:r>
+            <a:endParaRPr lang="ko-KR" altLang="en-US" sz="1100" dirty="0"/>
+          </a:p>
+        </p:txBody>
+      </p:sp>
+      <p:sp>
+        <p:nvSpPr>
+          <p:cNvPr id="23" name="Text 18"/>
+          <p:cNvSpPr txBox="1"/>
+          <p:nvPr/>
+        </p:nvSpPr>
+        <p:spPr>
+          <a:xfrm>
+            <a:off x="7104888" y="4983480"/>
+            <a:ext cx="1417320" cy="502920"/>
+          </a:xfrm>
+          <a:prstGeom prst="rect">
+            <a:avLst/>
+          </a:prstGeom>
+          <a:noFill/>
+          <a:ln/>
+        </p:spPr>
+        <p:txBody>
+          <a:bodyPr wrap="square" lIns="0" tIns="0" rIns="0" bIns="0" rtlCol="0" anchor="t"/>
+          <a:lstStyle/>
+          <a:p>
+            <a:pPr eaLnBrk="0" latinLnBrk="0" indent="0" marL="0">
+              <a:buNone/>
+            </a:pPr>
+            <a:r>
+              <a:rPr lang="ko-KR" altLang="en-US" sz="2200" b="1" dirty="0">
+                <a:solidFill>
+                  <a:srgbClr val="0F2A22"/>
+                </a:solidFill>
+                <a:latin typeface="Malgun Gothic" pitchFamily="34" charset="0"/>
+                <a:ea typeface="Malgun Gothic" pitchFamily="34" charset="-122"/>
+                <a:cs typeface="Malgun Gothic" pitchFamily="34" charset="-120"/>
+              </a:rPr>
+              <a:t>74%</a:t>
+            </a:r>
+            <a:endParaRPr lang="ko-KR" altLang="en-US" sz="2200" dirty="0"/>
+          </a:p>
+        </p:txBody>
+      </p:sp>
+      <p:sp>
+        <p:nvSpPr>
+          <p:cNvPr id="24" name="Text 19"/>
+          <p:cNvSpPr txBox="1"/>
+          <p:nvPr/>
+        </p:nvSpPr>
+        <p:spPr>
+          <a:xfrm>
+            <a:off x="7104888" y="5468112"/>
+            <a:ext cx="1417320" cy="685800"/>
+          </a:xfrm>
+          <a:prstGeom prst="rect">
+            <a:avLst/>
+          </a:prstGeom>
+          <a:noFill/>
+          <a:ln/>
+        </p:spPr>
+        <p:txBody>
+          <a:bodyPr wrap="square" lIns="0" tIns="0" rIns="0" bIns="0" rtlCol="0" anchor="t"/>
+          <a:lstStyle/>
+          <a:p>
+            <a:pPr eaLnBrk="0" latinLnBrk="0" indent="0" marL="0">
+              <a:buNone/>
+            </a:pPr>
+            <a:r>
+              <a:rPr lang="ko-KR" altLang="en-US" sz="1100" dirty="0">
                 <a:solidFill>
                   <a:srgbClr val="10231C"/>
                 </a:solidFill>
@@ -13661,15 +13794,171 @@
                 <a:ea typeface="Malgun Gothic" pitchFamily="34" charset="-122"/>
                 <a:cs typeface="Malgun Gothic" pitchFamily="34" charset="-120"/>
               </a:rPr>
-              <a:t>"[대표 인용]"</a:t>
-            </a:r>
-            <a:endParaRPr lang="ko-KR" altLang="en-US" sz="1150" dirty="0"/>
-          </a:p>
-        </p:txBody>
-      </p:sp>
-      <p:sp>
-        <p:nvSpPr>
-          <p:cNvPr id="22" name="Text 17"/>
+              <a:t>읍·면 35% 할증 불합리</a:t>
+            </a:r>
+            <a:endParaRPr lang="ko-KR" altLang="en-US" sz="1100" dirty="0"/>
+          </a:p>
+        </p:txBody>
+      </p:sp>
+      <p:sp>
+        <p:nvSpPr>
+          <p:cNvPr id="25" name="Text 20"/>
+          <p:cNvSpPr txBox="1"/>
+          <p:nvPr/>
+        </p:nvSpPr>
+        <p:spPr>
+          <a:xfrm>
+            <a:off x="8586216" y="4983480"/>
+            <a:ext cx="1417320" cy="502920"/>
+          </a:xfrm>
+          <a:prstGeom prst="rect">
+            <a:avLst/>
+          </a:prstGeom>
+          <a:noFill/>
+          <a:ln/>
+        </p:spPr>
+        <p:txBody>
+          <a:bodyPr wrap="square" lIns="0" tIns="0" rIns="0" bIns="0" rtlCol="0" anchor="t"/>
+          <a:lstStyle/>
+          <a:p>
+            <a:pPr eaLnBrk="0" latinLnBrk="0" indent="0" marL="0">
+              <a:buNone/>
+            </a:pPr>
+            <a:r>
+              <a:rPr lang="ko-KR" altLang="en-US" sz="2200" b="1" dirty="0">
+                <a:solidFill>
+                  <a:srgbClr val="0F2A22"/>
+                </a:solidFill>
+                <a:latin typeface="Malgun Gothic" pitchFamily="34" charset="0"/>
+                <a:ea typeface="Malgun Gothic" pitchFamily="34" charset="-122"/>
+                <a:cs typeface="Malgun Gothic" pitchFamily="34" charset="-120"/>
+              </a:rPr>
+              <a:t>93%</a:t>
+            </a:r>
+            <a:endParaRPr lang="ko-KR" altLang="en-US" sz="2200" dirty="0"/>
+          </a:p>
+        </p:txBody>
+      </p:sp>
+      <p:sp>
+        <p:nvSpPr>
+          <p:cNvPr id="26" name="Text 21"/>
+          <p:cNvSpPr txBox="1"/>
+          <p:nvPr/>
+        </p:nvSpPr>
+        <p:spPr>
+          <a:xfrm>
+            <a:off x="8586216" y="5468112"/>
+            <a:ext cx="1417320" cy="685800"/>
+          </a:xfrm>
+          <a:prstGeom prst="rect">
+            <a:avLst/>
+          </a:prstGeom>
+          <a:noFill/>
+          <a:ln/>
+        </p:spPr>
+        <p:txBody>
+          <a:bodyPr wrap="square" lIns="0" tIns="0" rIns="0" bIns="0" rtlCol="0" anchor="t"/>
+          <a:lstStyle/>
+          <a:p>
+            <a:pPr eaLnBrk="0" latinLnBrk="0" indent="0" marL="0">
+              <a:buNone/>
+            </a:pPr>
+            <a:r>
+              <a:rPr lang="ko-KR" altLang="en-US" sz="1100" dirty="0">
+                <a:solidFill>
+                  <a:srgbClr val="10231C"/>
+                </a:solidFill>
+                <a:latin typeface="Malgun Gothic" pitchFamily="34" charset="0"/>
+                <a:ea typeface="Malgun Gothic" pitchFamily="34" charset="-122"/>
+                <a:cs typeface="Malgun Gothic" pitchFamily="34" charset="-120"/>
+              </a:rPr>
+              <a:t>할증 없으면 이용 증가</a:t>
+            </a:r>
+            <a:endParaRPr lang="ko-KR" altLang="en-US" sz="1100" dirty="0"/>
+          </a:p>
+        </p:txBody>
+      </p:sp>
+      <p:sp>
+        <p:nvSpPr>
+          <p:cNvPr id="27" name="Text 22"/>
+          <p:cNvSpPr txBox="1"/>
+          <p:nvPr/>
+        </p:nvSpPr>
+        <p:spPr>
+          <a:xfrm>
+            <a:off x="10067544" y="4983480"/>
+            <a:ext cx="1417320" cy="502920"/>
+          </a:xfrm>
+          <a:prstGeom prst="rect">
+            <a:avLst/>
+          </a:prstGeom>
+          <a:noFill/>
+          <a:ln/>
+        </p:spPr>
+        <p:txBody>
+          <a:bodyPr wrap="square" lIns="0" tIns="0" rIns="0" bIns="0" rtlCol="0" anchor="t"/>
+          <a:lstStyle/>
+          <a:p>
+            <a:pPr eaLnBrk="0" latinLnBrk="0" indent="0" marL="0">
+              <a:buNone/>
+            </a:pPr>
+            <a:r>
+              <a:rPr lang="ko-KR" altLang="en-US" sz="2200" b="1" dirty="0">
+                <a:solidFill>
+                  <a:srgbClr val="1D9E75"/>
+                </a:solidFill>
+                <a:latin typeface="Malgun Gothic" pitchFamily="34" charset="0"/>
+                <a:ea typeface="Malgun Gothic" pitchFamily="34" charset="-122"/>
+                <a:cs typeface="Malgun Gothic" pitchFamily="34" charset="-120"/>
+              </a:rPr>
+              <a:t>96%</a:t>
+            </a:r>
+            <a:endParaRPr lang="ko-KR" altLang="en-US" sz="2200" dirty="0"/>
+          </a:p>
+        </p:txBody>
+      </p:sp>
+      <p:sp>
+        <p:nvSpPr>
+          <p:cNvPr id="28" name="Text 23"/>
+          <p:cNvSpPr txBox="1"/>
+          <p:nvPr/>
+        </p:nvSpPr>
+        <p:spPr>
+          <a:xfrm>
+            <a:off x="10067544" y="5468112"/>
+            <a:ext cx="1417320" cy="685800"/>
+          </a:xfrm>
+          <a:prstGeom prst="rect">
+            <a:avLst/>
+          </a:prstGeom>
+          <a:noFill/>
+          <a:ln/>
+        </p:spPr>
+        <p:txBody>
+          <a:bodyPr wrap="square" lIns="0" tIns="0" rIns="0" bIns="0" rtlCol="0" anchor="t"/>
+          <a:lstStyle/>
+          <a:p>
+            <a:pPr eaLnBrk="0" latinLnBrk="0" indent="0" marL="0">
+              <a:buNone/>
+            </a:pPr>
+            <a:r>
+              <a:rPr lang="ko-KR" altLang="en-US" sz="1100" dirty="0">
+                <a:solidFill>
+                  <a:srgbClr val="10231C"/>
+                </a:solidFill>
+                <a:latin typeface="Malgun Gothic" pitchFamily="34" charset="0"/>
+                <a:ea typeface="Malgun Gothic" pitchFamily="34" charset="-122"/>
+                <a:cs typeface="Malgun Gothic" pitchFamily="34" charset="-120"/>
+              </a:rPr>
+              <a:t>조건부 나눠 타기 의향</a:t>
+            </a:r>
+            <a:endParaRPr lang="ko-KR" altLang="en-US" sz="1100" dirty="0"/>
+          </a:p>
+        </p:txBody>
+      </p:sp>
+      <p:sp>
+        <p:nvSpPr>
+          <p:cNvPr id="29" name="Text 24"/>
           <p:cNvSpPr txBox="1"/>
           <p:nvPr/>
         </p:nvSpPr>
@@ -13700,7 +13989,7 @@
                 <a:ea typeface="Malgun Gothic" pitchFamily="34" charset="-122"/>
                 <a:cs typeface="Malgun Gothic" pitchFamily="34" charset="-120"/>
               </a:rPr>
-              <a:t>행위자 기반 시뮬레이션: 택시 2,956대·하루 약 5.6만 건, TIMS 2025 실측(차량당 19.5회·공차 46.5%) 보정, 2개 시드 평균 · 실측 아님</a:t>
+              <a:t>시뮬레이션: 택시 2,956대·하루 약 5.6만 건, TIMS 2025 실측 보정(실측 아님) · 설문: 57명, 대학생 84%·동 거주 77%로 편중 · 요금 분담은 거리 비율 선호 68% → 개선 과제</a:t>
             </a:r>
             <a:endParaRPr lang="ko-KR" altLang="en-US" sz="1050" dirty="0"/>
           </a:p>
@@ -13708,7 +13997,7 @@
       </p:sp>
       <p:sp>
         <p:nvSpPr>
-          <p:cNvPr id="23" name="Text 18"/>
+          <p:cNvPr id="30" name="Text 25"/>
           <p:cNvSpPr txBox="1"/>
           <p:nvPr/>
         </p:nvSpPr>

--- a/presentation/쉐어택_발표_v2.pptx
+++ b/presentation/쉐어택_발표_v2.pptx
@@ -13638,7 +13638,7 @@
                 <a:ea typeface="Malgun Gothic" pitchFamily="34" charset="-122"/>
                 <a:cs typeface="Malgun Gothic" pitchFamily="34" charset="-120"/>
               </a:rPr>
-              <a:t>📝 시민 설문 57명 (2026.10)</a:t>
+              <a:t>📝 시민 설문 57명 (2026.10) · 핵심 타깃 대학생 84%</a:t>
             </a:r>
             <a:endParaRPr lang="ko-KR" altLang="en-US" sz="1300" dirty="0"/>
           </a:p>
@@ -13989,7 +13989,7 @@
                 <a:ea typeface="Malgun Gothic" pitchFamily="34" charset="-122"/>
                 <a:cs typeface="Malgun Gothic" pitchFamily="34" charset="-120"/>
               </a:rPr>
-              <a:t>시뮬레이션: 택시 2,956대·하루 약 5.6만 건, TIMS 2025 실측 보정(실측 아님) · 설문: 57명, 대학생 84%·동 거주 77%로 편중 · 요금 분담은 거리 비율 선호 68% → 개선 과제</a:t>
+              <a:t>시뮬레이션: 택시 2,956대·하루 약 5.6만 건, TIMS 2025 실측 보정(실측 아님) · 설문: 57명 중 대학생 84% = 요금에 가장 민감한 초기 타깃 · 요금 분담은 거리 비율 선호 68% → 개선 과제</a:t>
             </a:r>
             <a:endParaRPr lang="ko-KR" altLang="en-US" sz="1050" dirty="0"/>
           </a:p>

--- a/presentation/쉐어택_발표_v2.pptx
+++ b/presentation/쉐어택_발표_v2.pptx
@@ -601,7 +601,7 @@
                 </a:solidFill>
                 <a:latin typeface="Arial"/>
               </a:rPr>
-              <a:t>📊 기사 수입 변화 (현행 대비, 할증 그대로)</a:t>
+              <a:t>기사 수입 변화 (현행 대비, 할증 그대로)</a:t>
             </a:r>
           </a:p>
         </c:rich>
@@ -1371,7 +1371,7 @@
           <a:p>
             <a:r>
               <a:rPr lang="en-US" dirty="0"/>
-              <a:t>손님은 오송역에서 시내까지 할증 포함 요금을 내고, 기사님은 오송에 손님을 내린 뒤 빈 차로 돌아옵니다. 같은 길에서 양쪽 모두 손해를 보고 있는 셈입니다. 페르소나는 설문과 TIMS 데이터를 바탕으로 만든 가상 인물입니다.</a:t>
+              <a:t>손님은 오송역에서 시내까지 할증 포함 요금을 내고, 기사님은 오송에 손님을 내린 뒤 빈 차로 돌아옵니다. 같은 길에서 양쪽 모두 손해를 보고 있는 셈입니다. 이 프로젝트는 팀원들이 오송역을 오가며 직접 겪은 할증 부담에서 시작했습니다.</a:t>
             </a:r>
             <a:endParaRPr lang="en-US" dirty="0"/>
           </a:p>
@@ -2482,22 +2482,22 @@
           </a:xfrm>
           <a:prstGeom prst="roundRect">
             <a:avLst>
-              <a:gd name="adj" fmla="val 7000"/>
+              <a:gd name="adj" fmla="val 2500"/>
             </a:avLst>
           </a:prstGeom>
           <a:solidFill>
             <a:srgbClr val="163A2F"/>
           </a:solidFill>
-          <a:ln w="12700">
+          <a:ln w="9525">
             <a:solidFill>
               <a:srgbClr val="163A2F"/>
             </a:solidFill>
             <a:prstDash val="solid"/>
           </a:ln>
           <a:effectLst>
-            <a:outerShdw sx="100000" sy="100000" kx="0" ky="0" algn="bl" rotWithShape="0" blurRad="101600" dist="38100" dir="5400000">
+            <a:outerShdw sx="100000" sy="100000" kx="0" ky="0" algn="bl" rotWithShape="0" blurRad="50800" dist="12700" dir="5400000">
               <a:srgbClr val="000000">
-                <a:alpha val="18000"/>
+                <a:alpha val="7000"/>
               </a:srgbClr>
             </a:outerShdw>
           </a:effectLst>
@@ -2633,22 +2633,22 @@
           </a:xfrm>
           <a:prstGeom prst="roundRect">
             <a:avLst>
-              <a:gd name="adj" fmla="val 7000"/>
+              <a:gd name="adj" fmla="val 2500"/>
             </a:avLst>
           </a:prstGeom>
           <a:solidFill>
             <a:srgbClr val="163A2F"/>
           </a:solidFill>
-          <a:ln w="12700">
+          <a:ln w="9525">
             <a:solidFill>
               <a:srgbClr val="163A2F"/>
             </a:solidFill>
             <a:prstDash val="solid"/>
           </a:ln>
           <a:effectLst>
-            <a:outerShdw sx="100000" sy="100000" kx="0" ky="0" algn="bl" rotWithShape="0" blurRad="101600" dist="38100" dir="5400000">
+            <a:outerShdw sx="100000" sy="100000" kx="0" ky="0" algn="bl" rotWithShape="0" blurRad="50800" dist="12700" dir="5400000">
               <a:srgbClr val="000000">
-                <a:alpha val="18000"/>
+                <a:alpha val="7000"/>
               </a:srgbClr>
             </a:outerShdw>
           </a:effectLst>
@@ -2801,22 +2801,22 @@
           </a:xfrm>
           <a:prstGeom prst="roundRect">
             <a:avLst>
-              <a:gd name="adj" fmla="val 7000"/>
+              <a:gd name="adj" fmla="val 2500"/>
             </a:avLst>
           </a:prstGeom>
           <a:solidFill>
             <a:srgbClr val="163A2F"/>
           </a:solidFill>
-          <a:ln w="12700">
+          <a:ln w="9525">
             <a:solidFill>
               <a:srgbClr val="163A2F"/>
             </a:solidFill>
             <a:prstDash val="solid"/>
           </a:ln>
           <a:effectLst>
-            <a:outerShdw sx="100000" sy="100000" kx="0" ky="0" algn="bl" rotWithShape="0" blurRad="101600" dist="38100" dir="5400000">
+            <a:outerShdw sx="100000" sy="100000" kx="0" ky="0" algn="bl" rotWithShape="0" blurRad="50800" dist="12700" dir="5400000">
               <a:srgbClr val="000000">
-                <a:alpha val="18000"/>
+                <a:alpha val="7000"/>
               </a:srgbClr>
             </a:outerShdw>
           </a:effectLst>
@@ -2989,7 +2989,7 @@
                 <a:ea typeface="Malgun Gothic" pitchFamily="34" charset="-122"/>
                 <a:cs typeface="Malgun Gothic" pitchFamily="34" charset="-120"/>
               </a:rPr>
-              <a:t>"할증의 목적은 승차난 방지와 공차 손실 보전" — 청주시 설명(2026.9 보도). 그렇다면 빈 차를 채우면 할증 이유도 사라지지 않을까? 🤔</a:t>
+              <a:t>할증은 빈 차로 돌아오는 손실을 메우기 위한 것. 그렇다면 빈 차를 채우면, 할증의 이유도 사라지지 않을까?</a:t>
             </a:r>
             <a:endParaRPr lang="ko-KR" altLang="en-US" sz="1250" dirty="0"/>
           </a:p>
@@ -3008,22 +3008,22 @@
           </a:xfrm>
           <a:prstGeom prst="roundRect">
             <a:avLst>
-              <a:gd name="adj" fmla="val 3333"/>
+              <a:gd name="adj" fmla="val 1190"/>
             </a:avLst>
           </a:prstGeom>
           <a:solidFill>
             <a:srgbClr val="FFFFFF"/>
           </a:solidFill>
-          <a:ln w="12700">
+          <a:ln w="9525">
             <a:solidFill>
-              <a:srgbClr val="FFFFFF"/>
+              <a:srgbClr val="DDE3DF"/>
             </a:solidFill>
             <a:prstDash val="solid"/>
           </a:ln>
           <a:effectLst>
-            <a:outerShdw sx="100000" sy="100000" kx="0" ky="0" algn="bl" rotWithShape="0" blurRad="101600" dist="38100" dir="5400000">
+            <a:outerShdw sx="100000" sy="100000" kx="0" ky="0" algn="bl" rotWithShape="0" blurRad="50800" dist="12700" dir="5400000">
               <a:srgbClr val="000000">
-                <a:alpha val="18000"/>
+                <a:alpha val="7000"/>
               </a:srgbClr>
             </a:outerShdw>
           </a:effectLst>
@@ -3062,7 +3062,7 @@
                 <a:ea typeface="Malgun Gothic" pitchFamily="34" charset="-122"/>
                 <a:cs typeface="Malgun Gothic" pitchFamily="34" charset="-120"/>
               </a:rPr>
-              <a:t>📑 CONTENTS</a:t>
+              <a:t>CONTENTS</a:t>
             </a:r>
             <a:endParaRPr lang="ko-KR" altLang="en-US" sz="1400" dirty="0"/>
           </a:p>
@@ -3538,45 +3538,6 @@
               <a:t>08 실행 계획</a:t>
             </a:r>
             <a:endParaRPr lang="ko-KR" altLang="en-US" sz="1400" dirty="0"/>
-          </a:p>
-        </p:txBody>
-      </p:sp>
-      <p:sp>
-        <p:nvSpPr>
-          <p:cNvPr id="38" name="Text 34"/>
-          <p:cNvSpPr txBox="1"/>
-          <p:nvPr/>
-        </p:nvSpPr>
-        <p:spPr>
-          <a:xfrm>
-            <a:off x="502920" y="6419088"/>
-            <a:ext cx="10607040" cy="292608"/>
-          </a:xfrm>
-          <a:prstGeom prst="rect">
-            <a:avLst/>
-          </a:prstGeom>
-          <a:noFill/>
-          <a:ln/>
-        </p:spPr>
-        <p:txBody>
-          <a:bodyPr wrap="square" lIns="0" tIns="0" rIns="0" bIns="0" rtlCol="0" anchor="ctr"/>
-          <a:lstStyle/>
-          <a:p>
-            <a:pPr eaLnBrk="0" latinLnBrk="0" indent="0" marL="0">
-              <a:buNone/>
-            </a:pPr>
-            <a:r>
-              <a:rPr lang="ko-KR" altLang="en-US" sz="1050" dirty="0">
-                <a:solidFill>
-                  <a:srgbClr val="A9B8B1"/>
-                </a:solidFill>
-                <a:latin typeface="Malgun Gothic" pitchFamily="34" charset="0"/>
-                <a:ea typeface="Malgun Gothic" pitchFamily="34" charset="-122"/>
-                <a:cs typeface="Malgun Gothic" pitchFamily="34" charset="-120"/>
-              </a:rPr>
-              <a:t>출처: TIMS 2025 격자·지자체 영업통계(국토교통부), 청주시 요금 보도(천지일보·충청일보)</a:t>
-            </a:r>
-            <a:endParaRPr lang="ko-KR" altLang="en-US" sz="1050" dirty="0"/>
           </a:p>
         </p:txBody>
       </p:sp>
@@ -3655,9 +3616,9 @@
             <a:prstDash val="solid"/>
           </a:ln>
           <a:effectLst>
-            <a:outerShdw sx="100000" sy="100000" kx="0" ky="0" algn="bl" rotWithShape="0" blurRad="101600" dist="38100" dir="5400000">
+            <a:outerShdw sx="100000" sy="100000" kx="0" ky="0" algn="bl" rotWithShape="0" blurRad="50800" dist="12700" dir="5400000">
               <a:srgbClr val="000000">
-                <a:alpha val="18000"/>
+                <a:alpha val="7000"/>
               </a:srgbClr>
             </a:outerShdw>
           </a:effectLst>
@@ -3774,7 +3735,7 @@
                 <a:ea typeface="Malgun Gothic" pitchFamily="34" charset="-122"/>
                 <a:cs typeface="Malgun Gothic" pitchFamily="34" charset="-120"/>
               </a:rPr>
-              <a:t>손님도 기사도 같은 길에서 손해를 보고 있었어요</a:t>
+              <a:t>우리 팀원들이 직접 겪은 복합할증 요금 부담에서 시작했어요</a:t>
             </a:r>
             <a:endParaRPr lang="ko-KR" altLang="en-US" sz="1400" dirty="0"/>
           </a:p>
@@ -3782,46 +3743,7 @@
       </p:sp>
       <p:sp>
         <p:nvSpPr>
-          <p:cNvPr id="7" name="Text 4"/>
-          <p:cNvSpPr txBox="1"/>
-          <p:nvPr/>
-        </p:nvSpPr>
-        <p:spPr>
-          <a:xfrm>
-            <a:off x="7863840" y="868680"/>
-            <a:ext cx="3840480" cy="274320"/>
-          </a:xfrm>
-          <a:prstGeom prst="rect">
-            <a:avLst/>
-          </a:prstGeom>
-          <a:noFill/>
-          <a:ln/>
-        </p:spPr>
-        <p:txBody>
-          <a:bodyPr wrap="square" lIns="0" tIns="0" rIns="0" bIns="0" rtlCol="0" anchor="t"/>
-          <a:lstStyle/>
-          <a:p>
-            <a:pPr eaLnBrk="0" latinLnBrk="0" algn="r" indent="0" marL="0">
-              <a:buNone/>
-            </a:pPr>
-            <a:r>
-              <a:rPr lang="ko-KR" altLang="en-US" sz="1050" dirty="0">
-                <a:solidFill>
-                  <a:srgbClr val="4A5A54"/>
-                </a:solidFill>
-                <a:latin typeface="Malgun Gothic" pitchFamily="34" charset="0"/>
-                <a:ea typeface="Malgun Gothic" pitchFamily="34" charset="-122"/>
-                <a:cs typeface="Malgun Gothic" pitchFamily="34" charset="-120"/>
-              </a:rPr>
-              <a:t>※ 페르소나는 설문·데이터를 바탕으로 만든 가상 인물</a:t>
-            </a:r>
-            <a:endParaRPr lang="ko-KR" altLang="en-US" sz="1050" dirty="0"/>
-          </a:p>
-        </p:txBody>
-      </p:sp>
-      <p:sp>
-        <p:nvSpPr>
-          <p:cNvPr id="8" name="Shape 5"/>
+          <p:cNvPr id="7" name="Shape 4"/>
           <p:cNvSpPr/>
           <p:nvPr/>
         </p:nvSpPr>
@@ -3832,22 +3754,22 @@
           </a:xfrm>
           <a:prstGeom prst="roundRect">
             <a:avLst>
-              <a:gd name="adj" fmla="val 5490"/>
+              <a:gd name="adj" fmla="val 1961"/>
             </a:avLst>
           </a:prstGeom>
           <a:solidFill>
             <a:srgbClr val="FFFFFF"/>
           </a:solidFill>
-          <a:ln w="12700">
+          <a:ln w="9525">
             <a:solidFill>
-              <a:srgbClr val="FFFFFF"/>
+              <a:srgbClr val="DDE3DF"/>
             </a:solidFill>
             <a:prstDash val="solid"/>
           </a:ln>
           <a:effectLst>
-            <a:outerShdw sx="100000" sy="100000" kx="0" ky="0" algn="bl" rotWithShape="0" blurRad="101600" dist="38100" dir="5400000">
+            <a:outerShdw sx="100000" sy="100000" kx="0" ky="0" algn="bl" rotWithShape="0" blurRad="50800" dist="12700" dir="5400000">
               <a:srgbClr val="000000">
-                <a:alpha val="18000"/>
+                <a:alpha val="7000"/>
               </a:srgbClr>
             </a:outerShdw>
           </a:effectLst>
@@ -3855,7 +3777,7 @@
       </p:sp>
       <p:sp>
         <p:nvSpPr>
-          <p:cNvPr id="9" name="Text 6"/>
+          <p:cNvPr id="8" name="Text 5"/>
           <p:cNvSpPr txBox="1"/>
           <p:nvPr/>
         </p:nvSpPr>
@@ -3894,7 +3816,7 @@
       </p:sp>
       <p:sp>
         <p:nvSpPr>
-          <p:cNvPr id="10" name="Text 7"/>
+          <p:cNvPr id="9" name="Text 6"/>
           <p:cNvSpPr txBox="1"/>
           <p:nvPr/>
         </p:nvSpPr>
@@ -3925,7 +3847,7 @@
                 <a:ea typeface="Malgun Gothic" pitchFamily="34" charset="-122"/>
                 <a:cs typeface="Malgun Gothic" pitchFamily="34" charset="-120"/>
               </a:rPr>
-              <a:t>손님 · 김서윤 (28)</a:t>
+              <a:t>손님 · 팀원의 경험</a:t>
             </a:r>
             <a:endParaRPr lang="ko-KR" altLang="en-US" sz="1600" dirty="0"/>
           </a:p>
@@ -3933,7 +3855,7 @@
       </p:sp>
       <p:sp>
         <p:nvSpPr>
-          <p:cNvPr id="11" name="Text 8"/>
+          <p:cNvPr id="10" name="Text 7"/>
           <p:cNvSpPr txBox="1"/>
           <p:nvPr/>
         </p:nvSpPr>
@@ -3964,7 +3886,7 @@
                 <a:ea typeface="Malgun Gothic" pitchFamily="34" charset="-122"/>
                 <a:cs typeface="Malgun Gothic" pitchFamily="34" charset="-120"/>
               </a:rPr>
-              <a:t>오송 바이오단지 연구원 · KTX로 서울 출장</a:t>
+              <a:t>충북대 학생 · KTX 타러 오송역을 오가는 길</a:t>
             </a:r>
             <a:endParaRPr lang="ko-KR" altLang="en-US" sz="1100" dirty="0"/>
           </a:p>
@@ -3972,7 +3894,7 @@
       </p:sp>
       <p:sp>
         <p:nvSpPr>
-          <p:cNvPr id="12" name="Shape 9"/>
+          <p:cNvPr id="11" name="Shape 8"/>
           <p:cNvSpPr/>
           <p:nvPr/>
         </p:nvSpPr>
@@ -3999,7 +3921,7 @@
       </p:sp>
       <p:sp>
         <p:nvSpPr>
-          <p:cNvPr id="13" name="Text 10"/>
+          <p:cNvPr id="12" name="Text 9"/>
           <p:cNvSpPr txBox="1"/>
           <p:nvPr/>
         </p:nvSpPr>
@@ -4030,7 +3952,7 @@
                 <a:ea typeface="Malgun Gothic" pitchFamily="34" charset="-122"/>
                 <a:cs typeface="Malgun Gothic" pitchFamily="34" charset="-120"/>
               </a:rPr>
-              <a:t>"오송역에서 시내까지 택시비가 1만 8천 원 가까이 나와요"</a:t>
+              <a:t>"같은 청주인데 오송역만 가면 택시비가 확 뛰어요"</a:t>
             </a:r>
             <a:endParaRPr lang="ko-KR" altLang="en-US" sz="1150" dirty="0"/>
           </a:p>
@@ -4038,7 +3960,7 @@
       </p:sp>
       <p:sp>
         <p:nvSpPr>
-          <p:cNvPr id="14" name="Text 11"/>
+          <p:cNvPr id="13" name="Text 10"/>
           <p:cNvSpPr txBox="1"/>
           <p:nvPr/>
         </p:nvSpPr>
@@ -4096,7 +4018,7 @@
       </p:sp>
       <p:sp>
         <p:nvSpPr>
-          <p:cNvPr id="15" name="Shape 12"/>
+          <p:cNvPr id="14" name="Shape 11"/>
           <p:cNvSpPr/>
           <p:nvPr/>
         </p:nvSpPr>
@@ -4107,22 +4029,22 @@
           </a:xfrm>
           <a:prstGeom prst="roundRect">
             <a:avLst>
-              <a:gd name="adj" fmla="val 5490"/>
+              <a:gd name="adj" fmla="val 1961"/>
             </a:avLst>
           </a:prstGeom>
           <a:solidFill>
             <a:srgbClr val="FFFFFF"/>
           </a:solidFill>
-          <a:ln w="12700">
+          <a:ln w="9525">
             <a:solidFill>
-              <a:srgbClr val="FFFFFF"/>
+              <a:srgbClr val="DDE3DF"/>
             </a:solidFill>
             <a:prstDash val="solid"/>
           </a:ln>
           <a:effectLst>
-            <a:outerShdw sx="100000" sy="100000" kx="0" ky="0" algn="bl" rotWithShape="0" blurRad="101600" dist="38100" dir="5400000">
+            <a:outerShdw sx="100000" sy="100000" kx="0" ky="0" algn="bl" rotWithShape="0" blurRad="50800" dist="12700" dir="5400000">
               <a:srgbClr val="000000">
-                <a:alpha val="18000"/>
+                <a:alpha val="7000"/>
               </a:srgbClr>
             </a:outerShdw>
           </a:effectLst>
@@ -4130,7 +4052,7 @@
       </p:sp>
       <p:sp>
         <p:nvSpPr>
-          <p:cNvPr id="16" name="Text 13"/>
+          <p:cNvPr id="15" name="Text 12"/>
           <p:cNvSpPr txBox="1"/>
           <p:nvPr/>
         </p:nvSpPr>
@@ -4169,7 +4091,7 @@
       </p:sp>
       <p:sp>
         <p:nvSpPr>
-          <p:cNvPr id="17" name="Text 14"/>
+          <p:cNvPr id="16" name="Text 13"/>
           <p:cNvSpPr txBox="1"/>
           <p:nvPr/>
         </p:nvSpPr>
@@ -4200,7 +4122,7 @@
                 <a:ea typeface="Malgun Gothic" pitchFamily="34" charset="-122"/>
                 <a:cs typeface="Malgun Gothic" pitchFamily="34" charset="-120"/>
               </a:rPr>
-              <a:t>기사 · 박정호 (54)</a:t>
+              <a:t>기사 · 귀로의 현실</a:t>
             </a:r>
             <a:endParaRPr lang="ko-KR" altLang="en-US" sz="1600" dirty="0"/>
           </a:p>
@@ -4208,7 +4130,7 @@
       </p:sp>
       <p:sp>
         <p:nvSpPr>
-          <p:cNvPr id="18" name="Text 15"/>
+          <p:cNvPr id="17" name="Text 14"/>
           <p:cNvSpPr txBox="1"/>
           <p:nvPr/>
         </p:nvSpPr>
@@ -4239,7 +4161,7 @@
                 <a:ea typeface="Malgun Gothic" pitchFamily="34" charset="-122"/>
                 <a:cs typeface="Malgun Gothic" pitchFamily="34" charset="-120"/>
               </a:rPr>
-              <a:t>청주 법인택시 · 시내↔오송·오창 운행</a:t>
+              <a:t>시내 ↔ 오송·오창을 오가는 택시</a:t>
             </a:r>
             <a:endParaRPr lang="ko-KR" altLang="en-US" sz="1100" dirty="0"/>
           </a:p>
@@ -4247,7 +4169,7 @@
       </p:sp>
       <p:sp>
         <p:nvSpPr>
-          <p:cNvPr id="19" name="Shape 16"/>
+          <p:cNvPr id="18" name="Shape 15"/>
           <p:cNvSpPr/>
           <p:nvPr/>
         </p:nvSpPr>
@@ -4274,7 +4196,7 @@
       </p:sp>
       <p:sp>
         <p:nvSpPr>
-          <p:cNvPr id="20" name="Text 17"/>
+          <p:cNvPr id="19" name="Text 16"/>
           <p:cNvSpPr txBox="1"/>
           <p:nvPr/>
         </p:nvSpPr>
@@ -4313,7 +4235,7 @@
       </p:sp>
       <p:sp>
         <p:nvSpPr>
-          <p:cNvPr id="21" name="Text 18"/>
+          <p:cNvPr id="20" name="Text 17"/>
           <p:cNvSpPr txBox="1"/>
           <p:nvPr/>
         </p:nvSpPr>
@@ -4345,7 +4267,7 @@
                 <a:ea typeface="Malgun Gothic" pitchFamily="34" charset="-122"/>
                 <a:cs typeface="Malgun Gothic" pitchFamily="34" charset="-120"/>
               </a:rPr>
-              <a:t>🛣️ 읍·면 하차 후 빈 차 귀로 = 연료·시간 손해</a:t>
+              <a:t>읍·면 하차 후 빈 차 귀로 = 연료·시간 손해</a:t>
             </a:r>
             <a:endParaRPr lang="ko-KR" altLang="en-US" sz="1250" dirty="0"/>
           </a:p>
@@ -4371,7 +4293,7 @@
       </p:sp>
       <p:sp>
         <p:nvSpPr>
-          <p:cNvPr id="22" name="Shape 19"/>
+          <p:cNvPr id="21" name="Shape 18"/>
           <p:cNvSpPr/>
           <p:nvPr/>
         </p:nvSpPr>
@@ -4382,22 +4304,22 @@
           </a:xfrm>
           <a:prstGeom prst="roundRect">
             <a:avLst>
-              <a:gd name="adj" fmla="val 5283"/>
+              <a:gd name="adj" fmla="val 1887"/>
             </a:avLst>
           </a:prstGeom>
           <a:solidFill>
             <a:srgbClr val="FFFFFF"/>
           </a:solidFill>
-          <a:ln w="12700">
+          <a:ln w="9525">
             <a:solidFill>
-              <a:srgbClr val="FFFFFF"/>
+              <a:srgbClr val="DDE3DF"/>
             </a:solidFill>
             <a:prstDash val="solid"/>
           </a:ln>
           <a:effectLst>
-            <a:outerShdw sx="100000" sy="100000" kx="0" ky="0" algn="bl" rotWithShape="0" blurRad="101600" dist="38100" dir="5400000">
+            <a:outerShdw sx="100000" sy="100000" kx="0" ky="0" algn="bl" rotWithShape="0" blurRad="50800" dist="12700" dir="5400000">
               <a:srgbClr val="000000">
-                <a:alpha val="18000"/>
+                <a:alpha val="7000"/>
               </a:srgbClr>
             </a:outerShdw>
           </a:effectLst>
@@ -4405,7 +4327,7 @@
       </p:sp>
       <p:sp>
         <p:nvSpPr>
-          <p:cNvPr id="23" name="Text 20"/>
+          <p:cNvPr id="22" name="Text 19"/>
           <p:cNvSpPr txBox="1"/>
           <p:nvPr/>
         </p:nvSpPr>
@@ -4436,7 +4358,7 @@
                 <a:ea typeface="Malgun Gothic" pitchFamily="34" charset="-122"/>
                 <a:cs typeface="Malgun Gothic" pitchFamily="34" charset="-120"/>
               </a:rPr>
-              <a:t>🗺️ 손님 여정  (지금 → 쉐어택)</a:t>
+              <a:t>손님 여정  (지금 → 쉐어택)</a:t>
             </a:r>
             <a:endParaRPr lang="ko-KR" altLang="en-US" sz="1300" dirty="0"/>
           </a:p>
@@ -4444,7 +4366,7 @@
       </p:sp>
       <p:sp>
         <p:nvSpPr>
-          <p:cNvPr id="24" name="Shape 21"/>
+          <p:cNvPr id="23" name="Shape 20"/>
           <p:cNvSpPr/>
           <p:nvPr/>
         </p:nvSpPr>
@@ -4469,7 +4391,7 @@
       </p:sp>
       <p:sp>
         <p:nvSpPr>
-          <p:cNvPr id="25" name="Text 22"/>
+          <p:cNvPr id="24" name="Text 21"/>
           <p:cNvSpPr txBox="1"/>
           <p:nvPr/>
         </p:nvSpPr>
@@ -4508,7 +4430,7 @@
       </p:sp>
       <p:sp>
         <p:nvSpPr>
-          <p:cNvPr id="26" name="Text 23"/>
+          <p:cNvPr id="25" name="Text 22"/>
           <p:cNvSpPr txBox="1"/>
           <p:nvPr/>
         </p:nvSpPr>
@@ -4547,7 +4469,7 @@
       </p:sp>
       <p:sp>
         <p:nvSpPr>
-          <p:cNvPr id="27" name="Shape 24"/>
+          <p:cNvPr id="26" name="Shape 23"/>
           <p:cNvSpPr/>
           <p:nvPr/>
         </p:nvSpPr>
@@ -4571,7 +4493,7 @@
       </p:sp>
       <p:sp>
         <p:nvSpPr>
-          <p:cNvPr id="28" name="Shape 25"/>
+          <p:cNvPr id="27" name="Shape 24"/>
           <p:cNvSpPr/>
           <p:nvPr/>
         </p:nvSpPr>
@@ -4596,7 +4518,7 @@
       </p:sp>
       <p:sp>
         <p:nvSpPr>
-          <p:cNvPr id="29" name="Text 26"/>
+          <p:cNvPr id="28" name="Text 25"/>
           <p:cNvSpPr txBox="1"/>
           <p:nvPr/>
         </p:nvSpPr>
@@ -4635,7 +4557,7 @@
       </p:sp>
       <p:sp>
         <p:nvSpPr>
-          <p:cNvPr id="30" name="Text 27"/>
+          <p:cNvPr id="29" name="Text 26"/>
           <p:cNvSpPr txBox="1"/>
           <p:nvPr/>
         </p:nvSpPr>
@@ -4674,7 +4596,7 @@
       </p:sp>
       <p:sp>
         <p:nvSpPr>
-          <p:cNvPr id="31" name="Shape 28"/>
+          <p:cNvPr id="30" name="Shape 27"/>
           <p:cNvSpPr/>
           <p:nvPr/>
         </p:nvSpPr>
@@ -4698,7 +4620,7 @@
       </p:sp>
       <p:sp>
         <p:nvSpPr>
-          <p:cNvPr id="32" name="Shape 29"/>
+          <p:cNvPr id="31" name="Shape 28"/>
           <p:cNvSpPr/>
           <p:nvPr/>
         </p:nvSpPr>
@@ -4723,7 +4645,7 @@
       </p:sp>
       <p:sp>
         <p:nvSpPr>
-          <p:cNvPr id="33" name="Text 30"/>
+          <p:cNvPr id="32" name="Text 29"/>
           <p:cNvSpPr txBox="1"/>
           <p:nvPr/>
         </p:nvSpPr>
@@ -4762,7 +4684,7 @@
       </p:sp>
       <p:sp>
         <p:nvSpPr>
-          <p:cNvPr id="34" name="Text 31"/>
+          <p:cNvPr id="33" name="Text 30"/>
           <p:cNvSpPr txBox="1"/>
           <p:nvPr/>
         </p:nvSpPr>
@@ -4801,7 +4723,7 @@
       </p:sp>
       <p:sp>
         <p:nvSpPr>
-          <p:cNvPr id="35" name="Shape 32"/>
+          <p:cNvPr id="34" name="Shape 31"/>
           <p:cNvSpPr/>
           <p:nvPr/>
         </p:nvSpPr>
@@ -4825,7 +4747,7 @@
       </p:sp>
       <p:sp>
         <p:nvSpPr>
-          <p:cNvPr id="36" name="Shape 33"/>
+          <p:cNvPr id="35" name="Shape 32"/>
           <p:cNvSpPr/>
           <p:nvPr/>
         </p:nvSpPr>
@@ -4850,7 +4772,7 @@
       </p:sp>
       <p:sp>
         <p:nvSpPr>
-          <p:cNvPr id="37" name="Text 34"/>
+          <p:cNvPr id="36" name="Text 33"/>
           <p:cNvSpPr txBox="1"/>
           <p:nvPr/>
         </p:nvSpPr>
@@ -4889,7 +4811,7 @@
       </p:sp>
       <p:sp>
         <p:nvSpPr>
-          <p:cNvPr id="38" name="Text 35"/>
+          <p:cNvPr id="37" name="Text 34"/>
           <p:cNvSpPr txBox="1"/>
           <p:nvPr/>
         </p:nvSpPr>
@@ -4928,7 +4850,7 @@
       </p:sp>
       <p:sp>
         <p:nvSpPr>
-          <p:cNvPr id="39" name="Shape 36"/>
+          <p:cNvPr id="38" name="Shape 35"/>
           <p:cNvSpPr/>
           <p:nvPr/>
         </p:nvSpPr>
@@ -4952,7 +4874,7 @@
       </p:sp>
       <p:sp>
         <p:nvSpPr>
-          <p:cNvPr id="40" name="Shape 37"/>
+          <p:cNvPr id="39" name="Shape 36"/>
           <p:cNvSpPr/>
           <p:nvPr/>
         </p:nvSpPr>
@@ -4977,7 +4899,7 @@
       </p:sp>
       <p:sp>
         <p:nvSpPr>
-          <p:cNvPr id="41" name="Text 38"/>
+          <p:cNvPr id="40" name="Text 37"/>
           <p:cNvSpPr txBox="1"/>
           <p:nvPr/>
         </p:nvSpPr>
@@ -5016,7 +4938,7 @@
       </p:sp>
       <p:sp>
         <p:nvSpPr>
-          <p:cNvPr id="42" name="Text 39"/>
+          <p:cNvPr id="41" name="Text 38"/>
           <p:cNvSpPr txBox="1"/>
           <p:nvPr/>
         </p:nvSpPr>
@@ -5055,7 +4977,7 @@
       </p:sp>
       <p:sp>
         <p:nvSpPr>
-          <p:cNvPr id="43" name="Shape 40"/>
+          <p:cNvPr id="42" name="Shape 39"/>
           <p:cNvSpPr/>
           <p:nvPr/>
         </p:nvSpPr>
@@ -5082,7 +5004,7 @@
       </p:sp>
       <p:sp>
         <p:nvSpPr>
-          <p:cNvPr id="44" name="Text 41"/>
+          <p:cNvPr id="43" name="Text 40"/>
           <p:cNvSpPr txBox="1"/>
           <p:nvPr/>
         </p:nvSpPr>
@@ -5113,7 +5035,7 @@
                 <a:ea typeface="Malgun Gothic" pitchFamily="34" charset="-122"/>
                 <a:cs typeface="Malgun Gothic" pitchFamily="34" charset="-120"/>
               </a:rPr>
-              <a:t>💡 INSIGHT  ① 손님은 있는데 빈 차와 엇갈린다  ② 기사 손해는 빈 차 귀로다  ③ 할증은 양쪽 모두에게 불만</a:t>
+              <a:t>INSIGHT  ① 손님은 있는데 빈 차와 엇갈린다  ② 기사 손해는 빈 차 귀로다  ③ 할증은 양쪽 모두에게 불만</a:t>
             </a:r>
             <a:endParaRPr lang="ko-KR" altLang="en-US" sz="1300" dirty="0"/>
           </a:p>
@@ -5121,7 +5043,7 @@
       </p:sp>
       <p:sp>
         <p:nvSpPr>
-          <p:cNvPr id="45" name="Text 42"/>
+          <p:cNvPr id="44" name="Text 41"/>
           <p:cNvSpPr txBox="1"/>
           <p:nvPr/>
         </p:nvSpPr>
@@ -5233,9 +5155,9 @@
             <a:prstDash val="solid"/>
           </a:ln>
           <a:effectLst>
-            <a:outerShdw sx="100000" sy="100000" kx="0" ky="0" algn="bl" rotWithShape="0" blurRad="101600" dist="38100" dir="5400000">
+            <a:outerShdw sx="100000" sy="100000" kx="0" ky="0" algn="bl" rotWithShape="0" blurRad="50800" dist="12700" dir="5400000">
               <a:srgbClr val="000000">
-                <a:alpha val="18000"/>
+                <a:alpha val="7000"/>
               </a:srgbClr>
             </a:outerShdw>
           </a:effectLst>
@@ -5371,22 +5293,22 @@
           </a:xfrm>
           <a:prstGeom prst="roundRect">
             <a:avLst>
-              <a:gd name="adj" fmla="val 3784"/>
+              <a:gd name="adj" fmla="val 1351"/>
             </a:avLst>
           </a:prstGeom>
           <a:solidFill>
             <a:srgbClr val="FFFFFF"/>
           </a:solidFill>
-          <a:ln w="12700">
+          <a:ln w="9525">
             <a:solidFill>
-              <a:srgbClr val="FFFFFF"/>
+              <a:srgbClr val="DDE3DF"/>
             </a:solidFill>
             <a:prstDash val="solid"/>
           </a:ln>
           <a:effectLst>
-            <a:outerShdw sx="100000" sy="100000" kx="0" ky="0" algn="bl" rotWithShape="0" blurRad="101600" dist="38100" dir="5400000">
+            <a:outerShdw sx="100000" sy="100000" kx="0" ky="0" algn="bl" rotWithShape="0" blurRad="50800" dist="12700" dir="5400000">
               <a:srgbClr val="000000">
-                <a:alpha val="18000"/>
+                <a:alpha val="7000"/>
               </a:srgbClr>
             </a:outerShdw>
           </a:effectLst>
@@ -5425,7 +5347,7 @@
                 <a:ea typeface="Malgun Gothic" pitchFamily="34" charset="-122"/>
                 <a:cs typeface="Malgun Gothic" pitchFamily="34" charset="-120"/>
               </a:rPr>
-              <a:t>🚗 빈 차 주행 비율</a:t>
+              <a:t>빈 차 주행 비율</a:t>
             </a:r>
             <a:endParaRPr lang="ko-KR" altLang="en-US" sz="1300" dirty="0"/>
           </a:p>
@@ -5582,7 +5504,7 @@
                 <a:ea typeface="Malgun Gothic" pitchFamily="34" charset="-122"/>
                 <a:cs typeface="Malgun Gothic" pitchFamily="34" charset="-120"/>
               </a:rPr>
-              <a:t>📈 수요는 충분해요</a:t>
+              <a:t>수요는 충분해요</a:t>
             </a:r>
             <a:endParaRPr lang="ko-KR" altLang="en-US" sz="1300" dirty="0"/>
           </a:p>
@@ -5816,7 +5738,7 @@
                 <a:ea typeface="Malgun Gothic" pitchFamily="34" charset="-122"/>
                 <a:cs typeface="Malgun Gothic" pitchFamily="34" charset="-120"/>
               </a:rPr>
-              <a:t>🔑 손님이 없는 게 아니라</a:t>
+              <a:t>손님이 없는 게 아니라</a:t>
             </a:r>
             <a:endParaRPr lang="ko-KR" altLang="en-US" sz="1250" dirty="0"/>
           </a:p>
@@ -5852,22 +5774,22 @@
           </a:xfrm>
           <a:prstGeom prst="roundRect">
             <a:avLst>
-              <a:gd name="adj" fmla="val 3889"/>
+              <a:gd name="adj" fmla="val 1389"/>
             </a:avLst>
           </a:prstGeom>
           <a:solidFill>
             <a:srgbClr val="FFFFFF"/>
           </a:solidFill>
-          <a:ln w="12700">
+          <a:ln w="9525">
             <a:solidFill>
-              <a:srgbClr val="FFFFFF"/>
+              <a:srgbClr val="DDE3DF"/>
             </a:solidFill>
             <a:prstDash val="solid"/>
           </a:ln>
           <a:effectLst>
-            <a:outerShdw sx="100000" sy="100000" kx="0" ky="0" algn="bl" rotWithShape="0" blurRad="101600" dist="38100" dir="5400000">
+            <a:outerShdw sx="100000" sy="100000" kx="0" ky="0" algn="bl" rotWithShape="0" blurRad="50800" dist="12700" dir="5400000">
               <a:srgbClr val="000000">
-                <a:alpha val="18000"/>
+                <a:alpha val="7000"/>
               </a:srgbClr>
             </a:outerShdw>
           </a:effectLst>
@@ -5992,22 +5914,22 @@
           </a:xfrm>
           <a:prstGeom prst="roundRect">
             <a:avLst>
-              <a:gd name="adj" fmla="val 3091"/>
+              <a:gd name="adj" fmla="val 1104"/>
             </a:avLst>
           </a:prstGeom>
           <a:solidFill>
             <a:srgbClr val="FFFFFF"/>
           </a:solidFill>
-          <a:ln w="12700">
+          <a:ln w="9525">
             <a:solidFill>
-              <a:srgbClr val="FFFFFF"/>
+              <a:srgbClr val="DDE3DF"/>
             </a:solidFill>
             <a:prstDash val="solid"/>
           </a:ln>
           <a:effectLst>
-            <a:outerShdw sx="100000" sy="100000" kx="0" ky="0" algn="bl" rotWithShape="0" blurRad="101600" dist="38100" dir="5400000">
+            <a:outerShdw sx="100000" sy="100000" kx="0" ky="0" algn="bl" rotWithShape="0" blurRad="50800" dist="12700" dir="5400000">
               <a:srgbClr val="000000">
-                <a:alpha val="18000"/>
+                <a:alpha val="7000"/>
               </a:srgbClr>
             </a:outerShdw>
           </a:effectLst>
@@ -6032,45 +5954,6 @@
       <p:sp>
         <p:nvSpPr>
           <p:cNvPr id="21" name="Text 16"/>
-          <p:cNvSpPr txBox="1"/>
-          <p:nvPr/>
-        </p:nvSpPr>
-        <p:spPr>
-          <a:xfrm>
-            <a:off x="502920" y="6419088"/>
-            <a:ext cx="10607040" cy="292608"/>
-          </a:xfrm>
-          <a:prstGeom prst="rect">
-            <a:avLst/>
-          </a:prstGeom>
-          <a:noFill/>
-          <a:ln/>
-        </p:spPr>
-        <p:txBody>
-          <a:bodyPr wrap="square" lIns="0" tIns="0" rIns="0" bIns="0" rtlCol="0" anchor="ctr"/>
-          <a:lstStyle/>
-          <a:p>
-            <a:pPr eaLnBrk="0" latinLnBrk="0" indent="0" marL="0">
-              <a:buNone/>
-            </a:pPr>
-            <a:r>
-              <a:rPr lang="ko-KR" altLang="en-US" sz="1050" dirty="0">
-                <a:solidFill>
-                  <a:srgbClr val="4A5A54"/>
-                </a:solidFill>
-                <a:latin typeface="Malgun Gothic" pitchFamily="34" charset="0"/>
-                <a:ea typeface="Malgun Gothic" pitchFamily="34" charset="-122"/>
-                <a:cs typeface="Malgun Gothic" pitchFamily="34" charset="-120"/>
-              </a:rPr>
-              <a:t>지수 = 승차 밀도 0.5 + 버스정류장 부족 0.25 + 시내까지 거리 0.25 · 시내행 비율은 KTDB 2024 평일 OD 기준 추정</a:t>
-            </a:r>
-            <a:endParaRPr lang="ko-KR" altLang="en-US" sz="1050" dirty="0"/>
-          </a:p>
-        </p:txBody>
-      </p:sp>
-      <p:sp>
-        <p:nvSpPr>
-          <p:cNvPr id="22" name="Text 17"/>
           <p:cNvSpPr txBox="1"/>
           <p:nvPr/>
         </p:nvSpPr>
@@ -6182,9 +6065,9 @@
             <a:prstDash val="solid"/>
           </a:ln>
           <a:effectLst>
-            <a:outerShdw sx="100000" sy="100000" kx="0" ky="0" algn="bl" rotWithShape="0" blurRad="101600" dist="38100" dir="5400000">
+            <a:outerShdw sx="100000" sy="100000" kx="0" ky="0" algn="bl" rotWithShape="0" blurRad="50800" dist="12700" dir="5400000">
               <a:srgbClr val="000000">
-                <a:alpha val="18000"/>
+                <a:alpha val="7000"/>
               </a:srgbClr>
             </a:outerShdw>
           </a:effectLst>
@@ -6333,9 +6216,9 @@
             <a:prstDash val="solid"/>
           </a:ln>
           <a:effectLst>
-            <a:outerShdw sx="100000" sy="100000" kx="0" ky="0" algn="bl" rotWithShape="0" blurRad="101600" dist="38100" dir="5400000">
+            <a:outerShdw sx="100000" sy="100000" kx="0" ky="0" algn="bl" rotWithShape="0" blurRad="50800" dist="12700" dir="5400000">
               <a:srgbClr val="000000">
-                <a:alpha val="18000"/>
+                <a:alpha val="7000"/>
               </a:srgbClr>
             </a:outerShdw>
           </a:effectLst>
@@ -6406,9 +6289,9 @@
             <a:prstDash val="solid"/>
           </a:ln>
           <a:effectLst>
-            <a:outerShdw sx="100000" sy="100000" kx="0" ky="0" algn="bl" rotWithShape="0" blurRad="101600" dist="38100" dir="5400000">
+            <a:outerShdw sx="100000" sy="100000" kx="0" ky="0" algn="bl" rotWithShape="0" blurRad="50800" dist="12700" dir="5400000">
               <a:srgbClr val="000000">
-                <a:alpha val="18000"/>
+                <a:alpha val="7000"/>
               </a:srgbClr>
             </a:outerShdw>
           </a:effectLst>
@@ -6466,22 +6349,22 @@
           </a:xfrm>
           <a:prstGeom prst="roundRect">
             <a:avLst>
-              <a:gd name="adj" fmla="val 20000"/>
+              <a:gd name="adj" fmla="val 7143"/>
             </a:avLst>
           </a:prstGeom>
           <a:solidFill>
             <a:srgbClr val="0F2A22"/>
           </a:solidFill>
-          <a:ln w="12700">
+          <a:ln w="9525">
             <a:solidFill>
               <a:srgbClr val="0F2A22"/>
             </a:solidFill>
             <a:prstDash val="solid"/>
           </a:ln>
           <a:effectLst>
-            <a:outerShdw sx="100000" sy="100000" kx="0" ky="0" algn="bl" rotWithShape="0" blurRad="101600" dist="38100" dir="5400000">
+            <a:outerShdw sx="100000" sy="100000" kx="0" ky="0" algn="bl" rotWithShape="0" blurRad="50800" dist="12700" dir="5400000">
               <a:srgbClr val="000000">
-                <a:alpha val="18000"/>
+                <a:alpha val="7000"/>
               </a:srgbClr>
             </a:outerShdw>
           </a:effectLst>
@@ -6539,22 +6422,22 @@
           </a:xfrm>
           <a:prstGeom prst="roundRect">
             <a:avLst>
-              <a:gd name="adj" fmla="val 20000"/>
+              <a:gd name="adj" fmla="val 7143"/>
             </a:avLst>
           </a:prstGeom>
           <a:solidFill>
             <a:srgbClr val="FFFFFF"/>
           </a:solidFill>
-          <a:ln w="12700">
+          <a:ln w="9525">
             <a:solidFill>
-              <a:srgbClr val="FFFFFF"/>
+              <a:srgbClr val="DDE3DF"/>
             </a:solidFill>
             <a:prstDash val="solid"/>
           </a:ln>
           <a:effectLst>
-            <a:outerShdw sx="100000" sy="100000" kx="0" ky="0" algn="bl" rotWithShape="0" blurRad="101600" dist="38100" dir="5400000">
+            <a:outerShdw sx="100000" sy="100000" kx="0" ky="0" algn="bl" rotWithShape="0" blurRad="50800" dist="12700" dir="5400000">
               <a:srgbClr val="000000">
-                <a:alpha val="18000"/>
+                <a:alpha val="7000"/>
               </a:srgbClr>
             </a:outerShdw>
           </a:effectLst>
@@ -6612,22 +6495,22 @@
           </a:xfrm>
           <a:prstGeom prst="roundRect">
             <a:avLst>
-              <a:gd name="adj" fmla="val 20000"/>
+              <a:gd name="adj" fmla="val 7143"/>
             </a:avLst>
           </a:prstGeom>
           <a:solidFill>
             <a:srgbClr val="FFFFFF"/>
           </a:solidFill>
-          <a:ln w="12700">
+          <a:ln w="9525">
             <a:solidFill>
-              <a:srgbClr val="FFFFFF"/>
+              <a:srgbClr val="DDE3DF"/>
             </a:solidFill>
             <a:prstDash val="solid"/>
           </a:ln>
           <a:effectLst>
-            <a:outerShdw sx="100000" sy="100000" kx="0" ky="0" algn="bl" rotWithShape="0" blurRad="101600" dist="38100" dir="5400000">
+            <a:outerShdw sx="100000" sy="100000" kx="0" ky="0" algn="bl" rotWithShape="0" blurRad="50800" dist="12700" dir="5400000">
               <a:srgbClr val="000000">
-                <a:alpha val="18000"/>
+                <a:alpha val="7000"/>
               </a:srgbClr>
             </a:outerShdw>
           </a:effectLst>
@@ -6685,22 +6568,22 @@
           </a:xfrm>
           <a:prstGeom prst="roundRect">
             <a:avLst>
-              <a:gd name="adj" fmla="val 20000"/>
+              <a:gd name="adj" fmla="val 7143"/>
             </a:avLst>
           </a:prstGeom>
           <a:solidFill>
             <a:srgbClr val="0F2A22"/>
           </a:solidFill>
-          <a:ln w="12700">
+          <a:ln w="9525">
             <a:solidFill>
               <a:srgbClr val="0F2A22"/>
             </a:solidFill>
             <a:prstDash val="solid"/>
           </a:ln>
           <a:effectLst>
-            <a:outerShdw sx="100000" sy="100000" kx="0" ky="0" algn="bl" rotWithShape="0" blurRad="101600" dist="38100" dir="5400000">
+            <a:outerShdw sx="100000" sy="100000" kx="0" ky="0" algn="bl" rotWithShape="0" blurRad="50800" dist="12700" dir="5400000">
               <a:srgbClr val="000000">
-                <a:alpha val="18000"/>
+                <a:alpha val="7000"/>
               </a:srgbClr>
             </a:outerShdw>
           </a:effectLst>
@@ -6758,22 +6641,22 @@
           </a:xfrm>
           <a:prstGeom prst="roundRect">
             <a:avLst>
-              <a:gd name="adj" fmla="val 20000"/>
+              <a:gd name="adj" fmla="val 7143"/>
             </a:avLst>
           </a:prstGeom>
           <a:solidFill>
             <a:srgbClr val="FFFFFF"/>
           </a:solidFill>
-          <a:ln w="12700">
+          <a:ln w="9525">
             <a:solidFill>
-              <a:srgbClr val="FFFFFF"/>
+              <a:srgbClr val="DDE3DF"/>
             </a:solidFill>
             <a:prstDash val="solid"/>
           </a:ln>
           <a:effectLst>
-            <a:outerShdw sx="100000" sy="100000" kx="0" ky="0" algn="bl" rotWithShape="0" blurRad="101600" dist="38100" dir="5400000">
+            <a:outerShdw sx="100000" sy="100000" kx="0" ky="0" algn="bl" rotWithShape="0" blurRad="50800" dist="12700" dir="5400000">
               <a:srgbClr val="000000">
-                <a:alpha val="18000"/>
+                <a:alpha val="7000"/>
               </a:srgbClr>
             </a:outerShdw>
           </a:effectLst>
@@ -6831,22 +6714,22 @@
           </a:xfrm>
           <a:prstGeom prst="roundRect">
             <a:avLst>
-              <a:gd name="adj" fmla="val 20000"/>
+              <a:gd name="adj" fmla="val 7143"/>
             </a:avLst>
           </a:prstGeom>
           <a:solidFill>
             <a:srgbClr val="FFFFFF"/>
           </a:solidFill>
-          <a:ln w="12700">
+          <a:ln w="9525">
             <a:solidFill>
-              <a:srgbClr val="FFFFFF"/>
+              <a:srgbClr val="DDE3DF"/>
             </a:solidFill>
             <a:prstDash val="solid"/>
           </a:ln>
           <a:effectLst>
-            <a:outerShdw sx="100000" sy="100000" kx="0" ky="0" algn="bl" rotWithShape="0" blurRad="101600" dist="38100" dir="5400000">
+            <a:outerShdw sx="100000" sy="100000" kx="0" ky="0" algn="bl" rotWithShape="0" blurRad="50800" dist="12700" dir="5400000">
               <a:srgbClr val="000000">
-                <a:alpha val="18000"/>
+                <a:alpha val="7000"/>
               </a:srgbClr>
             </a:outerShdw>
           </a:effectLst>
@@ -6904,22 +6787,22 @@
           </a:xfrm>
           <a:prstGeom prst="roundRect">
             <a:avLst>
-              <a:gd name="adj" fmla="val 20000"/>
+              <a:gd name="adj" fmla="val 7143"/>
             </a:avLst>
           </a:prstGeom>
           <a:solidFill>
             <a:srgbClr val="0F2A22"/>
           </a:solidFill>
-          <a:ln w="12700">
+          <a:ln w="9525">
             <a:solidFill>
               <a:srgbClr val="0F2A22"/>
             </a:solidFill>
             <a:prstDash val="solid"/>
           </a:ln>
           <a:effectLst>
-            <a:outerShdw sx="100000" sy="100000" kx="0" ky="0" algn="bl" rotWithShape="0" blurRad="101600" dist="38100" dir="5400000">
+            <a:outerShdw sx="100000" sy="100000" kx="0" ky="0" algn="bl" rotWithShape="0" blurRad="50800" dist="12700" dir="5400000">
               <a:srgbClr val="000000">
-                <a:alpha val="18000"/>
+                <a:alpha val="7000"/>
               </a:srgbClr>
             </a:outerShdw>
           </a:effectLst>
@@ -6977,22 +6860,22 @@
           </a:xfrm>
           <a:prstGeom prst="roundRect">
             <a:avLst>
-              <a:gd name="adj" fmla="val 20000"/>
+              <a:gd name="adj" fmla="val 7143"/>
             </a:avLst>
           </a:prstGeom>
           <a:solidFill>
             <a:srgbClr val="FFFFFF"/>
           </a:solidFill>
-          <a:ln w="12700">
+          <a:ln w="9525">
             <a:solidFill>
-              <a:srgbClr val="FFFFFF"/>
+              <a:srgbClr val="DDE3DF"/>
             </a:solidFill>
             <a:prstDash val="solid"/>
           </a:ln>
           <a:effectLst>
-            <a:outerShdw sx="100000" sy="100000" kx="0" ky="0" algn="bl" rotWithShape="0" blurRad="101600" dist="38100" dir="5400000">
+            <a:outerShdw sx="100000" sy="100000" kx="0" ky="0" algn="bl" rotWithShape="0" blurRad="50800" dist="12700" dir="5400000">
               <a:srgbClr val="000000">
-                <a:alpha val="18000"/>
+                <a:alpha val="7000"/>
               </a:srgbClr>
             </a:outerShdw>
           </a:effectLst>
@@ -7050,22 +6933,22 @@
           </a:xfrm>
           <a:prstGeom prst="roundRect">
             <a:avLst>
-              <a:gd name="adj" fmla="val 20000"/>
+              <a:gd name="adj" fmla="val 7143"/>
             </a:avLst>
           </a:prstGeom>
           <a:solidFill>
             <a:srgbClr val="FFFFFF"/>
           </a:solidFill>
-          <a:ln w="12700">
+          <a:ln w="9525">
             <a:solidFill>
-              <a:srgbClr val="FFFFFF"/>
+              <a:srgbClr val="DDE3DF"/>
             </a:solidFill>
             <a:prstDash val="solid"/>
           </a:ln>
           <a:effectLst>
-            <a:outerShdw sx="100000" sy="100000" kx="0" ky="0" algn="bl" rotWithShape="0" blurRad="101600" dist="38100" dir="5400000">
+            <a:outerShdw sx="100000" sy="100000" kx="0" ky="0" algn="bl" rotWithShape="0" blurRad="50800" dist="12700" dir="5400000">
               <a:srgbClr val="000000">
-                <a:alpha val="18000"/>
+                <a:alpha val="7000"/>
               </a:srgbClr>
             </a:outerShdw>
           </a:effectLst>
@@ -7123,22 +7006,22 @@
           </a:xfrm>
           <a:prstGeom prst="roundRect">
             <a:avLst>
-              <a:gd name="adj" fmla="val 20000"/>
+              <a:gd name="adj" fmla="val 7143"/>
             </a:avLst>
           </a:prstGeom>
           <a:solidFill>
             <a:srgbClr val="0F2A22"/>
           </a:solidFill>
-          <a:ln w="12700">
+          <a:ln w="9525">
             <a:solidFill>
               <a:srgbClr val="0F2A22"/>
             </a:solidFill>
             <a:prstDash val="solid"/>
           </a:ln>
           <a:effectLst>
-            <a:outerShdw sx="100000" sy="100000" kx="0" ky="0" algn="bl" rotWithShape="0" blurRad="101600" dist="38100" dir="5400000">
+            <a:outerShdw sx="100000" sy="100000" kx="0" ky="0" algn="bl" rotWithShape="0" blurRad="50800" dist="12700" dir="5400000">
               <a:srgbClr val="000000">
-                <a:alpha val="18000"/>
+                <a:alpha val="7000"/>
               </a:srgbClr>
             </a:outerShdw>
           </a:effectLst>
@@ -7196,22 +7079,22 @@
           </a:xfrm>
           <a:prstGeom prst="roundRect">
             <a:avLst>
-              <a:gd name="adj" fmla="val 20000"/>
+              <a:gd name="adj" fmla="val 7143"/>
             </a:avLst>
           </a:prstGeom>
           <a:solidFill>
             <a:srgbClr val="FFFFFF"/>
           </a:solidFill>
-          <a:ln w="12700">
+          <a:ln w="9525">
             <a:solidFill>
-              <a:srgbClr val="FFFFFF"/>
+              <a:srgbClr val="DDE3DF"/>
             </a:solidFill>
             <a:prstDash val="solid"/>
           </a:ln>
           <a:effectLst>
-            <a:outerShdw sx="100000" sy="100000" kx="0" ky="0" algn="bl" rotWithShape="0" blurRad="101600" dist="38100" dir="5400000">
+            <a:outerShdw sx="100000" sy="100000" kx="0" ky="0" algn="bl" rotWithShape="0" blurRad="50800" dist="12700" dir="5400000">
               <a:srgbClr val="000000">
-                <a:alpha val="18000"/>
+                <a:alpha val="7000"/>
               </a:srgbClr>
             </a:outerShdw>
           </a:effectLst>
@@ -7269,22 +7152,22 @@
           </a:xfrm>
           <a:prstGeom prst="roundRect">
             <a:avLst>
-              <a:gd name="adj" fmla="val 20000"/>
+              <a:gd name="adj" fmla="val 7143"/>
             </a:avLst>
           </a:prstGeom>
           <a:solidFill>
             <a:srgbClr val="FFFFFF"/>
           </a:solidFill>
-          <a:ln w="12700">
+          <a:ln w="9525">
             <a:solidFill>
-              <a:srgbClr val="FFFFFF"/>
+              <a:srgbClr val="DDE3DF"/>
             </a:solidFill>
             <a:prstDash val="solid"/>
           </a:ln>
           <a:effectLst>
-            <a:outerShdw sx="100000" sy="100000" kx="0" ky="0" algn="bl" rotWithShape="0" blurRad="101600" dist="38100" dir="5400000">
+            <a:outerShdw sx="100000" sy="100000" kx="0" ky="0" algn="bl" rotWithShape="0" blurRad="50800" dist="12700" dir="5400000">
               <a:srgbClr val="000000">
-                <a:alpha val="18000"/>
+                <a:alpha val="7000"/>
               </a:srgbClr>
             </a:outerShdw>
           </a:effectLst>
@@ -7342,22 +7225,22 @@
           </a:xfrm>
           <a:prstGeom prst="roundRect">
             <a:avLst>
-              <a:gd name="adj" fmla="val 20000"/>
+              <a:gd name="adj" fmla="val 7143"/>
             </a:avLst>
           </a:prstGeom>
           <a:solidFill>
             <a:srgbClr val="0F2A22"/>
           </a:solidFill>
-          <a:ln w="12700">
+          <a:ln w="9525">
             <a:solidFill>
               <a:srgbClr val="0F2A22"/>
             </a:solidFill>
             <a:prstDash val="solid"/>
           </a:ln>
           <a:effectLst>
-            <a:outerShdw sx="100000" sy="100000" kx="0" ky="0" algn="bl" rotWithShape="0" blurRad="101600" dist="38100" dir="5400000">
+            <a:outerShdw sx="100000" sy="100000" kx="0" ky="0" algn="bl" rotWithShape="0" blurRad="50800" dist="12700" dir="5400000">
               <a:srgbClr val="000000">
-                <a:alpha val="18000"/>
+                <a:alpha val="7000"/>
               </a:srgbClr>
             </a:outerShdw>
           </a:effectLst>
@@ -7415,22 +7298,22 @@
           </a:xfrm>
           <a:prstGeom prst="roundRect">
             <a:avLst>
-              <a:gd name="adj" fmla="val 20000"/>
+              <a:gd name="adj" fmla="val 7143"/>
             </a:avLst>
           </a:prstGeom>
           <a:solidFill>
             <a:srgbClr val="E1F5EE"/>
           </a:solidFill>
-          <a:ln w="12700">
+          <a:ln w="9525">
             <a:solidFill>
               <a:srgbClr val="E1F5EE"/>
             </a:solidFill>
             <a:prstDash val="solid"/>
           </a:ln>
           <a:effectLst>
-            <a:outerShdw sx="100000" sy="100000" kx="0" ky="0" algn="bl" rotWithShape="0" blurRad="101600" dist="38100" dir="5400000">
+            <a:outerShdw sx="100000" sy="100000" kx="0" ky="0" algn="bl" rotWithShape="0" blurRad="50800" dist="12700" dir="5400000">
               <a:srgbClr val="000000">
-                <a:alpha val="18000"/>
+                <a:alpha val="7000"/>
               </a:srgbClr>
             </a:outerShdw>
           </a:effectLst>
@@ -7505,22 +7388,22 @@
           </a:xfrm>
           <a:prstGeom prst="roundRect">
             <a:avLst>
-              <a:gd name="adj" fmla="val 20000"/>
+              <a:gd name="adj" fmla="val 7143"/>
             </a:avLst>
           </a:prstGeom>
           <a:solidFill>
             <a:srgbClr val="E1F5EE"/>
           </a:solidFill>
-          <a:ln w="12700">
+          <a:ln w="9525">
             <a:solidFill>
               <a:srgbClr val="E1F5EE"/>
             </a:solidFill>
             <a:prstDash val="solid"/>
           </a:ln>
           <a:effectLst>
-            <a:outerShdw sx="100000" sy="100000" kx="0" ky="0" algn="bl" rotWithShape="0" blurRad="101600" dist="38100" dir="5400000">
+            <a:outerShdw sx="100000" sy="100000" kx="0" ky="0" algn="bl" rotWithShape="0" blurRad="50800" dist="12700" dir="5400000">
               <a:srgbClr val="000000">
-                <a:alpha val="18000"/>
+                <a:alpha val="7000"/>
               </a:srgbClr>
             </a:outerShdw>
           </a:effectLst>
@@ -7578,22 +7461,22 @@
           </a:xfrm>
           <a:prstGeom prst="roundRect">
             <a:avLst>
-              <a:gd name="adj" fmla="val 20000"/>
+              <a:gd name="adj" fmla="val 7143"/>
             </a:avLst>
           </a:prstGeom>
           <a:solidFill>
             <a:srgbClr val="0F2A22"/>
           </a:solidFill>
-          <a:ln w="12700">
+          <a:ln w="9525">
             <a:solidFill>
               <a:srgbClr val="0F2A22"/>
             </a:solidFill>
             <a:prstDash val="solid"/>
           </a:ln>
           <a:effectLst>
-            <a:outerShdw sx="100000" sy="100000" kx="0" ky="0" algn="bl" rotWithShape="0" blurRad="101600" dist="38100" dir="5400000">
+            <a:outerShdw sx="100000" sy="100000" kx="0" ky="0" algn="bl" rotWithShape="0" blurRad="50800" dist="12700" dir="5400000">
               <a:srgbClr val="000000">
-                <a:alpha val="18000"/>
+                <a:alpha val="7000"/>
               </a:srgbClr>
             </a:outerShdw>
           </a:effectLst>
@@ -7651,22 +7534,22 @@
           </a:xfrm>
           <a:prstGeom prst="roundRect">
             <a:avLst>
-              <a:gd name="adj" fmla="val 20000"/>
+              <a:gd name="adj" fmla="val 7143"/>
             </a:avLst>
           </a:prstGeom>
           <a:solidFill>
             <a:srgbClr val="E1F5EE"/>
           </a:solidFill>
-          <a:ln w="12700">
+          <a:ln w="9525">
             <a:solidFill>
               <a:srgbClr val="E1F5EE"/>
             </a:solidFill>
             <a:prstDash val="solid"/>
           </a:ln>
           <a:effectLst>
-            <a:outerShdw sx="100000" sy="100000" kx="0" ky="0" algn="bl" rotWithShape="0" blurRad="101600" dist="38100" dir="5400000">
+            <a:outerShdw sx="100000" sy="100000" kx="0" ky="0" algn="bl" rotWithShape="0" blurRad="50800" dist="12700" dir="5400000">
               <a:srgbClr val="000000">
-                <a:alpha val="18000"/>
+                <a:alpha val="7000"/>
               </a:srgbClr>
             </a:outerShdw>
           </a:effectLst>
@@ -7724,22 +7607,22 @@
           </a:xfrm>
           <a:prstGeom prst="roundRect">
             <a:avLst>
-              <a:gd name="adj" fmla="val 20000"/>
+              <a:gd name="adj" fmla="val 7143"/>
             </a:avLst>
           </a:prstGeom>
           <a:solidFill>
             <a:srgbClr val="E1F5EE"/>
           </a:solidFill>
-          <a:ln w="12700">
+          <a:ln w="9525">
             <a:solidFill>
               <a:srgbClr val="E1F5EE"/>
             </a:solidFill>
             <a:prstDash val="solid"/>
           </a:ln>
           <a:effectLst>
-            <a:outerShdw sx="100000" sy="100000" kx="0" ky="0" algn="bl" rotWithShape="0" blurRad="101600" dist="38100" dir="5400000">
+            <a:outerShdw sx="100000" sy="100000" kx="0" ky="0" algn="bl" rotWithShape="0" blurRad="50800" dist="12700" dir="5400000">
               <a:srgbClr val="000000">
-                <a:alpha val="18000"/>
+                <a:alpha val="7000"/>
               </a:srgbClr>
             </a:outerShdw>
           </a:effectLst>
@@ -7787,45 +7670,6 @@
       <p:sp>
         <p:nvSpPr>
           <p:cNvPr id="47" name="Text 44"/>
-          <p:cNvSpPr txBox="1"/>
-          <p:nvPr/>
-        </p:nvSpPr>
-        <p:spPr>
-          <a:xfrm>
-            <a:off x="502920" y="6419088"/>
-            <a:ext cx="10607040" cy="292608"/>
-          </a:xfrm>
-          <a:prstGeom prst="rect">
-            <a:avLst/>
-          </a:prstGeom>
-          <a:noFill/>
-          <a:ln/>
-        </p:spPr>
-        <p:txBody>
-          <a:bodyPr wrap="square" lIns="0" tIns="0" rIns="0" bIns="0" rtlCol="0" anchor="ctr"/>
-          <a:lstStyle/>
-          <a:p>
-            <a:pPr eaLnBrk="0" latinLnBrk="0" indent="0" marL="0">
-              <a:buNone/>
-            </a:pPr>
-            <a:r>
-              <a:rPr lang="ko-KR" altLang="en-US" sz="1050" dirty="0">
-                <a:solidFill>
-                  <a:srgbClr val="4A5A54"/>
-                </a:solidFill>
-                <a:latin typeface="Malgun Gothic" pitchFamily="34" charset="0"/>
-                <a:ea typeface="Malgun Gothic" pitchFamily="34" charset="-122"/>
-                <a:cs typeface="Malgun Gothic" pitchFamily="34" charset="-120"/>
-              </a:rPr>
-              <a:t>불편 해소·이득 창출의 금액은 오송역→가경동(13.8km) 예시와 행위자 시뮬레이션(앱 이용 30%) 기준</a:t>
-            </a:r>
-            <a:endParaRPr lang="ko-KR" altLang="en-US" sz="1050" dirty="0"/>
-          </a:p>
-        </p:txBody>
-      </p:sp>
-      <p:sp>
-        <p:nvSpPr>
-          <p:cNvPr id="48" name="Text 45"/>
           <p:cNvSpPr txBox="1"/>
           <p:nvPr/>
         </p:nvSpPr>
@@ -7937,9 +7781,9 @@
             <a:prstDash val="solid"/>
           </a:ln>
           <a:effectLst>
-            <a:outerShdw sx="100000" sy="100000" kx="0" ky="0" algn="bl" rotWithShape="0" blurRad="101600" dist="38100" dir="5400000">
+            <a:outerShdw sx="100000" sy="100000" kx="0" ky="0" algn="bl" rotWithShape="0" blurRad="50800" dist="12700" dir="5400000">
               <a:srgbClr val="000000">
-                <a:alpha val="18000"/>
+                <a:alpha val="7000"/>
               </a:srgbClr>
             </a:outerShdw>
           </a:effectLst>
@@ -8075,22 +7919,22 @@
           </a:xfrm>
           <a:prstGeom prst="roundRect">
             <a:avLst>
-              <a:gd name="adj" fmla="val 5738"/>
+              <a:gd name="adj" fmla="val 2049"/>
             </a:avLst>
           </a:prstGeom>
           <a:solidFill>
             <a:srgbClr val="10231C"/>
           </a:solidFill>
-          <a:ln w="12700">
+          <a:ln w="9525">
             <a:solidFill>
               <a:srgbClr val="10231C"/>
             </a:solidFill>
             <a:prstDash val="solid"/>
           </a:ln>
           <a:effectLst>
-            <a:outerShdw sx="100000" sy="100000" kx="0" ky="0" algn="bl" rotWithShape="0" blurRad="101600" dist="38100" dir="5400000">
+            <a:outerShdw sx="100000" sy="100000" kx="0" ky="0" algn="bl" rotWithShape="0" blurRad="50800" dist="12700" dir="5400000">
               <a:srgbClr val="000000">
-                <a:alpha val="18000"/>
+                <a:alpha val="7000"/>
               </a:srgbClr>
             </a:outerShdw>
           </a:effectLst>
@@ -8171,22 +8015,22 @@
           </a:xfrm>
           <a:prstGeom prst="roundRect">
             <a:avLst>
-              <a:gd name="adj" fmla="val 6542"/>
+              <a:gd name="adj" fmla="val 2336"/>
             </a:avLst>
           </a:prstGeom>
           <a:solidFill>
             <a:srgbClr val="10231C"/>
           </a:solidFill>
-          <a:ln w="12700">
+          <a:ln w="9525">
             <a:solidFill>
               <a:srgbClr val="10231C"/>
             </a:solidFill>
             <a:prstDash val="solid"/>
           </a:ln>
           <a:effectLst>
-            <a:outerShdw sx="100000" sy="100000" kx="0" ky="0" algn="bl" rotWithShape="0" blurRad="101600" dist="38100" dir="5400000">
+            <a:outerShdw sx="100000" sy="100000" kx="0" ky="0" algn="bl" rotWithShape="0" blurRad="50800" dist="12700" dir="5400000">
               <a:srgbClr val="000000">
-                <a:alpha val="18000"/>
+                <a:alpha val="7000"/>
               </a:srgbClr>
             </a:outerShdw>
           </a:effectLst>
@@ -8311,7 +8155,7 @@
                 <a:ea typeface="Malgun Gothic" pitchFamily="34" charset="-122"/>
                 <a:cs typeface="Malgun Gothic" pitchFamily="34" charset="-120"/>
               </a:rPr>
-              <a:t>📲 직접 써 보기</a:t>
+              <a:t>직접 써 보기</a:t>
             </a:r>
             <a:endParaRPr lang="ko-KR" altLang="en-US" sz="1050" dirty="0"/>
           </a:p>
@@ -8364,22 +8208,22 @@
           </a:xfrm>
           <a:prstGeom prst="roundRect">
             <a:avLst>
-              <a:gd name="adj" fmla="val 5714"/>
+              <a:gd name="adj" fmla="val 2041"/>
             </a:avLst>
           </a:prstGeom>
           <a:solidFill>
             <a:srgbClr val="FFFFFF"/>
           </a:solidFill>
-          <a:ln w="12700">
+          <a:ln w="9525">
             <a:solidFill>
-              <a:srgbClr val="FFFFFF"/>
+              <a:srgbClr val="DDE3DF"/>
             </a:solidFill>
             <a:prstDash val="solid"/>
           </a:ln>
           <a:effectLst>
-            <a:outerShdw sx="100000" sy="100000" kx="0" ky="0" algn="bl" rotWithShape="0" blurRad="101600" dist="38100" dir="5400000">
+            <a:outerShdw sx="100000" sy="100000" kx="0" ky="0" algn="bl" rotWithShape="0" blurRad="50800" dist="12700" dir="5400000">
               <a:srgbClr val="000000">
-                <a:alpha val="18000"/>
+                <a:alpha val="7000"/>
               </a:srgbClr>
             </a:outerShdw>
           </a:effectLst>
@@ -8418,7 +8262,7 @@
                 <a:ea typeface="Malgun Gothic" pitchFamily="34" charset="-122"/>
                 <a:cs typeface="Malgun Gothic" pitchFamily="34" charset="-120"/>
               </a:rPr>
-              <a:t>🛣️ 할증 없이 가는 3가지 경우 (팀원 아이디어)</a:t>
+              <a:t>할증 없이 가는 3가지 경우 (팀원 아이디어)</a:t>
             </a:r>
             <a:endParaRPr lang="ko-KR" altLang="en-US" sz="1300" dirty="0"/>
           </a:p>
@@ -10001,45 +9845,6 @@
         </p:nvSpPr>
         <p:spPr>
           <a:xfrm>
-            <a:off x="502920" y="6419088"/>
-            <a:ext cx="10607040" cy="292608"/>
-          </a:xfrm>
-          <a:prstGeom prst="rect">
-            <a:avLst/>
-          </a:prstGeom>
-          <a:noFill/>
-          <a:ln/>
-        </p:spPr>
-        <p:txBody>
-          <a:bodyPr wrap="square" lIns="0" tIns="0" rIns="0" bIns="0" rtlCol="0" anchor="ctr"/>
-          <a:lstStyle/>
-          <a:p>
-            <a:pPr eaLnBrk="0" latinLnBrk="0" indent="0" marL="0">
-              <a:buNone/>
-            </a:pPr>
-            <a:r>
-              <a:rPr lang="ko-KR" altLang="en-US" sz="1050" dirty="0">
-                <a:solidFill>
-                  <a:srgbClr val="4A5A54"/>
-                </a:solidFill>
-                <a:latin typeface="Malgun Gothic" pitchFamily="34" charset="0"/>
-                <a:ea typeface="Malgun Gothic" pitchFamily="34" charset="-122"/>
-                <a:cs typeface="Malgun Gothic" pitchFamily="34" charset="-120"/>
-              </a:rPr>
-              <a:t>반반택시: 2019 규제샌드박스 실증특례 → 2022 동승 합법화, 이후 동승 중단·B2B 전환(한국경제 2026.4) · 귀로 연계 결제는 시범(모의)</a:t>
-            </a:r>
-            <a:endParaRPr lang="ko-KR" altLang="en-US" sz="1050" dirty="0"/>
-          </a:p>
-        </p:txBody>
-      </p:sp>
-      <p:sp>
-        <p:nvSpPr>
-          <p:cNvPr id="28" name="Text 21"/>
-          <p:cNvSpPr txBox="1"/>
-          <p:nvPr/>
-        </p:nvSpPr>
-        <p:spPr>
-          <a:xfrm>
             <a:off x="11064240" y="6419088"/>
             <a:ext cx="640080" cy="292608"/>
           </a:xfrm>
@@ -10146,9 +9951,9 @@
             <a:prstDash val="solid"/>
           </a:ln>
           <a:effectLst>
-            <a:outerShdw sx="100000" sy="100000" kx="0" ky="0" algn="bl" rotWithShape="0" blurRad="101600" dist="38100" dir="5400000">
+            <a:outerShdw sx="100000" sy="100000" kx="0" ky="0" algn="bl" rotWithShape="0" blurRad="50800" dist="12700" dir="5400000">
               <a:srgbClr val="000000">
-                <a:alpha val="18000"/>
+                <a:alpha val="7000"/>
               </a:srgbClr>
             </a:outerShdw>
           </a:effectLst>
@@ -10284,22 +10089,22 @@
           </a:xfrm>
           <a:prstGeom prst="roundRect">
             <a:avLst>
-              <a:gd name="adj" fmla="val 5882"/>
+              <a:gd name="adj" fmla="val 2101"/>
             </a:avLst>
           </a:prstGeom>
           <a:solidFill>
             <a:srgbClr val="FFFFFF"/>
           </a:solidFill>
-          <a:ln w="12700">
+          <a:ln w="9525">
             <a:solidFill>
-              <a:srgbClr val="FFFFFF"/>
+              <a:srgbClr val="DDE3DF"/>
             </a:solidFill>
             <a:prstDash val="solid"/>
           </a:ln>
           <a:effectLst>
-            <a:outerShdw sx="100000" sy="100000" kx="0" ky="0" algn="bl" rotWithShape="0" blurRad="101600" dist="38100" dir="5400000">
+            <a:outerShdw sx="100000" sy="100000" kx="0" ky="0" algn="bl" rotWithShape="0" blurRad="50800" dist="12700" dir="5400000">
               <a:srgbClr val="000000">
-                <a:alpha val="18000"/>
+                <a:alpha val="7000"/>
               </a:srgbClr>
             </a:outerShdw>
           </a:effectLst>
@@ -10459,22 +10264,22 @@
           </a:xfrm>
           <a:prstGeom prst="roundRect">
             <a:avLst>
-              <a:gd name="adj" fmla="val 7955"/>
+              <a:gd name="adj" fmla="val 2841"/>
             </a:avLst>
           </a:prstGeom>
           <a:solidFill>
             <a:srgbClr val="FFFFFF"/>
           </a:solidFill>
-          <a:ln w="12700">
+          <a:ln w="9525">
             <a:solidFill>
-              <a:srgbClr val="FFFFFF"/>
+              <a:srgbClr val="DDE3DF"/>
             </a:solidFill>
             <a:prstDash val="solid"/>
           </a:ln>
           <a:effectLst>
-            <a:outerShdw sx="100000" sy="100000" kx="0" ky="0" algn="bl" rotWithShape="0" blurRad="101600" dist="38100" dir="5400000">
+            <a:outerShdw sx="100000" sy="100000" kx="0" ky="0" algn="bl" rotWithShape="0" blurRad="50800" dist="12700" dir="5400000">
               <a:srgbClr val="000000">
-                <a:alpha val="18000"/>
+                <a:alpha val="7000"/>
               </a:srgbClr>
             </a:outerShdw>
           </a:effectLst>
@@ -10594,22 +10399,22 @@
           </a:xfrm>
           <a:prstGeom prst="roundRect">
             <a:avLst>
-              <a:gd name="adj" fmla="val 7955"/>
+              <a:gd name="adj" fmla="val 2841"/>
             </a:avLst>
           </a:prstGeom>
           <a:solidFill>
             <a:srgbClr val="FFFFFF"/>
           </a:solidFill>
-          <a:ln w="12700">
+          <a:ln w="9525">
             <a:solidFill>
-              <a:srgbClr val="FFFFFF"/>
+              <a:srgbClr val="DDE3DF"/>
             </a:solidFill>
             <a:prstDash val="solid"/>
           </a:ln>
           <a:effectLst>
-            <a:outerShdw sx="100000" sy="100000" kx="0" ky="0" algn="bl" rotWithShape="0" blurRad="101600" dist="38100" dir="5400000">
+            <a:outerShdw sx="100000" sy="100000" kx="0" ky="0" algn="bl" rotWithShape="0" blurRad="50800" dist="12700" dir="5400000">
               <a:srgbClr val="000000">
-                <a:alpha val="18000"/>
+                <a:alpha val="7000"/>
               </a:srgbClr>
             </a:outerShdw>
           </a:effectLst>
@@ -10729,22 +10534,22 @@
           </a:xfrm>
           <a:prstGeom prst="roundRect">
             <a:avLst>
-              <a:gd name="adj" fmla="val 5882"/>
+              <a:gd name="adj" fmla="val 2101"/>
             </a:avLst>
           </a:prstGeom>
           <a:solidFill>
             <a:srgbClr val="FFF4E5"/>
           </a:solidFill>
-          <a:ln w="12700">
+          <a:ln w="9525">
             <a:solidFill>
               <a:srgbClr val="FFF4E5"/>
             </a:solidFill>
             <a:prstDash val="solid"/>
           </a:ln>
           <a:effectLst>
-            <a:outerShdw sx="100000" sy="100000" kx="0" ky="0" algn="bl" rotWithShape="0" blurRad="101600" dist="38100" dir="5400000">
+            <a:outerShdw sx="100000" sy="100000" kx="0" ky="0" algn="bl" rotWithShape="0" blurRad="50800" dist="12700" dir="5400000">
               <a:srgbClr val="000000">
-                <a:alpha val="18000"/>
+                <a:alpha val="7000"/>
               </a:srgbClr>
             </a:outerShdw>
           </a:effectLst>
@@ -10904,22 +10709,22 @@
           </a:xfrm>
           <a:prstGeom prst="roundRect">
             <a:avLst>
-              <a:gd name="adj" fmla="val 7955"/>
+              <a:gd name="adj" fmla="val 2841"/>
             </a:avLst>
           </a:prstGeom>
           <a:solidFill>
             <a:srgbClr val="FFFFFF"/>
           </a:solidFill>
-          <a:ln w="12700">
+          <a:ln w="9525">
             <a:solidFill>
-              <a:srgbClr val="FFFFFF"/>
+              <a:srgbClr val="DDE3DF"/>
             </a:solidFill>
             <a:prstDash val="solid"/>
           </a:ln>
           <a:effectLst>
-            <a:outerShdw sx="100000" sy="100000" kx="0" ky="0" algn="bl" rotWithShape="0" blurRad="101600" dist="38100" dir="5400000">
+            <a:outerShdw sx="100000" sy="100000" kx="0" ky="0" algn="bl" rotWithShape="0" blurRad="50800" dist="12700" dir="5400000">
               <a:srgbClr val="000000">
-                <a:alpha val="18000"/>
+                <a:alpha val="7000"/>
               </a:srgbClr>
             </a:outerShdw>
           </a:effectLst>
@@ -11039,22 +10844,22 @@
           </a:xfrm>
           <a:prstGeom prst="roundRect">
             <a:avLst>
-              <a:gd name="adj" fmla="val 7955"/>
+              <a:gd name="adj" fmla="val 2841"/>
             </a:avLst>
           </a:prstGeom>
           <a:solidFill>
             <a:srgbClr val="FFFFFF"/>
           </a:solidFill>
-          <a:ln w="12700">
+          <a:ln w="9525">
             <a:solidFill>
-              <a:srgbClr val="FFFFFF"/>
+              <a:srgbClr val="DDE3DF"/>
             </a:solidFill>
             <a:prstDash val="solid"/>
           </a:ln>
           <a:effectLst>
-            <a:outerShdw sx="100000" sy="100000" kx="0" ky="0" algn="bl" rotWithShape="0" blurRad="101600" dist="38100" dir="5400000">
+            <a:outerShdw sx="100000" sy="100000" kx="0" ky="0" algn="bl" rotWithShape="0" blurRad="50800" dist="12700" dir="5400000">
               <a:srgbClr val="000000">
-                <a:alpha val="18000"/>
+                <a:alpha val="7000"/>
               </a:srgbClr>
             </a:outerShdw>
           </a:effectLst>
@@ -11174,22 +10979,22 @@
           </a:xfrm>
           <a:prstGeom prst="roundRect">
             <a:avLst>
-              <a:gd name="adj" fmla="val 5882"/>
+              <a:gd name="adj" fmla="val 2101"/>
             </a:avLst>
           </a:prstGeom>
           <a:solidFill>
             <a:srgbClr val="FFFFFF"/>
           </a:solidFill>
-          <a:ln w="12700">
+          <a:ln w="9525">
             <a:solidFill>
-              <a:srgbClr val="FFFFFF"/>
+              <a:srgbClr val="DDE3DF"/>
             </a:solidFill>
             <a:prstDash val="solid"/>
           </a:ln>
           <a:effectLst>
-            <a:outerShdw sx="100000" sy="100000" kx="0" ky="0" algn="bl" rotWithShape="0" blurRad="101600" dist="38100" dir="5400000">
+            <a:outerShdw sx="100000" sy="100000" kx="0" ky="0" algn="bl" rotWithShape="0" blurRad="50800" dist="12700" dir="5400000">
               <a:srgbClr val="000000">
-                <a:alpha val="18000"/>
+                <a:alpha val="7000"/>
               </a:srgbClr>
             </a:outerShdw>
           </a:effectLst>
@@ -11349,22 +11154,22 @@
           </a:xfrm>
           <a:prstGeom prst="roundRect">
             <a:avLst>
-              <a:gd name="adj" fmla="val 8000"/>
+              <a:gd name="adj" fmla="val 2857"/>
             </a:avLst>
           </a:prstGeom>
           <a:solidFill>
             <a:srgbClr val="FFFFFF"/>
           </a:solidFill>
-          <a:ln w="12700">
+          <a:ln w="9525">
             <a:solidFill>
-              <a:srgbClr val="FFFFFF"/>
+              <a:srgbClr val="DDE3DF"/>
             </a:solidFill>
             <a:prstDash val="solid"/>
           </a:ln>
           <a:effectLst>
-            <a:outerShdw sx="100000" sy="100000" kx="0" ky="0" algn="bl" rotWithShape="0" blurRad="101600" dist="38100" dir="5400000">
+            <a:outerShdw sx="100000" sy="100000" kx="0" ky="0" algn="bl" rotWithShape="0" blurRad="50800" dist="12700" dir="5400000">
               <a:srgbClr val="000000">
-                <a:alpha val="18000"/>
+                <a:alpha val="7000"/>
               </a:srgbClr>
             </a:outerShdw>
           </a:effectLst>
@@ -11484,22 +11289,22 @@
           </a:xfrm>
           <a:prstGeom prst="roundRect">
             <a:avLst>
-              <a:gd name="adj" fmla="val 8000"/>
+              <a:gd name="adj" fmla="val 2857"/>
             </a:avLst>
           </a:prstGeom>
           <a:solidFill>
             <a:srgbClr val="E1F5EE"/>
           </a:solidFill>
-          <a:ln w="12700">
+          <a:ln w="9525">
             <a:solidFill>
               <a:srgbClr val="E1F5EE"/>
             </a:solidFill>
             <a:prstDash val="solid"/>
           </a:ln>
           <a:effectLst>
-            <a:outerShdw sx="100000" sy="100000" kx="0" ky="0" algn="bl" rotWithShape="0" blurRad="101600" dist="38100" dir="5400000">
+            <a:outerShdw sx="100000" sy="100000" kx="0" ky="0" algn="bl" rotWithShape="0" blurRad="50800" dist="12700" dir="5400000">
               <a:srgbClr val="000000">
-                <a:alpha val="18000"/>
+                <a:alpha val="7000"/>
               </a:srgbClr>
             </a:outerShdw>
           </a:effectLst>
@@ -11649,45 +11454,6 @@
       <p:sp>
         <p:nvSpPr>
           <p:cNvPr id="34" name="Text 31"/>
-          <p:cNvSpPr txBox="1"/>
-          <p:nvPr/>
-        </p:nvSpPr>
-        <p:spPr>
-          <a:xfrm>
-            <a:off x="502920" y="6419088"/>
-            <a:ext cx="10607040" cy="292608"/>
-          </a:xfrm>
-          <a:prstGeom prst="rect">
-            <a:avLst/>
-          </a:prstGeom>
-          <a:noFill/>
-          <a:ln/>
-        </p:spPr>
-        <p:txBody>
-          <a:bodyPr wrap="square" lIns="0" tIns="0" rIns="0" bIns="0" rtlCol="0" anchor="ctr"/>
-          <a:lstStyle/>
-          <a:p>
-            <a:pPr eaLnBrk="0" latinLnBrk="0" indent="0" marL="0">
-              <a:buNone/>
-            </a:pPr>
-            <a:r>
-              <a:rPr lang="ko-KR" altLang="en-US" sz="1050" dirty="0">
-                <a:solidFill>
-                  <a:srgbClr val="4A5A54"/>
-                </a:solidFill>
-                <a:latin typeface="Malgun Gothic" pitchFamily="34" charset="0"/>
-                <a:ea typeface="Malgun Gothic" pitchFamily="34" charset="-122"/>
-                <a:cs typeface="Malgun Gothic" pitchFamily="34" charset="-120"/>
-              </a:rPr>
-              <a:t>B안: 앱 이용 30% 기준 손님 면제액 4,301원 중 2,622원을 수수료로 → 손님 1,679원 이득 · 기사 손해 0 · 시 재정 0 (시뮬레이션)</a:t>
-            </a:r>
-            <a:endParaRPr lang="ko-KR" altLang="en-US" sz="1050" dirty="0"/>
-          </a:p>
-        </p:txBody>
-      </p:sp>
-      <p:sp>
-        <p:nvSpPr>
-          <p:cNvPr id="35" name="Text 32"/>
           <p:cNvSpPr txBox="1"/>
           <p:nvPr/>
         </p:nvSpPr>
@@ -11799,9 +11565,9 @@
             <a:prstDash val="solid"/>
           </a:ln>
           <a:effectLst>
-            <a:outerShdw sx="100000" sy="100000" kx="0" ky="0" algn="bl" rotWithShape="0" blurRad="101600" dist="38100" dir="5400000">
+            <a:outerShdw sx="100000" sy="100000" kx="0" ky="0" algn="bl" rotWithShape="0" blurRad="50800" dist="12700" dir="5400000">
               <a:srgbClr val="000000">
-                <a:alpha val="18000"/>
+                <a:alpha val="7000"/>
               </a:srgbClr>
             </a:outerShdw>
           </a:effectLst>
@@ -11937,22 +11703,22 @@
           </a:xfrm>
           <a:prstGeom prst="roundRect">
             <a:avLst>
-              <a:gd name="adj" fmla="val 2692"/>
+              <a:gd name="adj" fmla="val 962"/>
             </a:avLst>
           </a:prstGeom>
           <a:solidFill>
             <a:srgbClr val="FFFFFF"/>
           </a:solidFill>
-          <a:ln w="12700">
+          <a:ln w="9525">
             <a:solidFill>
-              <a:srgbClr val="FFFFFF"/>
+              <a:srgbClr val="DDE3DF"/>
             </a:solidFill>
             <a:prstDash val="solid"/>
           </a:ln>
           <a:effectLst>
-            <a:outerShdw sx="100000" sy="100000" kx="0" ky="0" algn="bl" rotWithShape="0" blurRad="101600" dist="38100" dir="5400000">
+            <a:outerShdw sx="100000" sy="100000" kx="0" ky="0" algn="bl" rotWithShape="0" blurRad="50800" dist="12700" dir="5400000">
               <a:srgbClr val="000000">
-                <a:alpha val="18000"/>
+                <a:alpha val="7000"/>
               </a:srgbClr>
             </a:outerShdw>
           </a:effectLst>
@@ -11987,22 +11753,22 @@
           </a:xfrm>
           <a:prstGeom prst="roundRect">
             <a:avLst>
-              <a:gd name="adj" fmla="val 9032"/>
+              <a:gd name="adj" fmla="val 3226"/>
             </a:avLst>
           </a:prstGeom>
           <a:solidFill>
             <a:srgbClr val="FFFFFF"/>
           </a:solidFill>
-          <a:ln w="12700">
+          <a:ln w="9525">
             <a:solidFill>
-              <a:srgbClr val="FFFFFF"/>
+              <a:srgbClr val="DDE3DF"/>
             </a:solidFill>
             <a:prstDash val="solid"/>
           </a:ln>
           <a:effectLst>
-            <a:outerShdw sx="100000" sy="100000" kx="0" ky="0" algn="bl" rotWithShape="0" blurRad="101600" dist="38100" dir="5400000">
+            <a:outerShdw sx="100000" sy="100000" kx="0" ky="0" algn="bl" rotWithShape="0" blurRad="50800" dist="12700" dir="5400000">
               <a:srgbClr val="000000">
-                <a:alpha val="18000"/>
+                <a:alpha val="7000"/>
               </a:srgbClr>
             </a:outerShdw>
           </a:effectLst>
@@ -12099,22 +11865,22 @@
           </a:xfrm>
           <a:prstGeom prst="roundRect">
             <a:avLst>
-              <a:gd name="adj" fmla="val 9032"/>
+              <a:gd name="adj" fmla="val 3226"/>
             </a:avLst>
           </a:prstGeom>
           <a:solidFill>
             <a:srgbClr val="FFFFFF"/>
           </a:solidFill>
-          <a:ln w="12700">
+          <a:ln w="9525">
             <a:solidFill>
-              <a:srgbClr val="FFFFFF"/>
+              <a:srgbClr val="DDE3DF"/>
             </a:solidFill>
             <a:prstDash val="solid"/>
           </a:ln>
           <a:effectLst>
-            <a:outerShdw sx="100000" sy="100000" kx="0" ky="0" algn="bl" rotWithShape="0" blurRad="101600" dist="38100" dir="5400000">
+            <a:outerShdw sx="100000" sy="100000" kx="0" ky="0" algn="bl" rotWithShape="0" blurRad="50800" dist="12700" dir="5400000">
               <a:srgbClr val="000000">
-                <a:alpha val="18000"/>
+                <a:alpha val="7000"/>
               </a:srgbClr>
             </a:outerShdw>
           </a:effectLst>
@@ -12211,22 +11977,22 @@
           </a:xfrm>
           <a:prstGeom prst="roundRect">
             <a:avLst>
-              <a:gd name="adj" fmla="val 9032"/>
+              <a:gd name="adj" fmla="val 3226"/>
             </a:avLst>
           </a:prstGeom>
           <a:solidFill>
             <a:srgbClr val="FFFFFF"/>
           </a:solidFill>
-          <a:ln w="12700">
+          <a:ln w="9525">
             <a:solidFill>
-              <a:srgbClr val="FFFFFF"/>
+              <a:srgbClr val="DDE3DF"/>
             </a:solidFill>
             <a:prstDash val="solid"/>
           </a:ln>
           <a:effectLst>
-            <a:outerShdw sx="100000" sy="100000" kx="0" ky="0" algn="bl" rotWithShape="0" blurRad="101600" dist="38100" dir="5400000">
+            <a:outerShdw sx="100000" sy="100000" kx="0" ky="0" algn="bl" rotWithShape="0" blurRad="50800" dist="12700" dir="5400000">
               <a:srgbClr val="000000">
-                <a:alpha val="18000"/>
+                <a:alpha val="7000"/>
               </a:srgbClr>
             </a:outerShdw>
           </a:effectLst>
@@ -13584,22 +13350,22 @@
           </a:xfrm>
           <a:prstGeom prst="roundRect">
             <a:avLst>
-              <a:gd name="adj" fmla="val 7568"/>
+              <a:gd name="adj" fmla="val 2703"/>
             </a:avLst>
           </a:prstGeom>
           <a:solidFill>
             <a:srgbClr val="FFF4E5"/>
           </a:solidFill>
-          <a:ln w="12700">
+          <a:ln w="9525">
             <a:solidFill>
               <a:srgbClr val="FFF4E5"/>
             </a:solidFill>
             <a:prstDash val="solid"/>
           </a:ln>
           <a:effectLst>
-            <a:outerShdw sx="100000" sy="100000" kx="0" ky="0" algn="bl" rotWithShape="0" blurRad="101600" dist="38100" dir="5400000">
+            <a:outerShdw sx="100000" sy="100000" kx="0" ky="0" algn="bl" rotWithShape="0" blurRad="50800" dist="12700" dir="5400000">
               <a:srgbClr val="000000">
-                <a:alpha val="18000"/>
+                <a:alpha val="7000"/>
               </a:srgbClr>
             </a:outerShdw>
           </a:effectLst>
@@ -13638,7 +13404,7 @@
                 <a:ea typeface="Malgun Gothic" pitchFamily="34" charset="-122"/>
                 <a:cs typeface="Malgun Gothic" pitchFamily="34" charset="-120"/>
               </a:rPr>
-              <a:t>📝 시민 설문 57명 (2026.10) · 핵심 타깃 대학생 84%</a:t>
+              <a:t>시민 설문 57명 (2026.10) · 핵심 타깃 대학생 84%</a:t>
             </a:r>
             <a:endParaRPr lang="ko-KR" altLang="en-US" sz="1300" dirty="0"/>
           </a:p>
@@ -13959,45 +13725,6 @@
       <p:sp>
         <p:nvSpPr>
           <p:cNvPr id="29" name="Text 24"/>
-          <p:cNvSpPr txBox="1"/>
-          <p:nvPr/>
-        </p:nvSpPr>
-        <p:spPr>
-          <a:xfrm>
-            <a:off x="502920" y="6419088"/>
-            <a:ext cx="10607040" cy="292608"/>
-          </a:xfrm>
-          <a:prstGeom prst="rect">
-            <a:avLst/>
-          </a:prstGeom>
-          <a:noFill/>
-          <a:ln/>
-        </p:spPr>
-        <p:txBody>
-          <a:bodyPr wrap="square" lIns="0" tIns="0" rIns="0" bIns="0" rtlCol="0" anchor="ctr"/>
-          <a:lstStyle/>
-          <a:p>
-            <a:pPr eaLnBrk="0" latinLnBrk="0" indent="0" marL="0">
-              <a:buNone/>
-            </a:pPr>
-            <a:r>
-              <a:rPr lang="ko-KR" altLang="en-US" sz="1050" dirty="0">
-                <a:solidFill>
-                  <a:srgbClr val="4A5A54"/>
-                </a:solidFill>
-                <a:latin typeface="Malgun Gothic" pitchFamily="34" charset="0"/>
-                <a:ea typeface="Malgun Gothic" pitchFamily="34" charset="-122"/>
-                <a:cs typeface="Malgun Gothic" pitchFamily="34" charset="-120"/>
-              </a:rPr>
-              <a:t>시뮬레이션: 택시 2,956대·하루 약 5.6만 건, TIMS 2025 실측 보정(실측 아님) · 설문: 57명 중 대학생 84% = 요금에 가장 민감한 초기 타깃 · 요금 분담은 거리 비율 선호 68% → 개선 과제</a:t>
-            </a:r>
-            <a:endParaRPr lang="ko-KR" altLang="en-US" sz="1050" dirty="0"/>
-          </a:p>
-        </p:txBody>
-      </p:sp>
-      <p:sp>
-        <p:nvSpPr>
-          <p:cNvPr id="30" name="Text 25"/>
           <p:cNvSpPr txBox="1"/>
           <p:nvPr/>
         </p:nvSpPr>
@@ -14109,9 +13836,9 @@
             <a:prstDash val="solid"/>
           </a:ln>
           <a:effectLst>
-            <a:outerShdw sx="100000" sy="100000" kx="0" ky="0" algn="bl" rotWithShape="0" blurRad="101600" dist="38100" dir="5400000">
+            <a:outerShdw sx="100000" sy="100000" kx="0" ky="0" algn="bl" rotWithShape="0" blurRad="50800" dist="12700" dir="5400000">
               <a:srgbClr val="000000">
-                <a:alpha val="18000"/>
+                <a:alpha val="7000"/>
               </a:srgbClr>
             </a:outerShdw>
           </a:effectLst>
@@ -14247,22 +13974,22 @@
           </a:xfrm>
           <a:prstGeom prst="roundRect">
             <a:avLst>
-              <a:gd name="adj" fmla="val 10370"/>
+              <a:gd name="adj" fmla="val 3704"/>
             </a:avLst>
           </a:prstGeom>
           <a:solidFill>
             <a:srgbClr val="163A2F"/>
           </a:solidFill>
-          <a:ln w="12700">
+          <a:ln w="9525">
             <a:solidFill>
               <a:srgbClr val="163A2F"/>
             </a:solidFill>
             <a:prstDash val="solid"/>
           </a:ln>
           <a:effectLst>
-            <a:outerShdw sx="100000" sy="100000" kx="0" ky="0" algn="bl" rotWithShape="0" blurRad="101600" dist="38100" dir="5400000">
+            <a:outerShdw sx="100000" sy="100000" kx="0" ky="0" algn="bl" rotWithShape="0" blurRad="50800" dist="12700" dir="5400000">
               <a:srgbClr val="000000">
-                <a:alpha val="18000"/>
+                <a:alpha val="7000"/>
               </a:srgbClr>
             </a:outerShdw>
           </a:effectLst>
@@ -14398,22 +14125,22 @@
           </a:xfrm>
           <a:prstGeom prst="roundRect">
             <a:avLst>
-              <a:gd name="adj" fmla="val 10370"/>
+              <a:gd name="adj" fmla="val 3704"/>
             </a:avLst>
           </a:prstGeom>
           <a:solidFill>
             <a:srgbClr val="163A2F"/>
           </a:solidFill>
-          <a:ln w="12700">
+          <a:ln w="9525">
             <a:solidFill>
               <a:srgbClr val="163A2F"/>
             </a:solidFill>
             <a:prstDash val="solid"/>
           </a:ln>
           <a:effectLst>
-            <a:outerShdw sx="100000" sy="100000" kx="0" ky="0" algn="bl" rotWithShape="0" blurRad="101600" dist="38100" dir="5400000">
+            <a:outerShdw sx="100000" sy="100000" kx="0" ky="0" algn="bl" rotWithShape="0" blurRad="50800" dist="12700" dir="5400000">
               <a:srgbClr val="000000">
-                <a:alpha val="18000"/>
+                <a:alpha val="7000"/>
               </a:srgbClr>
             </a:outerShdw>
           </a:effectLst>
@@ -14549,22 +14276,22 @@
           </a:xfrm>
           <a:prstGeom prst="roundRect">
             <a:avLst>
-              <a:gd name="adj" fmla="val 10370"/>
+              <a:gd name="adj" fmla="val 3704"/>
             </a:avLst>
           </a:prstGeom>
           <a:solidFill>
             <a:srgbClr val="163A2F"/>
           </a:solidFill>
-          <a:ln w="12700">
+          <a:ln w="9525">
             <a:solidFill>
               <a:srgbClr val="163A2F"/>
             </a:solidFill>
             <a:prstDash val="solid"/>
           </a:ln>
           <a:effectLst>
-            <a:outerShdw sx="100000" sy="100000" kx="0" ky="0" algn="bl" rotWithShape="0" blurRad="101600" dist="38100" dir="5400000">
+            <a:outerShdw sx="100000" sy="100000" kx="0" ky="0" algn="bl" rotWithShape="0" blurRad="50800" dist="12700" dir="5400000">
               <a:srgbClr val="000000">
-                <a:alpha val="18000"/>
+                <a:alpha val="7000"/>
               </a:srgbClr>
             </a:outerShdw>
           </a:effectLst>
@@ -14700,22 +14427,22 @@
           </a:xfrm>
           <a:prstGeom prst="roundRect">
             <a:avLst>
-              <a:gd name="adj" fmla="val 10370"/>
+              <a:gd name="adj" fmla="val 3704"/>
             </a:avLst>
           </a:prstGeom>
           <a:solidFill>
             <a:srgbClr val="163A2F"/>
           </a:solidFill>
-          <a:ln w="12700">
+          <a:ln w="9525">
             <a:solidFill>
               <a:srgbClr val="163A2F"/>
             </a:solidFill>
             <a:prstDash val="solid"/>
           </a:ln>
           <a:effectLst>
-            <a:outerShdw sx="100000" sy="100000" kx="0" ky="0" algn="bl" rotWithShape="0" blurRad="101600" dist="38100" dir="5400000">
+            <a:outerShdw sx="100000" sy="100000" kx="0" ky="0" algn="bl" rotWithShape="0" blurRad="50800" dist="12700" dir="5400000">
               <a:srgbClr val="000000">
-                <a:alpha val="18000"/>
+                <a:alpha val="7000"/>
               </a:srgbClr>
             </a:outerShdw>
           </a:effectLst>
@@ -14812,22 +14539,22 @@
           </a:xfrm>
           <a:prstGeom prst="roundRect">
             <a:avLst>
-              <a:gd name="adj" fmla="val 9859"/>
+              <a:gd name="adj" fmla="val 3521"/>
             </a:avLst>
           </a:prstGeom>
           <a:solidFill>
             <a:srgbClr val="FFFFFF"/>
           </a:solidFill>
-          <a:ln w="12700">
+          <a:ln w="9525">
             <a:solidFill>
-              <a:srgbClr val="FFFFFF"/>
+              <a:srgbClr val="DDE3DF"/>
             </a:solidFill>
             <a:prstDash val="solid"/>
           </a:ln>
           <a:effectLst>
-            <a:outerShdw sx="100000" sy="100000" kx="0" ky="0" algn="bl" rotWithShape="0" blurRad="101600" dist="38100" dir="5400000">
+            <a:outerShdw sx="100000" sy="100000" kx="0" ky="0" algn="bl" rotWithShape="0" blurRad="50800" dist="12700" dir="5400000">
               <a:srgbClr val="000000">
-                <a:alpha val="18000"/>
+                <a:alpha val="7000"/>
               </a:srgbClr>
             </a:outerShdw>
           </a:effectLst>
@@ -14966,22 +14693,22 @@
           </a:xfrm>
           <a:prstGeom prst="roundRect">
             <a:avLst>
-              <a:gd name="adj" fmla="val 9859"/>
+              <a:gd name="adj" fmla="val 3521"/>
             </a:avLst>
           </a:prstGeom>
           <a:solidFill>
             <a:srgbClr val="FFFFFF"/>
           </a:solidFill>
-          <a:ln w="12700">
+          <a:ln w="9525">
             <a:solidFill>
-              <a:srgbClr val="FFFFFF"/>
+              <a:srgbClr val="DDE3DF"/>
             </a:solidFill>
             <a:prstDash val="solid"/>
           </a:ln>
           <a:effectLst>
-            <a:outerShdw sx="100000" sy="100000" kx="0" ky="0" algn="bl" rotWithShape="0" blurRad="101600" dist="38100" dir="5400000">
+            <a:outerShdw sx="100000" sy="100000" kx="0" ky="0" algn="bl" rotWithShape="0" blurRad="50800" dist="12700" dir="5400000">
               <a:srgbClr val="000000">
-                <a:alpha val="18000"/>
+                <a:alpha val="7000"/>
               </a:srgbClr>
             </a:outerShdw>
           </a:effectLst>
@@ -15120,22 +14847,22 @@
           </a:xfrm>
           <a:prstGeom prst="roundRect">
             <a:avLst>
-              <a:gd name="adj" fmla="val 9859"/>
+              <a:gd name="adj" fmla="val 3521"/>
             </a:avLst>
           </a:prstGeom>
           <a:solidFill>
             <a:srgbClr val="FFFFFF"/>
           </a:solidFill>
-          <a:ln w="12700">
+          <a:ln w="9525">
             <a:solidFill>
-              <a:srgbClr val="FFFFFF"/>
+              <a:srgbClr val="DDE3DF"/>
             </a:solidFill>
             <a:prstDash val="solid"/>
           </a:ln>
           <a:effectLst>
-            <a:outerShdw sx="100000" sy="100000" kx="0" ky="0" algn="bl" rotWithShape="0" blurRad="101600" dist="38100" dir="5400000">
+            <a:outerShdw sx="100000" sy="100000" kx="0" ky="0" algn="bl" rotWithShape="0" blurRad="50800" dist="12700" dir="5400000">
               <a:srgbClr val="000000">
-                <a:alpha val="18000"/>
+                <a:alpha val="7000"/>
               </a:srgbClr>
             </a:outerShdw>
           </a:effectLst>
@@ -15274,22 +15001,22 @@
           </a:xfrm>
           <a:prstGeom prst="roundRect">
             <a:avLst>
-              <a:gd name="adj" fmla="val 9859"/>
+              <a:gd name="adj" fmla="val 3521"/>
             </a:avLst>
           </a:prstGeom>
           <a:solidFill>
             <a:srgbClr val="FFFFFF"/>
           </a:solidFill>
-          <a:ln w="12700">
+          <a:ln w="9525">
             <a:solidFill>
-              <a:srgbClr val="FFFFFF"/>
+              <a:srgbClr val="DDE3DF"/>
             </a:solidFill>
             <a:prstDash val="solid"/>
           </a:ln>
           <a:effectLst>
-            <a:outerShdw sx="100000" sy="100000" kx="0" ky="0" algn="bl" rotWithShape="0" blurRad="101600" dist="38100" dir="5400000">
+            <a:outerShdw sx="100000" sy="100000" kx="0" ky="0" algn="bl" rotWithShape="0" blurRad="50800" dist="12700" dir="5400000">
               <a:srgbClr val="000000">
-                <a:alpha val="18000"/>
+                <a:alpha val="7000"/>
               </a:srgbClr>
             </a:outerShdw>
           </a:effectLst>
@@ -15428,22 +15155,22 @@
           </a:xfrm>
           <a:prstGeom prst="roundRect">
             <a:avLst>
-              <a:gd name="adj" fmla="val 4714"/>
+              <a:gd name="adj" fmla="val 1684"/>
             </a:avLst>
           </a:prstGeom>
           <a:solidFill>
             <a:srgbClr val="163A2F"/>
           </a:solidFill>
-          <a:ln w="12700">
+          <a:ln w="9525">
             <a:solidFill>
               <a:srgbClr val="163A2F"/>
             </a:solidFill>
             <a:prstDash val="solid"/>
           </a:ln>
           <a:effectLst>
-            <a:outerShdw sx="100000" sy="100000" kx="0" ky="0" algn="bl" rotWithShape="0" blurRad="101600" dist="38100" dir="5400000">
+            <a:outerShdw sx="100000" sy="100000" kx="0" ky="0" algn="bl" rotWithShape="0" blurRad="50800" dist="12700" dir="5400000">
               <a:srgbClr val="000000">
-                <a:alpha val="18000"/>
+                <a:alpha val="7000"/>
               </a:srgbClr>
             </a:outerShdw>
           </a:effectLst>
@@ -15482,7 +15209,7 @@
                 <a:ea typeface="Malgun Gothic" pitchFamily="34" charset="-122"/>
                 <a:cs typeface="Malgun Gothic" pitchFamily="34" charset="-120"/>
               </a:rPr>
-              <a:t>⚖️ 법 · 기대 효과 · 한계</a:t>
+              <a:t>법 · 기대 효과 · 한계</a:t>
             </a:r>
             <a:endParaRPr lang="ko-KR" altLang="en-US" sz="1300" dirty="0"/>
           </a:p>

--- a/presentation/쉐어택_발표_v2.pptx
+++ b/presentation/쉐어택_발표_v2.pptx
@@ -3671,8 +3671,8 @@
         </p:nvSpPr>
         <p:spPr>
           <a:xfrm>
-            <a:off x="1234440" y="329184"/>
-            <a:ext cx="10332720" cy="457200"/>
+            <a:off x="1234440" y="292608"/>
+            <a:ext cx="10332720" cy="502920"/>
           </a:xfrm>
           <a:prstGeom prst="rect">
             <a:avLst/>
@@ -3688,7 +3688,7 @@
               <a:buNone/>
             </a:pPr>
             <a:r>
-              <a:rPr lang="ko-KR" altLang="en-US" sz="2600" b="1" dirty="0">
+              <a:rPr lang="ko-KR" altLang="en-US" sz="3000" b="1" dirty="0">
                 <a:solidFill>
                   <a:srgbClr val="10231C"/>
                 </a:solidFill>
@@ -3698,7 +3698,7 @@
               </a:rPr>
               <a:t>페르소나 · 고객 여정</a:t>
             </a:r>
-            <a:endParaRPr lang="ko-KR" altLang="en-US" sz="2600" dirty="0"/>
+            <a:endParaRPr lang="ko-KR" altLang="en-US" sz="3000" dirty="0"/>
           </a:p>
         </p:txBody>
       </p:sp>
@@ -3710,8 +3710,8 @@
         </p:nvSpPr>
         <p:spPr>
           <a:xfrm>
-            <a:off x="1234440" y="786384"/>
-            <a:ext cx="10332720" cy="329184"/>
+            <a:off x="1234440" y="804672"/>
+            <a:ext cx="10332720" cy="347472"/>
           </a:xfrm>
           <a:prstGeom prst="rect">
             <a:avLst/>
@@ -3727,7 +3727,7 @@
               <a:buNone/>
             </a:pPr>
             <a:r>
-              <a:rPr lang="ko-KR" altLang="en-US" sz="1400" dirty="0">
+              <a:rPr lang="ko-KR" altLang="en-US" sz="1500" dirty="0">
                 <a:solidFill>
                   <a:srgbClr val="4A5A54"/>
                 </a:solidFill>
@@ -3737,7 +3737,7 @@
               </a:rPr>
               <a:t>우리 팀원들이 직접 겪은 복합할증 요금 부담에서 시작했어요</a:t>
             </a:r>
-            <a:endParaRPr lang="ko-KR" altLang="en-US" sz="1400" dirty="0"/>
+            <a:endParaRPr lang="ko-KR" altLang="en-US" sz="1500" dirty="0"/>
           </a:p>
         </p:txBody>
       </p:sp>
@@ -4267,7 +4267,7 @@
                 <a:ea typeface="Malgun Gothic" pitchFamily="34" charset="-122"/>
                 <a:cs typeface="Malgun Gothic" pitchFamily="34" charset="-120"/>
               </a:rPr>
-              <a:t>읍·면 하차 후 빈 차 귀로 = 연료·시간 손해</a:t>
+              <a:t>🛣️ 읍·면 하차 후 빈 차 귀로 = 연료·시간 손해</a:t>
             </a:r>
             <a:endParaRPr lang="ko-KR" altLang="en-US" sz="1250" dirty="0"/>
           </a:p>
@@ -5210,8 +5210,8 @@
         </p:nvSpPr>
         <p:spPr>
           <a:xfrm>
-            <a:off x="1234440" y="329184"/>
-            <a:ext cx="10332720" cy="457200"/>
+            <a:off x="1234440" y="292608"/>
+            <a:ext cx="10332720" cy="502920"/>
           </a:xfrm>
           <a:prstGeom prst="rect">
             <a:avLst/>
@@ -5227,7 +5227,7 @@
               <a:buNone/>
             </a:pPr>
             <a:r>
-              <a:rPr lang="ko-KR" altLang="en-US" sz="2600" b="1" dirty="0">
+              <a:rPr lang="ko-KR" altLang="en-US" sz="3000" b="1" dirty="0">
                 <a:solidFill>
                   <a:srgbClr val="10231C"/>
                 </a:solidFill>
@@ -5237,7 +5237,7 @@
               </a:rPr>
               <a:t>원인 분석</a:t>
             </a:r>
-            <a:endParaRPr lang="ko-KR" altLang="en-US" sz="2600" dirty="0"/>
+            <a:endParaRPr lang="ko-KR" altLang="en-US" sz="3000" dirty="0"/>
           </a:p>
         </p:txBody>
       </p:sp>
@@ -5249,8 +5249,8 @@
         </p:nvSpPr>
         <p:spPr>
           <a:xfrm>
-            <a:off x="1234440" y="786384"/>
-            <a:ext cx="10332720" cy="329184"/>
+            <a:off x="1234440" y="804672"/>
+            <a:ext cx="10332720" cy="347472"/>
           </a:xfrm>
           <a:prstGeom prst="rect">
             <a:avLst/>
@@ -5266,7 +5266,7 @@
               <a:buNone/>
             </a:pPr>
             <a:r>
-              <a:rPr lang="ko-KR" altLang="en-US" sz="1400" dirty="0">
+              <a:rPr lang="ko-KR" altLang="en-US" sz="1500" dirty="0">
                 <a:solidFill>
                   <a:srgbClr val="4A5A54"/>
                 </a:solidFill>
@@ -5276,7 +5276,7 @@
               </a:rPr>
               <a:t>할증이 가장 많이 붙는 곳이, 빈 차로 돌아올 위험은 가장 낮아요</a:t>
             </a:r>
-            <a:endParaRPr lang="ko-KR" altLang="en-US" sz="1400" dirty="0"/>
+            <a:endParaRPr lang="ko-KR" altLang="en-US" sz="1500" dirty="0"/>
           </a:p>
         </p:txBody>
       </p:sp>
@@ -6120,8 +6120,8 @@
         </p:nvSpPr>
         <p:spPr>
           <a:xfrm>
-            <a:off x="1234440" y="329184"/>
-            <a:ext cx="10332720" cy="457200"/>
+            <a:off x="1234440" y="292608"/>
+            <a:ext cx="10332720" cy="502920"/>
           </a:xfrm>
           <a:prstGeom prst="rect">
             <a:avLst/>
@@ -6137,7 +6137,7 @@
               <a:buNone/>
             </a:pPr>
             <a:r>
-              <a:rPr lang="ko-KR" altLang="en-US" sz="2600" b="1" dirty="0">
+              <a:rPr lang="ko-KR" altLang="en-US" sz="3000" b="1" dirty="0">
                 <a:solidFill>
                   <a:srgbClr val="10231C"/>
                 </a:solidFill>
@@ -6147,7 +6147,7 @@
               </a:rPr>
               <a:t>가치제안 캔버스</a:t>
             </a:r>
-            <a:endParaRPr lang="ko-KR" altLang="en-US" sz="2600" dirty="0"/>
+            <a:endParaRPr lang="ko-KR" altLang="en-US" sz="3000" dirty="0"/>
           </a:p>
         </p:txBody>
       </p:sp>
@@ -6159,8 +6159,8 @@
         </p:nvSpPr>
         <p:spPr>
           <a:xfrm>
-            <a:off x="1234440" y="786384"/>
-            <a:ext cx="10332720" cy="329184"/>
+            <a:off x="1234440" y="804672"/>
+            <a:ext cx="10332720" cy="347472"/>
           </a:xfrm>
           <a:prstGeom prst="rect">
             <a:avLst/>
@@ -6176,7 +6176,7 @@
               <a:buNone/>
             </a:pPr>
             <a:r>
-              <a:rPr lang="ko-KR" altLang="en-US" sz="1400" dirty="0">
+              <a:rPr lang="ko-KR" altLang="en-US" sz="1500" dirty="0">
                 <a:solidFill>
                   <a:srgbClr val="4A5A54"/>
                 </a:solidFill>
@@ -6186,7 +6186,7 @@
               </a:rPr>
               <a:t>손님과 기사, 두 고객에게 각각 이득이 생겨요</a:t>
             </a:r>
-            <a:endParaRPr lang="ko-KR" altLang="en-US" sz="1400" dirty="0"/>
+            <a:endParaRPr lang="ko-KR" altLang="en-US" sz="1500" dirty="0"/>
           </a:p>
         </p:txBody>
       </p:sp>
@@ -7836,8 +7836,8 @@
         </p:nvSpPr>
         <p:spPr>
           <a:xfrm>
-            <a:off x="1234440" y="329184"/>
-            <a:ext cx="10332720" cy="457200"/>
+            <a:off x="1234440" y="292608"/>
+            <a:ext cx="10332720" cy="502920"/>
           </a:xfrm>
           <a:prstGeom prst="rect">
             <a:avLst/>
@@ -7853,7 +7853,7 @@
               <a:buNone/>
             </a:pPr>
             <a:r>
-              <a:rPr lang="ko-KR" altLang="en-US" sz="2600" b="1" dirty="0">
+              <a:rPr lang="ko-KR" altLang="en-US" sz="3000" b="1" dirty="0">
                 <a:solidFill>
                   <a:srgbClr val="10231C"/>
                 </a:solidFill>
@@ -7863,7 +7863,7 @@
               </a:rPr>
               <a:t>MVP · 차별점</a:t>
             </a:r>
-            <a:endParaRPr lang="ko-KR" altLang="en-US" sz="2600" dirty="0"/>
+            <a:endParaRPr lang="ko-KR" altLang="en-US" sz="3000" dirty="0"/>
           </a:p>
         </p:txBody>
       </p:sp>
@@ -7875,8 +7875,8 @@
         </p:nvSpPr>
         <p:spPr>
           <a:xfrm>
-            <a:off x="1234440" y="786384"/>
-            <a:ext cx="10332720" cy="329184"/>
+            <a:off x="1234440" y="804672"/>
+            <a:ext cx="10332720" cy="347472"/>
           </a:xfrm>
           <a:prstGeom prst="rect">
             <a:avLst/>
@@ -7892,7 +7892,7 @@
               <a:buNone/>
             </a:pPr>
             <a:r>
-              <a:rPr lang="ko-KR" altLang="en-US" sz="1400" dirty="0">
+              <a:rPr lang="ko-KR" altLang="en-US" sz="1500" dirty="0">
                 <a:solidFill>
                   <a:srgbClr val="4A5A54"/>
                 </a:solidFill>
@@ -7902,7 +7902,7 @@
               </a:rPr>
               <a:t>택시 앱을 대신하지 않아요. 부르기 전·후에 할증을 줄여 줘요</a:t>
             </a:r>
-            <a:endParaRPr lang="ko-KR" altLang="en-US" sz="1400" dirty="0"/>
+            <a:endParaRPr lang="ko-KR" altLang="en-US" sz="1500" dirty="0"/>
           </a:p>
         </p:txBody>
       </p:sp>
@@ -10006,8 +10006,8 @@
         </p:nvSpPr>
         <p:spPr>
           <a:xfrm>
-            <a:off x="1234440" y="329184"/>
-            <a:ext cx="10332720" cy="457200"/>
+            <a:off x="1234440" y="292608"/>
+            <a:ext cx="10332720" cy="502920"/>
           </a:xfrm>
           <a:prstGeom prst="rect">
             <a:avLst/>
@@ -10023,7 +10023,7 @@
               <a:buNone/>
             </a:pPr>
             <a:r>
-              <a:rPr lang="ko-KR" altLang="en-US" sz="2600" b="1" dirty="0">
+              <a:rPr lang="ko-KR" altLang="en-US" sz="3000" b="1" dirty="0">
                 <a:solidFill>
                   <a:srgbClr val="10231C"/>
                 </a:solidFill>
@@ -10033,7 +10033,7 @@
               </a:rPr>
               <a:t>비즈니스 모델 캔버스</a:t>
             </a:r>
-            <a:endParaRPr lang="ko-KR" altLang="en-US" sz="2600" dirty="0"/>
+            <a:endParaRPr lang="ko-KR" altLang="en-US" sz="3000" dirty="0"/>
           </a:p>
         </p:txBody>
       </p:sp>
@@ -10045,8 +10045,8 @@
         </p:nvSpPr>
         <p:spPr>
           <a:xfrm>
-            <a:off x="1234440" y="786384"/>
-            <a:ext cx="10332720" cy="329184"/>
+            <a:off x="1234440" y="804672"/>
+            <a:ext cx="10332720" cy="347472"/>
           </a:xfrm>
           <a:prstGeom prst="rect">
             <a:avLst/>
@@ -10062,7 +10062,7 @@
               <a:buNone/>
             </a:pPr>
             <a:r>
-              <a:rPr lang="ko-KR" altLang="en-US" sz="1400" dirty="0">
+              <a:rPr lang="ko-KR" altLang="en-US" sz="1500" dirty="0">
                 <a:solidFill>
                   <a:srgbClr val="4A5A54"/>
                 </a:solidFill>
@@ -10072,7 +10072,7 @@
               </a:rPr>
               <a:t>시 재정 없이도 손님·기사·시가 모두 이득을 보는 구조</a:t>
             </a:r>
-            <a:endParaRPr lang="ko-KR" altLang="en-US" sz="1400" dirty="0"/>
+            <a:endParaRPr lang="ko-KR" altLang="en-US" sz="1500" dirty="0"/>
           </a:p>
         </p:txBody>
       </p:sp>
@@ -11620,8 +11620,8 @@
         </p:nvSpPr>
         <p:spPr>
           <a:xfrm>
-            <a:off x="1234440" y="329184"/>
-            <a:ext cx="10332720" cy="457200"/>
+            <a:off x="1234440" y="292608"/>
+            <a:ext cx="10332720" cy="502920"/>
           </a:xfrm>
           <a:prstGeom prst="rect">
             <a:avLst/>
@@ -11637,7 +11637,7 @@
               <a:buNone/>
             </a:pPr>
             <a:r>
-              <a:rPr lang="ko-KR" altLang="en-US" sz="2600" b="1" dirty="0">
+              <a:rPr lang="ko-KR" altLang="en-US" sz="3000" b="1" dirty="0">
                 <a:solidFill>
                   <a:srgbClr val="10231C"/>
                 </a:solidFill>
@@ -11647,7 +11647,7 @@
               </a:rPr>
               <a:t>사업성 검증</a:t>
             </a:r>
-            <a:endParaRPr lang="ko-KR" altLang="en-US" sz="2600" dirty="0"/>
+            <a:endParaRPr lang="ko-KR" altLang="en-US" sz="3000" dirty="0"/>
           </a:p>
         </p:txBody>
       </p:sp>
@@ -11659,8 +11659,8 @@
         </p:nvSpPr>
         <p:spPr>
           <a:xfrm>
-            <a:off x="1234440" y="786384"/>
-            <a:ext cx="10332720" cy="329184"/>
+            <a:off x="1234440" y="804672"/>
+            <a:ext cx="10332720" cy="347472"/>
           </a:xfrm>
           <a:prstGeom prst="rect">
             <a:avLst/>
@@ -11676,7 +11676,7 @@
               <a:buNone/>
             </a:pPr>
             <a:r>
-              <a:rPr lang="ko-KR" altLang="en-US" sz="1400" dirty="0">
+              <a:rPr lang="ko-KR" altLang="en-US" sz="1500" dirty="0">
                 <a:solidFill>
                   <a:srgbClr val="4A5A54"/>
                 </a:solidFill>
@@ -11686,7 +11686,7 @@
               </a:rPr>
               <a:t>합승은 기사 수입을 깎고, 귀로 매칭은 늘려요</a:t>
             </a:r>
-            <a:endParaRPr lang="ko-KR" altLang="en-US" sz="1400" dirty="0"/>
+            <a:endParaRPr lang="ko-KR" altLang="en-US" sz="1500" dirty="0"/>
           </a:p>
         </p:txBody>
       </p:sp>
@@ -13891,8 +13891,8 @@
         </p:nvSpPr>
         <p:spPr>
           <a:xfrm>
-            <a:off x="1234440" y="329184"/>
-            <a:ext cx="10332720" cy="457200"/>
+            <a:off x="1234440" y="292608"/>
+            <a:ext cx="10332720" cy="502920"/>
           </a:xfrm>
           <a:prstGeom prst="rect">
             <a:avLst/>
@@ -13908,7 +13908,7 @@
               <a:buNone/>
             </a:pPr>
             <a:r>
-              <a:rPr lang="ko-KR" altLang="en-US" sz="2600" b="1" dirty="0">
+              <a:rPr lang="ko-KR" altLang="en-US" sz="3000" b="1" dirty="0">
                 <a:solidFill>
                   <a:srgbClr val="FFFFFF"/>
                 </a:solidFill>
@@ -13918,7 +13918,7 @@
               </a:rPr>
               <a:t>실행 계획</a:t>
             </a:r>
-            <a:endParaRPr lang="ko-KR" altLang="en-US" sz="2600" dirty="0"/>
+            <a:endParaRPr lang="ko-KR" altLang="en-US" sz="3000" dirty="0"/>
           </a:p>
         </p:txBody>
       </p:sp>
@@ -13930,8 +13930,8 @@
         </p:nvSpPr>
         <p:spPr>
           <a:xfrm>
-            <a:off x="1234440" y="786384"/>
-            <a:ext cx="10332720" cy="329184"/>
+            <a:off x="1234440" y="804672"/>
+            <a:ext cx="10332720" cy="347472"/>
           </a:xfrm>
           <a:prstGeom prst="rect">
             <a:avLst/>
@@ -13947,7 +13947,7 @@
               <a:buNone/>
             </a:pPr>
             <a:r>
-              <a:rPr lang="ko-KR" altLang="en-US" sz="1400" dirty="0">
+              <a:rPr lang="ko-KR" altLang="en-US" sz="1500" dirty="0">
                 <a:solidFill>
                   <a:srgbClr val="A9B8B1"/>
                 </a:solidFill>
@@ -13957,7 +13957,7 @@
               </a:rPr>
               <a:t>법 안에서, 오송역 한 곳부터 작게 시작해요</a:t>
             </a:r>
-            <a:endParaRPr lang="ko-KR" altLang="en-US" sz="1400" dirty="0"/>
+            <a:endParaRPr lang="ko-KR" altLang="en-US" sz="1500" dirty="0"/>
           </a:p>
         </p:txBody>
       </p:sp>

--- a/presentation/쉐어택_발표_v2.pptx
+++ b/presentation/쉐어택_발표_v2.pptx
@@ -2463,7 +2463,7 @@
                 <a:ea typeface="Malgun Gothic" pitchFamily="34" charset="-122"/>
                 <a:cs typeface="Malgun Gothic" pitchFamily="34" charset="-120"/>
               </a:rPr>
-              <a:t>빈 차로 돌아가는 택시에, 시내 가는 손님을 태워 보내요</a:t>
+              <a:t>같은 청주인데, 읍·면만 가면 35% 더 낸다</a:t>
             </a:r>
             <a:endParaRPr lang="ko-KR" altLang="en-US" sz="1500" dirty="0"/>
           </a:p>
@@ -3696,7 +3696,7 @@
                 <a:ea typeface="Malgun Gothic" pitchFamily="34" charset="-122"/>
                 <a:cs typeface="Malgun Gothic" pitchFamily="34" charset="-120"/>
               </a:rPr>
-              <a:t>페르소나 · 고객 여정</a:t>
+              <a:t>손님은 할증을, 기사는 빈 차를 떠안는다</a:t>
             </a:r>
             <a:endParaRPr lang="ko-KR" altLang="en-US" sz="3000" dirty="0"/>
           </a:p>
@@ -3735,7 +3735,7 @@
                 <a:ea typeface="Malgun Gothic" pitchFamily="34" charset="-122"/>
                 <a:cs typeface="Malgun Gothic" pitchFamily="34" charset="-120"/>
               </a:rPr>
-              <a:t>우리 팀원들이 직접 겪은 복합할증 요금 부담에서 시작했어요</a:t>
+              <a:t>같은 길 위에서 양쪽 모두 손해를 본다 · 팀원들이 직접 겪은 요금 부담</a:t>
             </a:r>
             <a:endParaRPr lang="ko-KR" altLang="en-US" sz="1500" dirty="0"/>
           </a:p>
@@ -5235,7 +5235,7 @@
                 <a:ea typeface="Malgun Gothic" pitchFamily="34" charset="-122"/>
                 <a:cs typeface="Malgun Gothic" pitchFamily="34" charset="-120"/>
               </a:rPr>
-              <a:t>원인 분석</a:t>
+              <a:t>할증이 가장 많은 곳이, 빈 차 위험은 가장 낮다</a:t>
             </a:r>
             <a:endParaRPr lang="ko-KR" altLang="en-US" sz="3000" dirty="0"/>
           </a:p>
@@ -5274,7 +5274,7 @@
                 <a:ea typeface="Malgun Gothic" pitchFamily="34" charset="-122"/>
                 <a:cs typeface="Malgun Gothic" pitchFamily="34" charset="-120"/>
               </a:rPr>
-              <a:t>할증이 가장 많이 붙는 곳이, 빈 차로 돌아올 위험은 가장 낮아요</a:t>
+              <a:t>손님이 없는 게 아니라 빈 차와 손님이 엇갈린다</a:t>
             </a:r>
             <a:endParaRPr lang="ko-KR" altLang="en-US" sz="1500" dirty="0"/>
           </a:p>
@@ -6145,7 +6145,7 @@
                 <a:ea typeface="Malgun Gothic" pitchFamily="34" charset="-122"/>
                 <a:cs typeface="Malgun Gothic" pitchFamily="34" charset="-120"/>
               </a:rPr>
-              <a:t>가치제안 캔버스</a:t>
+              <a:t>손님은 싸게, 기사는 더 번다</a:t>
             </a:r>
             <a:endParaRPr lang="ko-KR" altLang="en-US" sz="3000" dirty="0"/>
           </a:p>
@@ -6184,7 +6184,7 @@
                 <a:ea typeface="Malgun Gothic" pitchFamily="34" charset="-122"/>
                 <a:cs typeface="Malgun Gothic" pitchFamily="34" charset="-120"/>
               </a:rPr>
-              <a:t>손님과 기사, 두 고객에게 각각 이득이 생겨요</a:t>
+              <a:t>한쪽만 이득이면 오래가지 못한다 · 가치제안 캔버스</a:t>
             </a:r>
             <a:endParaRPr lang="ko-KR" altLang="en-US" sz="1500" dirty="0"/>
           </a:p>
@@ -7861,7 +7861,7 @@
                 <a:ea typeface="Malgun Gothic" pitchFamily="34" charset="-122"/>
                 <a:cs typeface="Malgun Gothic" pitchFamily="34" charset="-120"/>
               </a:rPr>
-              <a:t>MVP · 차별점</a:t>
+              <a:t>택시 앱을 바꾸지 않고, 할증 없는 길을 더한다</a:t>
             </a:r>
             <a:endParaRPr lang="ko-KR" altLang="en-US" sz="3000" dirty="0"/>
           </a:p>
@@ -7900,7 +7900,7 @@
                 <a:ea typeface="Malgun Gothic" pitchFamily="34" charset="-122"/>
                 <a:cs typeface="Malgun Gothic" pitchFamily="34" charset="-120"/>
               </a:rPr>
-              <a:t>택시 앱을 대신하지 않아요. 부르기 전·후에 할증을 줄여 줘요</a:t>
+              <a:t>왕복 매칭 · 귀로 연계 결제 · 나눠 타기</a:t>
             </a:r>
             <a:endParaRPr lang="ko-KR" altLang="en-US" sz="1500" dirty="0"/>
           </a:p>
@@ -10031,7 +10031,7 @@
                 <a:ea typeface="Malgun Gothic" pitchFamily="34" charset="-122"/>
                 <a:cs typeface="Malgun Gothic" pitchFamily="34" charset="-120"/>
               </a:rPr>
-              <a:t>비즈니스 모델 캔버스</a:t>
+              <a:t>시 예산 0원으로 할증을 없앤다</a:t>
             </a:r>
             <a:endParaRPr lang="ko-KR" altLang="en-US" sz="3000" dirty="0"/>
           </a:p>
@@ -10070,7 +10070,7 @@
                 <a:ea typeface="Malgun Gothic" pitchFamily="34" charset="-122"/>
                 <a:cs typeface="Malgun Gothic" pitchFamily="34" charset="-120"/>
               </a:rPr>
-              <a:t>시 재정 없이도 손님·기사·시가 모두 이득을 보는 구조</a:t>
+              <a:t>손님 1,679원 이득 · 기사 손해 0 · 플랫폼 건당 약 400원 · 비즈니스 모델 캔버스</a:t>
             </a:r>
             <a:endParaRPr lang="ko-KR" altLang="en-US" sz="1500" dirty="0"/>
           </a:p>
@@ -11645,7 +11645,7 @@
                 <a:ea typeface="Malgun Gothic" pitchFamily="34" charset="-122"/>
                 <a:cs typeface="Malgun Gothic" pitchFamily="34" charset="-120"/>
               </a:rPr>
-              <a:t>사업성 검증</a:t>
+              <a:t>시민 63%가 할증 때문에 택시를 포기했다</a:t>
             </a:r>
             <a:endParaRPr lang="ko-KR" altLang="en-US" sz="3000" dirty="0"/>
           </a:p>
@@ -11684,7 +11684,7 @@
                 <a:ea typeface="Malgun Gothic" pitchFamily="34" charset="-122"/>
                 <a:cs typeface="Malgun Gothic" pitchFamily="34" charset="-120"/>
               </a:rPr>
-              <a:t>합승은 기사 수입을 깎고, 귀로 매칭은 늘려요</a:t>
+              <a:t>참여 기사는 하루 5,774원을 더 번다 · 사업성 검증</a:t>
             </a:r>
             <a:endParaRPr lang="ko-KR" altLang="en-US" sz="1500" dirty="0"/>
           </a:p>
@@ -13916,7 +13916,7 @@
                 <a:ea typeface="Malgun Gothic" pitchFamily="34" charset="-122"/>
                 <a:cs typeface="Malgun Gothic" pitchFamily="34" charset="-120"/>
               </a:rPr>
-              <a:t>실행 계획</a:t>
+              <a:t>오송역 한 곳에서 시작해 할증 면제까지</a:t>
             </a:r>
             <a:endParaRPr lang="ko-KR" altLang="en-US" sz="3000" dirty="0"/>
           </a:p>
@@ -13955,7 +13955,7 @@
                 <a:ea typeface="Malgun Gothic" pitchFamily="34" charset="-122"/>
                 <a:cs typeface="Malgun Gothic" pitchFamily="34" charset="-120"/>
               </a:rPr>
-              <a:t>법 안에서, 오송역 한 곳부터 작게 시작해요</a:t>
+              <a:t>시범 → 제휴 → 거점 확대 → 고시 건의</a:t>
             </a:r>
             <a:endParaRPr lang="ko-KR" altLang="en-US" sz="1500" dirty="0"/>
           </a:p>
@@ -15366,7 +15366,7 @@
                 <a:ea typeface="Malgun Gothic" pitchFamily="34" charset="-122"/>
                 <a:cs typeface="Malgun Gothic" pitchFamily="34" charset="-120"/>
               </a:rPr>
-              <a:t>🚕 빈 차 귀로를 채우면, 할증의 이유가 사라집니다</a:t>
+              <a:t>빈 차를 채우면, 할증의 이유가 사라진다</a:t>
             </a:r>
             <a:endParaRPr lang="ko-KR" altLang="en-US" sz="2000" dirty="0"/>
           </a:p>

--- a/presentation/쉐어택_발표_v2.pptx
+++ b/presentation/쉐어택_발표_v2.pptx
@@ -11425,27 +11425,7 @@
                 <a:ea typeface="Malgun Gothic" pitchFamily="34" charset="-122"/>
                 <a:cs typeface="Malgun Gothic" pitchFamily="34" charset="-120"/>
               </a:rPr>
-              <a:t>플랫폼 몫: 귀로 매칭 운임의 2.8% (약 400원/건) = 카카오T블루 가맹 수수료 수준(2024)</a:t>
-            </a:r>
-            <a:endParaRPr lang="ko-KR" altLang="en-US" sz="1250" dirty="0"/>
-          </a:p>
-          <a:p>
-            <a:pPr eaLnBrk="0" latinLnBrk="0" indent="0" marL="0">
-              <a:lnSpc>
-                <a:spcPct val="130000"/>
-              </a:lnSpc>
-              <a:buNone/>
-            </a:pPr>
-            <a:r>
-              <a:rPr lang="ko-KR" altLang="en-US" sz="1250" dirty="0">
-                <a:solidFill>
-                  <a:srgbClr val="10231C"/>
-                </a:solidFill>
-                <a:latin typeface="Malgun Gothic" pitchFamily="34" charset="0"/>
-                <a:ea typeface="Malgun Gothic" pitchFamily="34" charset="-122"/>
-                <a:cs typeface="Malgun Gothic" pitchFamily="34" charset="-120"/>
-              </a:rPr>
-              <a:t>+ 시 정책 데이터 리포트(B2G)</a:t>
+              <a:t>플랫폼 몫: 운임의 2.8%(약 400원/건, 카카오T블루 가맹 수수료 수준) · B2G 데이터 리포트</a:t>
             </a:r>
             <a:endParaRPr lang="ko-KR" altLang="en-US" sz="1250" dirty="0"/>
           </a:p>

--- a/presentation/쉐어택_발표_v2.pptx
+++ b/presentation/쉐어택_발표_v2.pptx
@@ -2439,7 +2439,7 @@
         <p:spPr>
           <a:xfrm>
             <a:off x="640080" y="2542032"/>
-            <a:ext cx="6583680" cy="365760"/>
+            <a:ext cx="6949440" cy="457200"/>
           </a:xfrm>
           <a:prstGeom prst="rect">
             <a:avLst/>
@@ -2455,9 +2455,9 @@
               <a:buNone/>
             </a:pPr>
             <a:r>
-              <a:rPr lang="ko-KR" altLang="en-US" sz="1500" dirty="0">
-                <a:solidFill>
-                  <a:srgbClr val="A9B8B1"/>
+              <a:rPr lang="ko-KR" altLang="en-US" sz="2100" b="1" dirty="0">
+                <a:solidFill>
+                  <a:srgbClr val="F2A93B"/>
                 </a:solidFill>
                 <a:latin typeface="Malgun Gothic" pitchFamily="34" charset="0"/>
                 <a:ea typeface="Malgun Gothic" pitchFamily="34" charset="-122"/>
@@ -2465,7 +2465,7 @@
               </a:rPr>
               <a:t>같은 청주인데, 읍·면만 가면 35% 더 낸다</a:t>
             </a:r>
-            <a:endParaRPr lang="ko-KR" altLang="en-US" sz="1500" dirty="0"/>
+            <a:endParaRPr lang="ko-KR" altLang="en-US" sz="2100" dirty="0"/>
           </a:p>
         </p:txBody>
       </p:sp>
@@ -5518,8 +5518,8 @@
         </p:nvSpPr>
         <p:spPr>
           <a:xfrm>
-            <a:off x="731520" y="3840480"/>
-            <a:ext cx="3017520" cy="1097280"/>
+            <a:off x="731520" y="3794760"/>
+            <a:ext cx="3017520" cy="1234440"/>
           </a:xfrm>
           <a:prstGeom prst="rect">
             <a:avLst/>
@@ -5533,12 +5533,12 @@
           <a:p>
             <a:pPr eaLnBrk="0" latinLnBrk="0" indent="0" marL="0">
               <a:lnSpc>
-                <a:spcPct val="130000"/>
+                <a:spcPct val="115000"/>
               </a:lnSpc>
               <a:buNone/>
             </a:pPr>
             <a:r>
-              <a:rPr lang="ko-KR" altLang="en-US" sz="1400" dirty="0">
+              <a:rPr lang="ko-KR" altLang="en-US" sz="1250" dirty="0">
                 <a:solidFill>
                   <a:srgbClr val="10231C"/>
                 </a:solidFill>
@@ -5550,12 +5550,12 @@
             </a:r>
             <a:pPr eaLnBrk="0" latinLnBrk="0" indent="0" marL="0">
               <a:lnSpc>
-                <a:spcPct val="130000"/>
+                <a:spcPct val="115000"/>
               </a:lnSpc>
               <a:buNone/>
             </a:pPr>
             <a:r>
-              <a:rPr lang="ko-KR" altLang="en-US" sz="1400" b="1" dirty="0">
+              <a:rPr lang="ko-KR" altLang="en-US" sz="1250" b="1" dirty="0">
                 <a:solidFill>
                   <a:srgbClr val="1D9E75"/>
                 </a:solidFill>
@@ -5567,21 +5567,21 @@
             </a:r>
             <a:pPr eaLnBrk="0" latinLnBrk="0" indent="0" marL="0">
               <a:lnSpc>
-                <a:spcPct val="130000"/>
+                <a:spcPct val="115000"/>
               </a:lnSpc>
               <a:buNone/>
             </a:pPr>
-            <a:endParaRPr lang="ko-KR" altLang="en-US" sz="1400" dirty="0"/>
+            <a:endParaRPr lang="ko-KR" altLang="en-US" sz="1250" dirty="0"/>
           </a:p>
           <a:p>
             <a:pPr eaLnBrk="0" latinLnBrk="0" indent="0" marL="0">
               <a:lnSpc>
-                <a:spcPct val="130000"/>
+                <a:spcPct val="115000"/>
               </a:lnSpc>
               <a:buNone/>
             </a:pPr>
             <a:r>
-              <a:rPr lang="ko-KR" altLang="en-US" sz="1400" dirty="0">
+              <a:rPr lang="ko-KR" altLang="en-US" sz="1250" dirty="0">
                 <a:solidFill>
                   <a:srgbClr val="10231C"/>
                 </a:solidFill>
@@ -5591,17 +5591,17 @@
               </a:rPr>
               <a:t>오창읍 </a:t>
             </a:r>
-            <a:endParaRPr lang="ko-KR" altLang="en-US" sz="1400" dirty="0"/>
+            <a:endParaRPr lang="ko-KR" altLang="en-US" sz="1250" dirty="0"/>
           </a:p>
           <a:p>
             <a:pPr eaLnBrk="0" latinLnBrk="0" indent="0" marL="0">
               <a:lnSpc>
-                <a:spcPct val="130000"/>
+                <a:spcPct val="115000"/>
               </a:lnSpc>
               <a:buNone/>
             </a:pPr>
             <a:r>
-              <a:rPr lang="ko-KR" altLang="en-US" sz="1400" b="1" dirty="0">
+              <a:rPr lang="ko-KR" altLang="en-US" sz="1250" b="1" dirty="0">
                 <a:solidFill>
                   <a:srgbClr val="1D9E75"/>
                 </a:solidFill>
@@ -5613,21 +5613,21 @@
             </a:r>
             <a:pPr eaLnBrk="0" latinLnBrk="0" indent="0" marL="0">
               <a:lnSpc>
-                <a:spcPct val="130000"/>
+                <a:spcPct val="115000"/>
               </a:lnSpc>
               <a:buNone/>
             </a:pPr>
-            <a:endParaRPr lang="ko-KR" altLang="en-US" sz="1400" dirty="0"/>
+            <a:endParaRPr lang="ko-KR" altLang="en-US" sz="1250" dirty="0"/>
           </a:p>
           <a:p>
             <a:pPr eaLnBrk="0" latinLnBrk="0" indent="0" marL="0">
               <a:lnSpc>
-                <a:spcPct val="130000"/>
+                <a:spcPct val="115000"/>
               </a:lnSpc>
               <a:buNone/>
             </a:pPr>
             <a:r>
-              <a:rPr lang="ko-KR" altLang="en-US" sz="1400" dirty="0">
+              <a:rPr lang="ko-KR" altLang="en-US" sz="1250" dirty="0">
                 <a:solidFill>
                   <a:srgbClr val="10231C"/>
                 </a:solidFill>
@@ -5637,17 +5637,17 @@
               </a:rPr>
               <a:t>오송역 승차의 </a:t>
             </a:r>
-            <a:endParaRPr lang="ko-KR" altLang="en-US" sz="1400" dirty="0"/>
+            <a:endParaRPr lang="ko-KR" altLang="en-US" sz="1250" dirty="0"/>
           </a:p>
           <a:p>
             <a:pPr eaLnBrk="0" latinLnBrk="0" indent="0" marL="0">
               <a:lnSpc>
-                <a:spcPct val="130000"/>
+                <a:spcPct val="115000"/>
               </a:lnSpc>
               <a:buNone/>
             </a:pPr>
             <a:r>
-              <a:rPr lang="ko-KR" altLang="en-US" sz="1400" b="1" dirty="0">
+              <a:rPr lang="ko-KR" altLang="en-US" sz="1250" b="1" dirty="0">
                 <a:solidFill>
                   <a:srgbClr val="F2A93B"/>
                 </a:solidFill>
@@ -5659,12 +5659,12 @@
             </a:r>
             <a:pPr eaLnBrk="0" latinLnBrk="0" indent="0" marL="0">
               <a:lnSpc>
-                <a:spcPct val="130000"/>
+                <a:spcPct val="115000"/>
               </a:lnSpc>
               <a:buNone/>
             </a:pPr>
             <a:r>
-              <a:rPr lang="ko-KR" altLang="en-US" sz="1400" dirty="0">
+              <a:rPr lang="ko-KR" altLang="en-US" sz="1250" dirty="0">
                 <a:solidFill>
                   <a:srgbClr val="10231C"/>
                 </a:solidFill>
@@ -5674,7 +5674,7 @@
               </a:rPr>
               <a:t>가 시내행</a:t>
             </a:r>
-            <a:endParaRPr lang="ko-KR" altLang="en-US" sz="1400" dirty="0"/>
+            <a:endParaRPr lang="ko-KR" altLang="en-US" sz="1250" dirty="0"/>
           </a:p>
         </p:txBody>
       </p:sp>
